--- a/docs/presentation.pptx
+++ b/docs/presentation.pptx
@@ -119,38 +119,38 @@
   <p:extLst>
     <p:ext uri="{521415D9-36F7-43E2-AB2F-B90AF26B5E84}">
       <p14:sectionLst xmlns:p14="http://schemas.microsoft.com/office/powerpoint/2010/main">
-        <p14:section name="Начало" id="{5b58fd25-6b94-48f9-b1b5-0c845bc4e5f3}">
+        <p14:section name="Начало" id="{3f7895b8-7f2f-c9db-3923-4943a4182f10}">
           <p14:sldIdLst>
             <p14:sldId id="256"/>
           </p14:sldIdLst>
         </p14:section>
-        <p14:section name="Проблема и решение" id="{f08dda4d-3dc2-453e-e7fb-baa06bb6b10b}">
+        <p14:section name="Проблема и решение" id="{a8cd891a-4baf-e196-1ff3-a916405fd701}">
           <p14:sldIdLst>
             <p14:sldId id="257"/>
             <p14:sldId id="258"/>
           </p14:sldIdLst>
         </p14:section>
-        <p14:section name="Демо" id="{c0769103-5465-206b-7569-136b7c08434a}">
+        <p14:section name="Демо" id="{6777b08a-3457-1527-89d8-cc763fa6f179}">
           <p14:sldIdLst>
             <p14:sldId id="259"/>
             <p14:sldId id="260"/>
             <p14:sldId id="261"/>
           </p14:sldIdLst>
         </p14:section>
-        <p14:section name="Данные и подход" id="{d7022304-3fce-a3c7-0229-0295372a0f21}">
+        <p14:section name="Данные и подход" id="{d1aeb189-8bce-8e28-b5e3-80a94ce1a30f}">
           <p14:sldIdLst>
             <p14:sldId id="262"/>
             <p14:sldId id="263"/>
             <p14:sldId id="264"/>
           </p14:sldIdLst>
         </p14:section>
-        <p14:section name="Архитектура и безопасность" id="{53fe5d13-6b70-3198-c5b6-1437ff53b18c}">
+        <p14:section name="Архитектура и безопасность" id="{9547ed48-096d-7dfb-6689-50b2b6c46a81}">
           <p14:sldIdLst>
             <p14:sldId id="265"/>
             <p14:sldId id="266"/>
           </p14:sldIdLst>
         </p14:section>
-        <p14:section name="Итоги" id="{6f9e19e3-e36b-5106-b19b-12d2519b9956}">
+        <p14:section name="Итоги" id="{b4a0e2b2-7cf7-e244-a886-0da0d8f28a93}">
           <p14:sldIdLst>
             <p14:sldId id="267"/>
             <p14:sldId id="268"/>
@@ -1793,7 +1793,7 @@
           <a:p>
             <a:r>
               <a:rPr lang="en-US" dirty="0"/>
-              <a:t>Входим, видим одну фразу: через 5 дней, 28 октября, может не хватить 685 000 ₽. Ниже причина: налоги и кредит раньше, чем придут деньги от клиента, и первое, что можно сделать. Наводим на график: линия — ожидаемый остаток, полоса — возможный диапазон, красная зона — денег нет.</a:t>
+              <a:t>Входим, видим одну фразу: через 13 дней, 5 ноября, может не хватить 685 000 ₽, вероятность 97%. Ниже причина: 5 ноября зарплата 956 тыс. ₽ и аренда, а крупный клиент задерживает 2,3 млн ₽, и первое, что можно сделать — попросить его заплатить до 5 ноября. Наводим на график: линия — ожидаемый остаток, полоса — возможный диапазон, красная зона — денег нет.</a:t>
             </a:r>
             <a:endParaRPr lang="en-US" dirty="0"/>
           </a:p>
@@ -1881,7 +1881,7 @@
           <a:p>
             <a:r>
               <a:rPr lang="en-US" dirty="0"/>
-              <a:t>Предприниматель проверяет свои страхи. Задержка крупного клиента на 3 недели: разрыв глубже и дольше. Оба прогноза на одном графике.</a:t>
+              <a:t>Предприниматель проверяет свои страхи. Задержка крупного клиента на 3 недели: разрыв останется 5 ноября, но не хватит уже 936 000 ₽ вместо 685 000 ₽ и продлится дольше. Оба прогноза на одном графике.</a:t>
             </a:r>
             <a:endParaRPr lang="en-US" dirty="0"/>
           </a:p>
@@ -5197,7 +5197,7 @@
                   <a:schemeClr val="tx1"/>
                 </a:solidFill>
               </a:rPr>
-              <a:t>Светофор и одна фраза простыми словами: «через 5 дней может не хватить 685 000 ₽»</a:t>
+              <a:t>Светофор и одна фраза простыми словами: «через 13 дней, 5 ноября, может не хватить 685 000 ₽»</a:t>
             </a:r>
             <a:endParaRPr lang="en-US" sz="1200" dirty="0"/>
           </a:p>
@@ -5443,12 +5443,12 @@
         </p:nvSpPr>
         <p:spPr>
           <a:xfrm>
-            <a:off x="4160520" y="2148172"/>
-            <a:ext cx="4526280" cy="1418656"/>
+            <a:off x="4160520" y="2190584"/>
+            <a:ext cx="4526280" cy="1333833"/>
           </a:xfrm>
           <a:prstGeom prst="roundRect">
             <a:avLst>
-              <a:gd name="adj" fmla="val 5156"/>
+              <a:gd name="adj" fmla="val 5484"/>
             </a:avLst>
           </a:prstGeom>
           <a:solidFill>
@@ -5480,8 +5480,8 @@
         </p:blipFill>
         <p:spPr>
           <a:xfrm>
-            <a:off x="4233672" y="2221324"/>
-            <a:ext cx="4379976" cy="1272352"/>
+            <a:off x="4233672" y="2263736"/>
+            <a:ext cx="4379976" cy="1187529"/>
           </a:xfrm>
           <a:prstGeom prst="rect">
             <a:avLst/>

--- a/docs/presentation.pptx
+++ b/docs/presentation.pptx
@@ -16,11 +16,9 @@
     <p:sldId id="264" r:id="rId10"/>
     <p:sldId id="265" r:id="rId11"/>
     <p:sldId id="266" r:id="rId12"/>
-    <p:sldId id="267" r:id="rId13"/>
-    <p:sldId id="268" r:id="rId14"/>
   </p:sldIdLst>
   <p:notesMasterIdLst>
-    <p:notesMasterId r:id="rId15"/>
+    <p:notesMasterId r:id="rId13"/>
   </p:notesMasterIdLst>
   <p:sldSz cx="9144000" cy="5143500"/>
   <p:notesSz cx="5143500" cy="9144000"/>
@@ -119,41 +117,39 @@
   <p:extLst>
     <p:ext uri="{521415D9-36F7-43E2-AB2F-B90AF26B5E84}">
       <p14:sectionLst xmlns:p14="http://schemas.microsoft.com/office/powerpoint/2010/main">
-        <p14:section name="Начало" id="{3f7895b8-7f2f-c9db-3923-4943a4182f10}">
+        <p14:section name="Начало" id="{87a99298-e464-7061-509c-7fcf66e2a7f5}">
           <p14:sldIdLst>
             <p14:sldId id="256"/>
           </p14:sldIdLst>
         </p14:section>
-        <p14:section name="Проблема и решение" id="{a8cd891a-4baf-e196-1ff3-a916405fd701}">
+        <p14:section name="Проблема и решение" id="{be7265e6-2046-0d09-4a93-d77c332397a0}">
           <p14:sldIdLst>
             <p14:sldId id="257"/>
             <p14:sldId id="258"/>
           </p14:sldIdLst>
         </p14:section>
-        <p14:section name="Демо" id="{6777b08a-3457-1527-89d8-cc763fa6f179}">
+        <p14:section name="Демо" id="{7c1fa5e9-6669-ab11-7a38-10e484dd89fd}">
           <p14:sldIdLst>
             <p14:sldId id="259"/>
             <p14:sldId id="260"/>
-            <p14:sldId id="261"/>
           </p14:sldIdLst>
         </p14:section>
-        <p14:section name="Данные и подход" id="{d1aeb189-8bce-8e28-b5e3-80a94ce1a30f}">
+        <p14:section name="Данные и подход" id="{10213b8c-9d4c-e8a1-c2ff-e22ca0b654e2}">
           <p14:sldIdLst>
+            <p14:sldId id="261"/>
             <p14:sldId id="262"/>
             <p14:sldId id="263"/>
+          </p14:sldIdLst>
+        </p14:section>
+        <p14:section name="Архитектура" id="{8438b6c8-cc41-2718-7156-8b5dc11ddd73}">
+          <p14:sldIdLst>
             <p14:sldId id="264"/>
           </p14:sldIdLst>
         </p14:section>
-        <p14:section name="Архитектура и безопасность" id="{9547ed48-096d-7dfb-6689-50b2b6c46a81}">
+        <p14:section name="Итоги" id="{e7aba5e4-c73b-bddf-46c8-18293ee7dadf}">
           <p14:sldIdLst>
             <p14:sldId id="265"/>
             <p14:sldId id="266"/>
-          </p14:sldIdLst>
-        </p14:section>
-        <p14:section name="Итоги" id="{b4a0e2b2-7cf7-e244-a886-0da0d8f28a93}">
-          <p14:sldIdLst>
-            <p14:sldId id="267"/>
-            <p14:sldId id="268"/>
           </p14:sldIdLst>
         </p14:section>
       </p14:sectionLst>
@@ -191,7 +187,7 @@
                 </a:solidFill>
                 <a:latin typeface="+mn-lt"/>
               </a:rPr>
-              <a:t>Средняя ошибка остатка на 30 дней, млн ₽ (S02)</a:t>
+              <a:t>Ошибка остатка на 30 дней, млн ₽ (демо-компания S02)</a:t>
             </a:r>
           </a:p>
         </c:rich>
@@ -1177,7 +1173,7 @@
           <a:p>
             <a:r>
               <a:rPr lang="en-US" dirty="0"/>
-              <a:t>Малый бизнес часто закрывается не из-за убытков, а потому что в нужный день на счёте нет денег. Наш сервис заранее говорит предпринимателю: хватит ли денег, когда не хватит и что делать.</a:t>
+              <a:t>Ведущий (10 с): Малый бизнес часто закрывается не из-за убытков, а потому что в нужный день на счёте нет денег. Мы сделали сервис, который за две недели говорит: когда не хватит, сколько и что сделать.</a:t>
             </a:r>
             <a:endParaRPr lang="en-US" dirty="0"/>
           </a:p>
@@ -1265,7 +1261,7 @@
           <a:p>
             <a:r>
               <a:rPr lang="en-US" dirty="0"/>
-              <a:t>Ядро — независимый Python-пакет, API — по открытому контракту docs/contract.md. Встраивается в интернет-банк как виджет.</a:t>
+              <a:t>Ведущий (20 с): Все звёздочки на слайде работают в прототипе — их можно проверить по ссылке. Дальше — встроить в интернет-банк: выписка у банка уже есть.</a:t>
             </a:r>
             <a:endParaRPr lang="en-US" dirty="0"/>
           </a:p>
@@ -1353,7 +1349,7 @@
           <a:p>
             <a:r>
               <a:rPr lang="en-US" dirty="0"/>
-              <a:t>Подробности — api/README.md, раздел «Безопасность»; фильтр логов — api/logging_setup.py.</a:t>
+              <a:t>Ведущий (10 с): Спасибо! Прототип открыт по ссылке — нажмите «Посмотреть демо».</a:t>
             </a:r>
             <a:endParaRPr lang="en-US" dirty="0"/>
           </a:p>
@@ -1377,182 +1373,6 @@
             <a:fld id="{F7021451-1387-4CA6-816F-3879F97B5CBC}" type="slidenum">
               <a:rPr lang="en-US"/>
               <a:t>11</a:t>
-            </a:fld>
-            <a:endParaRPr lang="en-US"/>
-          </a:p>
-        </p:txBody>
-      </p:sp>
-    </p:spTree>
-    <p:extLst>
-      <p:ext uri="{BB962C8B-B14F-4D97-AF65-F5344CB8AC3E}">
-        <p14:creationId xmlns:p14="http://schemas.microsoft.com/office/powerpoint/2010/main" val="1024086991"/>
-      </p:ext>
-    </p:extLst>
-  </p:cSld>
-  <p:clrMapOvr>
-    <a:masterClrMapping/>
-  </p:clrMapOvr>
-</p:notes>
-</file>
-
-<file path=ppt/notesSlides/notesSlide12.xml><?xml version="1.0" encoding="utf-8"?>
-<p:notes xmlns:a="http://schemas.openxmlformats.org/drawingml/2006/main" xmlns:r="http://schemas.openxmlformats.org/officeDocument/2006/relationships" xmlns:p="http://schemas.openxmlformats.org/presentationml/2006/main">
-  <p:cSld>
-    <p:spTree>
-      <p:nvGrpSpPr>
-        <p:cNvPr id="1" name=""/>
-        <p:cNvGrpSpPr/>
-        <p:nvPr/>
-      </p:nvGrpSpPr>
-      <p:grpSpPr>
-        <a:xfrm>
-          <a:off x="0" y="0"/>
-          <a:ext cx="0" cy="0"/>
-          <a:chOff x="0" y="0"/>
-          <a:chExt cx="0" cy="0"/>
-        </a:xfrm>
-      </p:grpSpPr>
-      <p:sp>
-        <p:nvSpPr>
-          <p:cNvPr id="2" name="Slide Image Placeholder 1"/>
-          <p:cNvSpPr>
-            <a:spLocks noGrp="1" noRot="1" noChangeAspect="1"/>
-          </p:cNvSpPr>
-          <p:nvPr>
-            <p:ph type="sldImg"/>
-          </p:nvPr>
-        </p:nvSpPr>
-        <p:spPr/>
-      </p:sp>
-      <p:sp>
-        <p:nvSpPr>
-          <p:cNvPr id="3" name="Notes Placeholder 2"/>
-          <p:cNvSpPr>
-            <a:spLocks noGrp="1"/>
-          </p:cNvSpPr>
-          <p:nvPr>
-            <p:ph type="body" idx="1"/>
-          </p:nvPr>
-        </p:nvSpPr>
-        <p:spPr/>
-        <p:txBody>
-          <a:bodyPr/>
-          <a:lstStyle/>
-          <a:p>
-            <a:r>
-              <a:rPr lang="en-US" dirty="0"/>
-              <a:t>Пакетный прогноз для контрольного датасета: python -m api.predict — все 150 компаний за 85 с на 4 процессах, детерминированно.</a:t>
-            </a:r>
-            <a:endParaRPr lang="en-US" dirty="0"/>
-          </a:p>
-        </p:txBody>
-      </p:sp>
-      <p:sp>
-        <p:nvSpPr>
-          <p:cNvPr id="4" name="Slide Number Placeholder 3"/>
-          <p:cNvSpPr>
-            <a:spLocks noGrp="1"/>
-          </p:cNvSpPr>
-          <p:nvPr>
-            <p:ph type="sldNum" sz="quarter" idx="10"/>
-          </p:nvPr>
-        </p:nvSpPr>
-        <p:spPr/>
-        <p:txBody>
-          <a:bodyPr/>
-          <a:lstStyle/>
-          <a:p>
-            <a:fld id="{F7021451-1387-4CA6-816F-3879F97B5CBC}" type="slidenum">
-              <a:rPr lang="en-US"/>
-              <a:t>12</a:t>
-            </a:fld>
-            <a:endParaRPr lang="en-US"/>
-          </a:p>
-        </p:txBody>
-      </p:sp>
-    </p:spTree>
-    <p:extLst>
-      <p:ext uri="{BB962C8B-B14F-4D97-AF65-F5344CB8AC3E}">
-        <p14:creationId xmlns:p14="http://schemas.microsoft.com/office/powerpoint/2010/main" val="1024086991"/>
-      </p:ext>
-    </p:extLst>
-  </p:cSld>
-  <p:clrMapOvr>
-    <a:masterClrMapping/>
-  </p:clrMapOvr>
-</p:notes>
-</file>
-
-<file path=ppt/notesSlides/notesSlide13.xml><?xml version="1.0" encoding="utf-8"?>
-<p:notes xmlns:a="http://schemas.openxmlformats.org/drawingml/2006/main" xmlns:r="http://schemas.openxmlformats.org/officeDocument/2006/relationships" xmlns:p="http://schemas.openxmlformats.org/presentationml/2006/main">
-  <p:cSld>
-    <p:spTree>
-      <p:nvGrpSpPr>
-        <p:cNvPr id="1" name=""/>
-        <p:cNvGrpSpPr/>
-        <p:nvPr/>
-      </p:nvGrpSpPr>
-      <p:grpSpPr>
-        <a:xfrm>
-          <a:off x="0" y="0"/>
-          <a:ext cx="0" cy="0"/>
-          <a:chOff x="0" y="0"/>
-          <a:chExt cx="0" cy="0"/>
-        </a:xfrm>
-      </p:grpSpPr>
-      <p:sp>
-        <p:nvSpPr>
-          <p:cNvPr id="2" name="Slide Image Placeholder 1"/>
-          <p:cNvSpPr>
-            <a:spLocks noGrp="1" noRot="1" noChangeAspect="1"/>
-          </p:cNvSpPr>
-          <p:nvPr>
-            <p:ph type="sldImg"/>
-          </p:nvPr>
-        </p:nvSpPr>
-        <p:spPr/>
-      </p:sp>
-      <p:sp>
-        <p:nvSpPr>
-          <p:cNvPr id="3" name="Notes Placeholder 2"/>
-          <p:cNvSpPr>
-            <a:spLocks noGrp="1"/>
-          </p:cNvSpPr>
-          <p:nvPr>
-            <p:ph type="body" idx="1"/>
-          </p:nvPr>
-        </p:nvSpPr>
-        <p:spPr/>
-        <p:txBody>
-          <a:bodyPr/>
-          <a:lstStyle/>
-          <a:p>
-            <a:r>
-              <a:rPr lang="en-US" dirty="0"/>
-              <a:t>Спасибо! Готовы показать сервис вживую и ответить на вопросы.</a:t>
-            </a:r>
-            <a:endParaRPr lang="en-US" dirty="0"/>
-          </a:p>
-        </p:txBody>
-      </p:sp>
-      <p:sp>
-        <p:nvSpPr>
-          <p:cNvPr id="4" name="Slide Number Placeholder 3"/>
-          <p:cNvSpPr>
-            <a:spLocks noGrp="1"/>
-          </p:cNvSpPr>
-          <p:nvPr>
-            <p:ph type="sldNum" sz="quarter" idx="10"/>
-          </p:nvPr>
-        </p:nvSpPr>
-        <p:spPr/>
-        <p:txBody>
-          <a:bodyPr/>
-          <a:lstStyle/>
-          <a:p>
-            <a:fld id="{F7021451-1387-4CA6-816F-3879F97B5CBC}" type="slidenum">
-              <a:rPr lang="en-US"/>
-              <a:t>13</a:t>
             </a:fld>
             <a:endParaRPr lang="en-US"/>
           </a:p>
@@ -1617,7 +1437,7 @@
           <a:p>
             <a:r>
               <a:rPr lang="en-US" dirty="0"/>
-              <a:t>Бизнес прибыльный, но деньги приходят с задержкой, а зарплата, ЕНП 28-го, аренда и кредит — по расписанию. Это реальный сценарий демо-компании S02: остаток действительно ушёл в минус 5 ноября, и наш прогноз предупредил об этом за 13 дней.</a:t>
+              <a:t>Ведущий (25 с): Это реальная выписка из датасета организаторов. IT-компания, прибыльная. 16 сентября на счёте 2,9 миллиона. В конце месяца налог и зарплата, клиент платит только 3 октября — и 1 октября на счёте минус 471 тысяча, банк берёт проценты за овердрафт.</a:t>
             </a:r>
             <a:endParaRPr lang="en-US" dirty="0"/>
           </a:p>
@@ -1705,7 +1525,7 @@
           <a:p>
             <a:r>
               <a:rPr lang="en-US" dirty="0"/>
-              <a:t>Цель кейса: прогноз остатка по дням минимум на 30 дней, кассовые разрывы с датой, суммой и вероятностью, понятно для предпринимателя. Всё это — на главном экране.</a:t>
+              <a:t>Ведущий (20 с): Цель кейса — прогноз остатка по дням на 30+ дней, разрыв с датой, суммой и вероятностью, понятно человеку без финансового образования. Всё это — на главном экране.</a:t>
             </a:r>
             <a:endParaRPr lang="en-US" dirty="0"/>
           </a:p>
@@ -1793,7 +1613,7 @@
           <a:p>
             <a:r>
               <a:rPr lang="en-US" dirty="0"/>
-              <a:t>Входим, видим одну фразу: через 13 дней, 5 ноября, может не хватить 685 000 ₽, вероятность 97%. Ниже причина: 5 ноября зарплата 956 тыс. ₽ и аренда, а крупный клиент задерживает 2,3 млн ₽, и первое, что можно сделать — попросить его заплатить до 5 ноября. Наводим на график: линия — ожидаемый остаток, полоса — возможный диапазон, красная зона — денег нет.</a:t>
+              <a:t>Оператор (60 с): Нажимаем «Посмотреть демо», загружаем выписку этой компании по 16 сентября — будущего сервис не видит. Подключаем налоговый календарь. Главная: через 14 дней, 30 сентября, может не хватить 678 тысяч, вероятность 98%, и первое действие. Ведущий: на самом деле разрыв случился ровно 30 сентября, минус 472 тысячи. Сумму мы назвали больше: налог оценили выше факта.</a:t>
             </a:r>
             <a:endParaRPr lang="en-US" dirty="0"/>
           </a:p>
@@ -1881,7 +1701,7 @@
           <a:p>
             <a:r>
               <a:rPr lang="en-US" dirty="0"/>
-              <a:t>Предприниматель проверяет свои страхи. Задержка крупного клиента на 3 недели: разрыв останется 5 ноября, но не хватит уже 936 000 ₽ вместо 685 000 ₽ и продлится дольше. Оба прогноза на одном графике.</a:t>
+              <a:t>Оператор (40 с): «Что если»: клиент заплатит на три недели позже — нехватка вырастает до 1,47 миллиона. Платежи и источники: подключаем налоговый календарь, добавляем платёж обычной фразой — прогноз на главной меняется сразу.</a:t>
             </a:r>
             <a:endParaRPr lang="en-US" dirty="0"/>
           </a:p>
@@ -1969,7 +1789,7 @@
           <a:p>
             <a:r>
               <a:rPr lang="en-US" dirty="0"/>
-              <a:t>Сравниваем план с фактом. Клиент не заплатил в срок — одной кнопкой пересчитываем прогноз. Кроме выписки учитываем 1С, налоговый календарь, банк, открытые реестры и ручной ввод.</a:t>
+              <a:t>Ведущий (25 с): Источники: api/reports/sources_effect.md — прогноз на 30 дней сравнивается с «как было на самом деле». 1С и банк в прототипе — загрузка выгрузок (в демо тестовые файлы), реестры — демонстрационная проверка по ИНН, налоговый календарь считается по выписке.</a:t>
             </a:r>
             <a:endParaRPr lang="en-US" dirty="0"/>
           </a:p>
@@ -2057,7 +1877,7 @@
           <a:p>
             <a:r>
               <a:rPr lang="en-US" dirty="0"/>
-              <a:t>Источник: api/reports/sources_effect.md — прогноз на 30 дней сравнивается с тем, что было на самом деле. На реальных выписках организаторов (holdout, 38 компаний) налоговый календарь улучшает прогноз в 18 компаниях из 38.</a:t>
+              <a:t>Ведущий (20 с): Модель объяснимая: каждая сумма в причине подписана источником. Прогноз детерминированный, работает без сети, на 150 компаниях — около 30 секунд.</a:t>
             </a:r>
             <a:endParaRPr lang="en-US" dirty="0"/>
           </a:p>
@@ -2145,7 +1965,7 @@
           <a:p>
             <a:r>
               <a:rPr lang="en-US" dirty="0"/>
-              <a:t>Модель не чёрный ящик: каждая сумма в причине риска подписана источником — «из выписки», «налоговый календарь», «из 1С».</a:t>
+              <a:t>Ведущий (25 с): Источник: core/reports/metrics.md, перепроверено запуском cashflow_core.evaluate. Точность предупреждений о разрыве — 46%: каждое второе предупреждение ложное, но пропущенный разрыв для владельца дороже.</a:t>
             </a:r>
             <a:endParaRPr lang="en-US" dirty="0"/>
           </a:p>
@@ -2233,7 +2053,7 @@
           <a:p>
             <a:r>
               <a:rPr lang="en-US" dirty="0"/>
-              <a:t>Источник: core/reports/metrics.md. Precision предупреждений о разрыве — 46%: каждое второе предупреждение — ложное, но цена пропущенного разрыва для владельца выше. Категоризация со скрытым назначением платежа: accuracy 97%.</a:t>
+              <a:t>Ведущий (20 с): Три части по общему контракту. Прототип открыт по HTTPS, демо — в один клик, у каждого гостя своя копия компании.</a:t>
             </a:r>
             <a:endParaRPr lang="en-US" dirty="0"/>
           </a:p>
@@ -3072,7 +2892,7 @@
                   <a:srgbClr val="CFE2D6"/>
                 </a:solidFill>
               </a:rPr>
-              <a:t>Предприниматель за 10 секунд понимает: хватит ли денег в ближайший месяц, когда не хватит и что делать</a:t>
+              <a:t>Предупреждаем предпринимателя о кассовом разрыве за 2 недели — и подсказываем, что сделать</a:t>
             </a:r>
             <a:endParaRPr lang="en-US" sz="1800" dirty="0"/>
           </a:p>
@@ -3135,15 +2955,232 @@
                   <a:schemeClr val="tx2"/>
                 </a:solidFill>
               </a:rPr>
-              <a:t>Архитектура решения</a:t>
+              <a:t>Сделано сверх минимума и что дальше</a:t>
             </a:r>
             <a:endParaRPr lang="en-US" sz="2600" dirty="0"/>
           </a:p>
         </p:txBody>
+      </p:sp>
+      <p:sp>
+        <p:nvSpPr>
+          <p:cNvPr id="3" name="done card"/>
+          <p:cNvSpPr/>
+          <p:nvPr/>
+        </p:nvSpPr>
+        <p:spPr>
+          <a:xfrm>
+            <a:off x="457200" y="1051560"/>
+            <a:ext cx="4023360" cy="3566160"/>
+          </a:xfrm>
+          <a:prstGeom prst="roundRect">
+            <a:avLst>
+              <a:gd name="adj" fmla="val 2564"/>
+            </a:avLst>
+          </a:prstGeom>
+          <a:solidFill>
+            <a:schemeClr val="bg2"/>
+          </a:solidFill>
+          <a:ln/>
+        </p:spPr>
+      </p:sp>
+      <p:sp>
+        <p:nvSpPr>
+          <p:cNvPr id="4" name="done title"/>
+          <p:cNvSpPr txBox="1"/>
+          <p:nvPr/>
+        </p:nvSpPr>
+        <p:spPr>
+          <a:xfrm>
+            <a:off x="685800" y="1188720"/>
+            <a:ext cx="3657600" cy="320040"/>
+          </a:xfrm>
+          <a:prstGeom prst="rect">
+            <a:avLst/>
+          </a:prstGeom>
+          <a:noFill/>
+          <a:ln/>
+        </p:spPr>
+        <p:txBody>
+          <a:bodyPr wrap="square" lIns="0" tIns="0" rIns="0" bIns="0" rtlCol="0" anchor="ctr"/>
+          <a:lstStyle/>
+          <a:p>
+            <a:pPr indent="0" marL="0">
+              <a:buNone/>
+            </a:pPr>
+            <a:r>
+              <a:rPr lang="en-US" sz="1600" b="1" dirty="0">
+                <a:solidFill>
+                  <a:schemeClr val="accent2"/>
+                </a:solidFill>
+              </a:rPr>
+              <a:t>Работает в прототипе</a:t>
+            </a:r>
+            <a:endParaRPr lang="en-US" sz="1600" dirty="0"/>
+          </a:p>
+        </p:txBody>
+      </p:sp>
+      <p:sp>
+        <p:nvSpPr>
+          <p:cNvPr id="5" name="done list"/>
+          <p:cNvSpPr txBox="1"/>
+          <p:nvPr/>
+        </p:nvSpPr>
+        <p:spPr>
+          <a:xfrm>
+            <a:off x="685800" y="1600200"/>
+            <a:ext cx="3657600" cy="2926080"/>
+          </a:xfrm>
+          <a:prstGeom prst="rect">
+            <a:avLst/>
+          </a:prstGeom>
+          <a:noFill/>
+          <a:ln/>
+        </p:spPr>
+        <p:txBody>
+          <a:bodyPr wrap="square" lIns="0" tIns="0" rIns="0" bIns="0" rtlCol="0" anchor="t"/>
+          <a:lstStyle/>
+          <a:p>
+            <a:pPr marL="342900" indent="-342900">
+              <a:spcAft>
+                <a:spcPts val="500"/>
+              </a:spcAft>
+              <a:buSzPct val="100000"/>
+              <a:buChar char="•"/>
+            </a:pPr>
+            <a:r>
+              <a:rPr lang="en-US" sz="1300" dirty="0">
+                <a:solidFill>
+                  <a:schemeClr val="tx1"/>
+                </a:solidFill>
+              </a:rPr>
+              <a:t>внешние события: 1С, банк, налоги, реестры</a:t>
+            </a:r>
+            <a:endParaRPr lang="en-US" sz="1300" dirty="0"/>
+          </a:p>
+          <a:p>
+            <a:pPr marL="342900" indent="-342900">
+              <a:spcAft>
+                <a:spcPts val="500"/>
+              </a:spcAft>
+              <a:buSzPct val="100000"/>
+              <a:buChar char="•"/>
+            </a:pPr>
+            <a:r>
+              <a:rPr lang="en-US" sz="1300" dirty="0">
+                <a:solidFill>
+                  <a:schemeClr val="tx1"/>
+                </a:solidFill>
+              </a:rPr>
+              <a:t>ручной ввод — формой и обычной фразой</a:t>
+            </a:r>
+            <a:endParaRPr lang="en-US" sz="1300" dirty="0"/>
+          </a:p>
+          <a:p>
+            <a:pPr marL="342900" indent="-342900">
+              <a:spcAft>
+                <a:spcPts val="500"/>
+              </a:spcAft>
+              <a:buSzPct val="100000"/>
+              <a:buChar char="•"/>
+            </a:pPr>
+            <a:r>
+              <a:rPr lang="en-US" sz="1300" dirty="0">
+                <a:solidFill>
+                  <a:schemeClr val="tx1"/>
+                </a:solidFill>
+              </a:rPr>
+              <a:t>«что если» по 4 сценариям</a:t>
+            </a:r>
+            <a:endParaRPr lang="en-US" sz="1300" dirty="0"/>
+          </a:p>
+          <a:p>
+            <a:pPr marL="342900" indent="-342900">
+              <a:spcAft>
+                <a:spcPts val="500"/>
+              </a:spcAft>
+              <a:buSzPct val="100000"/>
+              <a:buChar char="•"/>
+            </a:pPr>
+            <a:r>
+              <a:rPr lang="en-US" sz="1300" dirty="0">
+                <a:solidFill>
+                  <a:schemeClr val="tx1"/>
+                </a:solidFill>
+              </a:rPr>
+              <a:t>план-факт с пересчётом прогноза</a:t>
+            </a:r>
+            <a:endParaRPr lang="en-US" sz="1300" dirty="0"/>
+          </a:p>
+          <a:p>
+            <a:pPr marL="342900" indent="-342900">
+              <a:spcAft>
+                <a:spcPts val="500"/>
+              </a:spcAft>
+              <a:buSzPct val="100000"/>
+              <a:buChar char="•"/>
+            </a:pPr>
+            <a:r>
+              <a:rPr lang="en-US" sz="1300" dirty="0">
+                <a:solidFill>
+                  <a:schemeClr val="tx1"/>
+                </a:solidFill>
+              </a:rPr>
+              <a:t>прогноз для 150 компаний одной командой</a:t>
+            </a:r>
+            <a:endParaRPr lang="en-US" sz="1300" dirty="0"/>
+          </a:p>
+          <a:p>
+            <a:pPr marL="342900" indent="-342900">
+              <a:spcAft>
+                <a:spcPts val="500"/>
+              </a:spcAft>
+              <a:buSzPct val="100000"/>
+              <a:buChar char="•"/>
+            </a:pPr>
+            <a:r>
+              <a:rPr lang="en-US" sz="1300" dirty="0">
+                <a:solidFill>
+                  <a:schemeClr val="tx1"/>
+                </a:solidFill>
+              </a:rPr>
+              <a:t>телефон, планшет, ноутбук</a:t>
+            </a:r>
+            <a:endParaRPr lang="en-US" sz="1300" dirty="0"/>
+          </a:p>
+        </p:txBody>
+      </p:sp>
+      <p:sp>
+        <p:nvSpPr>
+          <p:cNvPr id="6" name="mobile screenshot frame"/>
+          <p:cNvSpPr/>
+          <p:nvPr/>
+        </p:nvSpPr>
+        <p:spPr>
+          <a:xfrm>
+            <a:off x="4663440" y="1138827"/>
+            <a:ext cx="1645920" cy="3391627"/>
+          </a:xfrm>
+          <a:prstGeom prst="roundRect">
+            <a:avLst>
+              <a:gd name="adj" fmla="val 4444"/>
+            </a:avLst>
+          </a:prstGeom>
+          <a:solidFill>
+            <a:schemeClr val="tx2"/>
+          </a:solidFill>
+          <a:ln/>
+          <a:effectLst>
+            <a:outerShdw sx="100000" sy="100000" kx="0" ky="0" algn="bl" rotWithShape="0" blurRad="101600" dist="38100" dir="5400000">
+              <a:srgbClr val="000000">
+                <a:alpha val="18000"/>
+              </a:srgbClr>
+            </a:outerShdw>
+          </a:effectLst>
+        </p:spPr>
       </p:sp>
       <p:pic>
         <p:nvPicPr>
-          <p:cNvPr id="3" name="architecture diagram" descr="/Users/alex/Documents/HAKATON/cashflow/docs/architecture_slide.png">    </p:cNvPr>
+          <p:cNvPr id="7" name="mobile screenshot" descr="/Users/alex/Documents/HAKATON/cashflow/docs/screens/10_telefon.png">    </p:cNvPr>
           <p:cNvPicPr>
             <a:picLocks noChangeAspect="1"/>
           </p:cNvPicPr>
@@ -3157,8 +3194,8 @@
         </p:blipFill>
         <p:spPr>
           <a:xfrm>
-            <a:off x="1877807" y="1005840"/>
-            <a:ext cx="5388386" cy="3154680"/>
+            <a:off x="4736592" y="1211979"/>
+            <a:ext cx="1499616" cy="3245323"/>
           </a:xfrm>
           <a:prstGeom prst="rect">
             <a:avLst/>
@@ -3167,14 +3204,14 @@
       </p:pic>
       <p:sp>
         <p:nvSpPr>
-          <p:cNvPr id="4" name="architecture caption"/>
+          <p:cNvPr id="8" name="next title"/>
           <p:cNvSpPr txBox="1"/>
           <p:nvPr/>
         </p:nvSpPr>
         <p:spPr>
           <a:xfrm>
-            <a:off x="457200" y="4251960"/>
-            <a:ext cx="8229600" cy="365760"/>
+            <a:off x="6537960" y="1188720"/>
+            <a:ext cx="2148840" cy="320040"/>
           </a:xfrm>
           <a:prstGeom prst="rect">
             <a:avLst/>
@@ -3190,12 +3227,106 @@
               <a:buNone/>
             </a:pPr>
             <a:r>
+              <a:rPr lang="en-US" sz="1600" b="1" dirty="0">
+                <a:solidFill>
+                  <a:schemeClr val="accent2"/>
+                </a:solidFill>
+              </a:rPr>
+              <a:t>Дальше</a:t>
+            </a:r>
+            <a:endParaRPr lang="en-US" sz="1600" dirty="0"/>
+          </a:p>
+        </p:txBody>
+      </p:sp>
+      <p:sp>
+        <p:nvSpPr>
+          <p:cNvPr id="9" name="next list"/>
+          <p:cNvSpPr txBox="1"/>
+          <p:nvPr/>
+        </p:nvSpPr>
+        <p:spPr>
+          <a:xfrm>
+            <a:off x="6537960" y="1600200"/>
+            <a:ext cx="2148840" cy="2926080"/>
+          </a:xfrm>
+          <a:prstGeom prst="rect">
+            <a:avLst/>
+          </a:prstGeom>
+          <a:noFill/>
+          <a:ln/>
+        </p:spPr>
+        <p:txBody>
+          <a:bodyPr wrap="square" lIns="0" tIns="0" rIns="0" bIns="0" rtlCol="0" anchor="t"/>
+          <a:lstStyle/>
+          <a:p>
+            <a:pPr marL="342900" indent="-342900">
+              <a:spcAft>
+                <a:spcPts val="500"/>
+              </a:spcAft>
+              <a:buSzPct val="100000"/>
+              <a:buChar char="•"/>
+            </a:pPr>
+            <a:r>
               <a:rPr lang="en-US" sz="1200" dirty="0">
                 <a:solidFill>
-                  <a:schemeClr val="tx2"/>
-                </a:solidFill>
-              </a:rPr>
-              <a:t>web (React) → API (FastAPI, JWT, SQLite, интеграции) → ядро cashflow_core (Python). Контракт JSON — общий для всех частей.</a:t>
+                  <a:schemeClr val="tx1"/>
+                </a:solidFill>
+              </a:rPr>
+              <a:t>виджет в интернет-банке: выписка уже в банке</a:t>
+            </a:r>
+            <a:endParaRPr lang="en-US" sz="1200" dirty="0"/>
+          </a:p>
+          <a:p>
+            <a:pPr marL="342900" indent="-342900">
+              <a:spcAft>
+                <a:spcPts val="500"/>
+              </a:spcAft>
+              <a:buSzPct val="100000"/>
+              <a:buChar char="•"/>
+            </a:pPr>
+            <a:r>
+              <a:rPr lang="en-US" sz="1200" dirty="0">
+                <a:solidFill>
+                  <a:schemeClr val="tx1"/>
+                </a:solidFill>
+              </a:rPr>
+              <a:t>уведомление за 2 недели до разрыва</a:t>
+            </a:r>
+            <a:endParaRPr lang="en-US" sz="1200" dirty="0"/>
+          </a:p>
+          <a:p>
+            <a:pPr marL="342900" indent="-342900">
+              <a:spcAft>
+                <a:spcPts val="500"/>
+              </a:spcAft>
+              <a:buSzPct val="100000"/>
+              <a:buChar char="•"/>
+            </a:pPr>
+            <a:r>
+              <a:rPr lang="en-US" sz="1200" dirty="0">
+                <a:solidFill>
+                  <a:schemeClr val="tx1"/>
+                </a:solidFill>
+              </a:rPr>
+              <a:t>овердрафт прямо из предупреждения</a:t>
+            </a:r>
+            <a:endParaRPr lang="en-US" sz="1200" dirty="0"/>
+          </a:p>
+          <a:p>
+            <a:pPr marL="342900" indent="-342900">
+              <a:spcAft>
+                <a:spcPts val="500"/>
+              </a:spcAft>
+              <a:buSzPct val="100000"/>
+              <a:buChar char="•"/>
+            </a:pPr>
+            <a:r>
+              <a:rPr lang="en-US" sz="1200" dirty="0">
+                <a:solidFill>
+                  <a:schemeClr val="tx1"/>
+                </a:solidFill>
+              </a:rPr>
+              <a:t>настоящие API 1С и ФНС</a:t>
             </a:r>
             <a:endParaRPr lang="en-US" sz="1200" dirty="0"/>
           </a:p>
@@ -3281,1163 +3412,6 @@
         </p:nvSpPr>
         <p:spPr>
           <a:xfrm>
-            <a:off x="457200" y="274320"/>
-            <a:ext cx="8229600" cy="640080"/>
-          </a:xfrm>
-          <a:prstGeom prst="rect">
-            <a:avLst/>
-          </a:prstGeom>
-          <a:noFill/>
-          <a:ln/>
-        </p:spPr>
-        <p:txBody>
-          <a:bodyPr wrap="square" lIns="0" tIns="0" rIns="0" bIns="0" rtlCol="0" anchor="ctr"/>
-          <a:lstStyle/>
-          <a:p>
-            <a:pPr algn="l" indent="0" marL="0">
-              <a:buNone/>
-            </a:pPr>
-            <a:r>
-              <a:rPr lang="en-US" sz="2600" b="1" dirty="0">
-                <a:solidFill>
-                  <a:schemeClr val="tx2"/>
-                </a:solidFill>
-              </a:rPr>
-              <a:t>Безопасность данных клиента</a:t>
-            </a:r>
-            <a:endParaRPr lang="en-US" sz="2600" dirty="0"/>
-          </a:p>
-        </p:txBody>
-      </p:sp>
-      <p:sp>
-        <p:nvSpPr>
-          <p:cNvPr id="3" name="security card 0"/>
-          <p:cNvSpPr/>
-          <p:nvPr/>
-        </p:nvSpPr>
-        <p:spPr>
-          <a:xfrm>
-            <a:off x="457200" y="1097280"/>
-            <a:ext cx="4023360" cy="1554480"/>
-          </a:xfrm>
-          <a:prstGeom prst="roundRect">
-            <a:avLst>
-              <a:gd name="adj" fmla="val 5882"/>
-            </a:avLst>
-          </a:prstGeom>
-          <a:solidFill>
-            <a:schemeClr val="bg2"/>
-          </a:solidFill>
-          <a:ln/>
-        </p:spPr>
-      </p:sp>
-      <p:sp>
-        <p:nvSpPr>
-          <p:cNvPr id="4" name="security 0 circle"/>
-          <p:cNvSpPr/>
-          <p:nvPr/>
-        </p:nvSpPr>
-        <p:spPr>
-          <a:xfrm>
-            <a:off x="685800" y="1371600"/>
-            <a:ext cx="548640" cy="548640"/>
-          </a:xfrm>
-          <a:prstGeom prst="ellipse">
-            <a:avLst/>
-          </a:prstGeom>
-          <a:solidFill>
-            <a:schemeClr val="accent2"/>
-          </a:solidFill>
-          <a:ln/>
-        </p:spPr>
-      </p:sp>
-      <p:pic>
-        <p:nvPicPr>
-          <p:cNvPr id="5" name="security 0 icon" descr="preencoded.png">    </p:cNvPr>
-          <p:cNvPicPr>
-            <a:picLocks noChangeAspect="1"/>
-          </p:cNvPicPr>
-          <p:nvPr/>
-        </p:nvPicPr>
-        <p:blipFill>
-          <a:blip r:embed="rId1"/>
-          <a:stretch>
-            <a:fillRect/>
-          </a:stretch>
-        </p:blipFill>
-        <p:spPr>
-          <a:xfrm>
-            <a:off x="822960" y="1508760"/>
-            <a:ext cx="274320" cy="274320"/>
-          </a:xfrm>
-          <a:prstGeom prst="rect">
-            <a:avLst/>
-          </a:prstGeom>
-        </p:spPr>
-      </p:pic>
-      <p:sp>
-        <p:nvSpPr>
-          <p:cNvPr id="6" name="security title 0"/>
-          <p:cNvSpPr txBox="1"/>
-          <p:nvPr/>
-        </p:nvSpPr>
-        <p:spPr>
-          <a:xfrm>
-            <a:off x="1417320" y="1353312"/>
-            <a:ext cx="2880360" cy="320040"/>
-          </a:xfrm>
-          <a:prstGeom prst="rect">
-            <a:avLst/>
-          </a:prstGeom>
-          <a:noFill/>
-          <a:ln/>
-        </p:spPr>
-        <p:txBody>
-          <a:bodyPr wrap="square" lIns="0" tIns="0" rIns="0" bIns="0" rtlCol="0" anchor="ctr"/>
-          <a:lstStyle/>
-          <a:p>
-            <a:pPr indent="0" marL="0">
-              <a:buNone/>
-            </a:pPr>
-            <a:r>
-              <a:rPr lang="en-US" sz="1500" b="1" dirty="0">
-                <a:solidFill>
-                  <a:schemeClr val="tx1"/>
-                </a:solidFill>
-              </a:rPr>
-              <a:t>Вход и токены</a:t>
-            </a:r>
-            <a:endParaRPr lang="en-US" sz="1500" dirty="0"/>
-          </a:p>
-        </p:txBody>
-      </p:sp>
-      <p:sp>
-        <p:nvSpPr>
-          <p:cNvPr id="7" name="security text 0"/>
-          <p:cNvSpPr txBox="1"/>
-          <p:nvPr/>
-        </p:nvSpPr>
-        <p:spPr>
-          <a:xfrm>
-            <a:off x="1417320" y="1719072"/>
-            <a:ext cx="2880360" cy="822960"/>
-          </a:xfrm>
-          <a:prstGeom prst="rect">
-            <a:avLst/>
-          </a:prstGeom>
-          <a:noFill/>
-          <a:ln/>
-        </p:spPr>
-        <p:txBody>
-          <a:bodyPr wrap="square" lIns="0" tIns="0" rIns="0" bIns="0" rtlCol="0" anchor="t"/>
-          <a:lstStyle/>
-          <a:p>
-            <a:pPr indent="0" marL="0">
-              <a:buNone/>
-            </a:pPr>
-            <a:r>
-              <a:rPr lang="en-US" sz="1200" dirty="0">
-                <a:solidFill>
-                  <a:schemeClr val="tx2"/>
-                </a:solidFill>
-              </a:rPr>
-              <a:t>JWT на каждом запросе, пароли — PBKDF2-SHA256, одинаковое время ответа на неверный логин</a:t>
-            </a:r>
-            <a:endParaRPr lang="en-US" sz="1200" dirty="0"/>
-          </a:p>
-        </p:txBody>
-      </p:sp>
-      <p:sp>
-        <p:nvSpPr>
-          <p:cNvPr id="8" name="security card 1"/>
-          <p:cNvSpPr/>
-          <p:nvPr/>
-        </p:nvSpPr>
-        <p:spPr>
-          <a:xfrm>
-            <a:off x="4663440" y="1097280"/>
-            <a:ext cx="4023360" cy="1554480"/>
-          </a:xfrm>
-          <a:prstGeom prst="roundRect">
-            <a:avLst>
-              <a:gd name="adj" fmla="val 5882"/>
-            </a:avLst>
-          </a:prstGeom>
-          <a:solidFill>
-            <a:schemeClr val="bg2"/>
-          </a:solidFill>
-          <a:ln/>
-        </p:spPr>
-      </p:sp>
-      <p:sp>
-        <p:nvSpPr>
-          <p:cNvPr id="9" name="security 1 circle"/>
-          <p:cNvSpPr/>
-          <p:nvPr/>
-        </p:nvSpPr>
-        <p:spPr>
-          <a:xfrm>
-            <a:off x="4892040" y="1371600"/>
-            <a:ext cx="548640" cy="548640"/>
-          </a:xfrm>
-          <a:prstGeom prst="ellipse">
-            <a:avLst/>
-          </a:prstGeom>
-          <a:solidFill>
-            <a:schemeClr val="accent2"/>
-          </a:solidFill>
-          <a:ln/>
-        </p:spPr>
-      </p:sp>
-      <p:pic>
-        <p:nvPicPr>
-          <p:cNvPr id="10" name="security 1 icon" descr="preencoded.png">    </p:cNvPr>
-          <p:cNvPicPr>
-            <a:picLocks noChangeAspect="1"/>
-          </p:cNvPicPr>
-          <p:nvPr/>
-        </p:nvPicPr>
-        <p:blipFill>
-          <a:blip r:embed="rId2"/>
-          <a:stretch>
-            <a:fillRect/>
-          </a:stretch>
-        </p:blipFill>
-        <p:spPr>
-          <a:xfrm>
-            <a:off x="5029200" y="1508760"/>
-            <a:ext cx="274320" cy="274320"/>
-          </a:xfrm>
-          <a:prstGeom prst="rect">
-            <a:avLst/>
-          </a:prstGeom>
-        </p:spPr>
-      </p:pic>
-      <p:sp>
-        <p:nvSpPr>
-          <p:cNvPr id="11" name="security title 1"/>
-          <p:cNvSpPr txBox="1"/>
-          <p:nvPr/>
-        </p:nvSpPr>
-        <p:spPr>
-          <a:xfrm>
-            <a:off x="5623560" y="1353312"/>
-            <a:ext cx="2880360" cy="320040"/>
-          </a:xfrm>
-          <a:prstGeom prst="rect">
-            <a:avLst/>
-          </a:prstGeom>
-          <a:noFill/>
-          <a:ln/>
-        </p:spPr>
-        <p:txBody>
-          <a:bodyPr wrap="square" lIns="0" tIns="0" rIns="0" bIns="0" rtlCol="0" anchor="ctr"/>
-          <a:lstStyle/>
-          <a:p>
-            <a:pPr indent="0" marL="0">
-              <a:buNone/>
-            </a:pPr>
-            <a:r>
-              <a:rPr lang="en-US" sz="1500" b="1" dirty="0">
-                <a:solidFill>
-                  <a:schemeClr val="tx1"/>
-                </a:solidFill>
-              </a:rPr>
-              <a:t>Изоляция</a:t>
-            </a:r>
-            <a:endParaRPr lang="en-US" sz="1500" dirty="0"/>
-          </a:p>
-        </p:txBody>
-      </p:sp>
-      <p:sp>
-        <p:nvSpPr>
-          <p:cNvPr id="12" name="security text 1"/>
-          <p:cNvSpPr txBox="1"/>
-          <p:nvPr/>
-        </p:nvSpPr>
-        <p:spPr>
-          <a:xfrm>
-            <a:off x="5623560" y="1719072"/>
-            <a:ext cx="2880360" cy="822960"/>
-          </a:xfrm>
-          <a:prstGeom prst="rect">
-            <a:avLst/>
-          </a:prstGeom>
-          <a:noFill/>
-          <a:ln/>
-        </p:spPr>
-        <p:txBody>
-          <a:bodyPr wrap="square" lIns="0" tIns="0" rIns="0" bIns="0" rtlCol="0" anchor="t"/>
-          <a:lstStyle/>
-          <a:p>
-            <a:pPr indent="0" marL="0">
-              <a:buNone/>
-            </a:pPr>
-            <a:r>
-              <a:rPr lang="en-US" sz="1200" dirty="0">
-                <a:solidFill>
-                  <a:schemeClr val="tx2"/>
-                </a:solidFill>
-              </a:rPr>
-              <a:t>один пользователь — одна компания; чужие данные — 403</a:t>
-            </a:r>
-            <a:endParaRPr lang="en-US" sz="1200" dirty="0"/>
-          </a:p>
-        </p:txBody>
-      </p:sp>
-      <p:sp>
-        <p:nvSpPr>
-          <p:cNvPr id="13" name="security card 2"/>
-          <p:cNvSpPr/>
-          <p:nvPr/>
-        </p:nvSpPr>
-        <p:spPr>
-          <a:xfrm>
-            <a:off x="457200" y="2834640"/>
-            <a:ext cx="4023360" cy="1554480"/>
-          </a:xfrm>
-          <a:prstGeom prst="roundRect">
-            <a:avLst>
-              <a:gd name="adj" fmla="val 5882"/>
-            </a:avLst>
-          </a:prstGeom>
-          <a:solidFill>
-            <a:schemeClr val="bg2"/>
-          </a:solidFill>
-          <a:ln/>
-        </p:spPr>
-      </p:sp>
-      <p:sp>
-        <p:nvSpPr>
-          <p:cNvPr id="14" name="security 2 circle"/>
-          <p:cNvSpPr/>
-          <p:nvPr/>
-        </p:nvSpPr>
-        <p:spPr>
-          <a:xfrm>
-            <a:off x="685800" y="3108960"/>
-            <a:ext cx="548640" cy="548640"/>
-          </a:xfrm>
-          <a:prstGeom prst="ellipse">
-            <a:avLst/>
-          </a:prstGeom>
-          <a:solidFill>
-            <a:schemeClr val="accent2"/>
-          </a:solidFill>
-          <a:ln/>
-        </p:spPr>
-      </p:sp>
-      <p:pic>
-        <p:nvPicPr>
-          <p:cNvPr id="15" name="security 2 icon" descr="preencoded.png">    </p:cNvPr>
-          <p:cNvPicPr>
-            <a:picLocks noChangeAspect="1"/>
-          </p:cNvPicPr>
-          <p:nvPr/>
-        </p:nvPicPr>
-        <p:blipFill>
-          <a:blip r:embed="rId3"/>
-          <a:stretch>
-            <a:fillRect/>
-          </a:stretch>
-        </p:blipFill>
-        <p:spPr>
-          <a:xfrm>
-            <a:off x="822960" y="3246120"/>
-            <a:ext cx="274320" cy="274320"/>
-          </a:xfrm>
-          <a:prstGeom prst="rect">
-            <a:avLst/>
-          </a:prstGeom>
-        </p:spPr>
-      </p:pic>
-      <p:sp>
-        <p:nvSpPr>
-          <p:cNvPr id="16" name="security title 2"/>
-          <p:cNvSpPr txBox="1"/>
-          <p:nvPr/>
-        </p:nvSpPr>
-        <p:spPr>
-          <a:xfrm>
-            <a:off x="1417320" y="3090672"/>
-            <a:ext cx="2880360" cy="320040"/>
-          </a:xfrm>
-          <a:prstGeom prst="rect">
-            <a:avLst/>
-          </a:prstGeom>
-          <a:noFill/>
-          <a:ln/>
-        </p:spPr>
-        <p:txBody>
-          <a:bodyPr wrap="square" lIns="0" tIns="0" rIns="0" bIns="0" rtlCol="0" anchor="ctr"/>
-          <a:lstStyle/>
-          <a:p>
-            <a:pPr indent="0" marL="0">
-              <a:buNone/>
-            </a:pPr>
-            <a:r>
-              <a:rPr lang="en-US" sz="1500" b="1" dirty="0">
-                <a:solidFill>
-                  <a:schemeClr val="tx1"/>
-                </a:solidFill>
-              </a:rPr>
-              <a:t>Логи без тайн</a:t>
-            </a:r>
-            <a:endParaRPr lang="en-US" sz="1500" dirty="0"/>
-          </a:p>
-        </p:txBody>
-      </p:sp>
-      <p:sp>
-        <p:nvSpPr>
-          <p:cNvPr id="17" name="security text 2"/>
-          <p:cNvSpPr txBox="1"/>
-          <p:nvPr/>
-        </p:nvSpPr>
-        <p:spPr>
-          <a:xfrm>
-            <a:off x="1417320" y="3456432"/>
-            <a:ext cx="2880360" cy="822960"/>
-          </a:xfrm>
-          <a:prstGeom prst="rect">
-            <a:avLst/>
-          </a:prstGeom>
-          <a:noFill/>
-          <a:ln/>
-        </p:spPr>
-        <p:txBody>
-          <a:bodyPr wrap="square" lIns="0" tIns="0" rIns="0" bIns="0" rtlCol="0" anchor="t"/>
-          <a:lstStyle/>
-          <a:p>
-            <a:pPr indent="0" marL="0">
-              <a:buNone/>
-            </a:pPr>
-            <a:r>
-              <a:rPr lang="en-US" sz="1200" dirty="0">
-                <a:solidFill>
-                  <a:schemeClr val="tx2"/>
-                </a:solidFill>
-              </a:rPr>
-              <a:t>фильтр маскирует ИНН, суммы, названия и e-mail; тела запросов не пишутся</a:t>
-            </a:r>
-            <a:endParaRPr lang="en-US" sz="1200" dirty="0"/>
-          </a:p>
-        </p:txBody>
-      </p:sp>
-      <p:sp>
-        <p:nvSpPr>
-          <p:cNvPr id="18" name="security card 3"/>
-          <p:cNvSpPr/>
-          <p:nvPr/>
-        </p:nvSpPr>
-        <p:spPr>
-          <a:xfrm>
-            <a:off x="4663440" y="2834640"/>
-            <a:ext cx="4023360" cy="1554480"/>
-          </a:xfrm>
-          <a:prstGeom prst="roundRect">
-            <a:avLst>
-              <a:gd name="adj" fmla="val 5882"/>
-            </a:avLst>
-          </a:prstGeom>
-          <a:solidFill>
-            <a:schemeClr val="bg2"/>
-          </a:solidFill>
-          <a:ln/>
-        </p:spPr>
-      </p:sp>
-      <p:sp>
-        <p:nvSpPr>
-          <p:cNvPr id="19" name="security 3 circle"/>
-          <p:cNvSpPr/>
-          <p:nvPr/>
-        </p:nvSpPr>
-        <p:spPr>
-          <a:xfrm>
-            <a:off x="4892040" y="3108960"/>
-            <a:ext cx="548640" cy="548640"/>
-          </a:xfrm>
-          <a:prstGeom prst="ellipse">
-            <a:avLst/>
-          </a:prstGeom>
-          <a:solidFill>
-            <a:schemeClr val="accent2"/>
-          </a:solidFill>
-          <a:ln/>
-        </p:spPr>
-      </p:sp>
-      <p:pic>
-        <p:nvPicPr>
-          <p:cNvPr id="20" name="security 3 icon" descr="preencoded.png">    </p:cNvPr>
-          <p:cNvPicPr>
-            <a:picLocks noChangeAspect="1"/>
-          </p:cNvPicPr>
-          <p:nvPr/>
-        </p:nvPicPr>
-        <p:blipFill>
-          <a:blip r:embed="rId4"/>
-          <a:stretch>
-            <a:fillRect/>
-          </a:stretch>
-        </p:blipFill>
-        <p:spPr>
-          <a:xfrm>
-            <a:off x="5029200" y="3246120"/>
-            <a:ext cx="274320" cy="274320"/>
-          </a:xfrm>
-          <a:prstGeom prst="rect">
-            <a:avLst/>
-          </a:prstGeom>
-        </p:spPr>
-      </p:pic>
-      <p:sp>
-        <p:nvSpPr>
-          <p:cNvPr id="21" name="security title 3"/>
-          <p:cNvSpPr txBox="1"/>
-          <p:nvPr/>
-        </p:nvSpPr>
-        <p:spPr>
-          <a:xfrm>
-            <a:off x="5623560" y="3090672"/>
-            <a:ext cx="2880360" cy="320040"/>
-          </a:xfrm>
-          <a:prstGeom prst="rect">
-            <a:avLst/>
-          </a:prstGeom>
-          <a:noFill/>
-          <a:ln/>
-        </p:spPr>
-        <p:txBody>
-          <a:bodyPr wrap="square" lIns="0" tIns="0" rIns="0" bIns="0" rtlCol="0" anchor="ctr"/>
-          <a:lstStyle/>
-          <a:p>
-            <a:pPr indent="0" marL="0">
-              <a:buNone/>
-            </a:pPr>
-            <a:r>
-              <a:rPr lang="en-US" sz="1500" b="1" dirty="0">
-                <a:solidFill>
-                  <a:schemeClr val="tx1"/>
-                </a:solidFill>
-              </a:rPr>
-              <a:t>Загрузка</a:t>
-            </a:r>
-            <a:endParaRPr lang="en-US" sz="1500" dirty="0"/>
-          </a:p>
-        </p:txBody>
-      </p:sp>
-      <p:sp>
-        <p:nvSpPr>
-          <p:cNvPr id="22" name="security text 3"/>
-          <p:cNvSpPr txBox="1"/>
-          <p:nvPr/>
-        </p:nvSpPr>
-        <p:spPr>
-          <a:xfrm>
-            <a:off x="5623560" y="3456432"/>
-            <a:ext cx="2880360" cy="822960"/>
-          </a:xfrm>
-          <a:prstGeom prst="rect">
-            <a:avLst/>
-          </a:prstGeom>
-          <a:noFill/>
-          <a:ln/>
-        </p:spPr>
-        <p:txBody>
-          <a:bodyPr wrap="square" lIns="0" tIns="0" rIns="0" bIns="0" rtlCol="0" anchor="t"/>
-          <a:lstStyle/>
-          <a:p>
-            <a:pPr indent="0" marL="0">
-              <a:buNone/>
-            </a:pPr>
-            <a:r>
-              <a:rPr lang="en-US" sz="1200" dirty="0">
-                <a:solidFill>
-                  <a:schemeClr val="tx2"/>
-                </a:solidFill>
-              </a:rPr>
-              <a:t>лимит размера и проверка формата до разбора; выписка не хранится в браузере</a:t>
-            </a:r>
-            <a:endParaRPr lang="en-US" sz="1200" dirty="0"/>
-          </a:p>
-        </p:txBody>
-      </p:sp>
-      <p:sp>
-        <p:nvSpPr>
-          <p:cNvPr id="25" name="Slide Number Placeholder 0"/>
-          <p:cNvSpPr>
-            <a:spLocks noGrp="1"/>
-          </p:cNvSpPr>
-          <p:nvPr>
-            <p:ph type="sldNum" sz="quarter" idx="4294967295"/>
-          </p:nvPr>
-        </p:nvSpPr>
-        <p:spPr>
-          <a:xfrm>
-            <a:off x="8229600" y="4800600"/>
-            <a:ext cx="457200" cy="228600"/>
-          </a:xfrm>
-          <a:prstGeom prst="rect">
-            <a:avLst/>
-          </a:prstGeom>
-          <a:extLst>
-            <a:ext uri="{C572A759-6A51-4108-AA02-DFA0A04FC94B}">
-              <ma14:wrappingTextBoxFlag xmlns:ma14="http://schemas.microsoft.com/office/mac/drawingml/2011/main" val="0"/>
-            </a:ext>
-          </a:extLst>
-        </p:spPr>
-        <p:txBody>
-          <a:bodyPr/>
-          <a:lstStyle>
-            <a:lvl1pPr>
-              <a:defRPr sz="900">
-                <a:solidFill>
-                  <a:schemeClr val="accent6"/>
-                </a:solidFill>
-              </a:defRPr>
-            </a:lvl1pPr>
-          </a:lstStyle>
-          <a:p>
-            <a:pPr algn="r"/>
-            <a:fld id="{F7021451-1387-4CA6-816F-3879F97B5CBC}" type="slidenum">
-              <a:rPr b="0" lang="en-US"/>
-              <a:t>11</a:t>
-            </a:fld>
-            <a:endParaRPr lang="en-US"/>
-          </a:p>
-        </p:txBody>
-      </p:sp>
-    </p:spTree>
-  </p:cSld>
-  <p:clrMapOvr>
-    <a:masterClrMapping/>
-  </p:clrMapOvr>
-</p:sld>
-</file>
-
-<file path=ppt/slides/slide12.xml><?xml version="1.0" encoding="utf-8"?>
-<p:sld xmlns:a="http://schemas.openxmlformats.org/drawingml/2006/main" xmlns:r="http://schemas.openxmlformats.org/officeDocument/2006/relationships" xmlns:p="http://schemas.openxmlformats.org/presentationml/2006/main">
-  <p:cSld name="Slide 12">
-    <p:spTree>
-      <p:nvGrpSpPr>
-        <p:cNvPr id="1" name=""/>
-        <p:cNvGrpSpPr/>
-        <p:nvPr/>
-      </p:nvGrpSpPr>
-      <p:grpSpPr>
-        <a:xfrm>
-          <a:off x="0" y="0"/>
-          <a:ext cx="0" cy="0"/>
-          <a:chOff x="0" y="0"/>
-          <a:chExt cx="0" cy="0"/>
-        </a:xfrm>
-      </p:grpSpPr>
-      <p:sp>
-        <p:nvSpPr>
-          <p:cNvPr id="2" name="Text 0"/>
-          <p:cNvSpPr/>
-          <p:nvPr>
-            <p:ph idx="100" type="title" hasCustomPrompt="1"/>
-          </p:nvPr>
-        </p:nvSpPr>
-        <p:spPr>
-          <a:xfrm>
-            <a:off x="457200" y="274320"/>
-            <a:ext cx="8229600" cy="640080"/>
-          </a:xfrm>
-          <a:prstGeom prst="rect">
-            <a:avLst/>
-          </a:prstGeom>
-          <a:noFill/>
-          <a:ln/>
-        </p:spPr>
-        <p:txBody>
-          <a:bodyPr wrap="square" lIns="0" tIns="0" rIns="0" bIns="0" rtlCol="0" anchor="ctr"/>
-          <a:lstStyle/>
-          <a:p>
-            <a:pPr algn="l" indent="0" marL="0">
-              <a:buNone/>
-            </a:pPr>
-            <a:r>
-              <a:rPr lang="en-US" sz="2600" b="1" dirty="0">
-                <a:solidFill>
-                  <a:schemeClr val="tx2"/>
-                </a:solidFill>
-              </a:rPr>
-              <a:t>Сверх базового прогноза и что дальше</a:t>
-            </a:r>
-            <a:endParaRPr lang="en-US" sz="2600" dirty="0"/>
-          </a:p>
-        </p:txBody>
-      </p:sp>
-      <p:sp>
-        <p:nvSpPr>
-          <p:cNvPr id="3" name="done card"/>
-          <p:cNvSpPr/>
-          <p:nvPr/>
-        </p:nvSpPr>
-        <p:spPr>
-          <a:xfrm>
-            <a:off x="457200" y="1051560"/>
-            <a:ext cx="4023360" cy="3566160"/>
-          </a:xfrm>
-          <a:prstGeom prst="roundRect">
-            <a:avLst>
-              <a:gd name="adj" fmla="val 2564"/>
-            </a:avLst>
-          </a:prstGeom>
-          <a:solidFill>
-            <a:schemeClr val="bg2"/>
-          </a:solidFill>
-          <a:ln/>
-        </p:spPr>
-      </p:sp>
-      <p:sp>
-        <p:nvSpPr>
-          <p:cNvPr id="4" name="done title"/>
-          <p:cNvSpPr txBox="1"/>
-          <p:nvPr/>
-        </p:nvSpPr>
-        <p:spPr>
-          <a:xfrm>
-            <a:off x="685800" y="1188720"/>
-            <a:ext cx="3657600" cy="320040"/>
-          </a:xfrm>
-          <a:prstGeom prst="rect">
-            <a:avLst/>
-          </a:prstGeom>
-          <a:noFill/>
-          <a:ln/>
-        </p:spPr>
-        <p:txBody>
-          <a:bodyPr wrap="square" lIns="0" tIns="0" rIns="0" bIns="0" rtlCol="0" anchor="ctr"/>
-          <a:lstStyle/>
-          <a:p>
-            <a:pPr indent="0" marL="0">
-              <a:buNone/>
-            </a:pPr>
-            <a:r>
-              <a:rPr lang="en-US" sz="1600" b="1" dirty="0">
-                <a:solidFill>
-                  <a:schemeClr val="accent2"/>
-                </a:solidFill>
-              </a:rPr>
-              <a:t>Реализовано</a:t>
-            </a:r>
-            <a:endParaRPr lang="en-US" sz="1600" dirty="0"/>
-          </a:p>
-        </p:txBody>
-      </p:sp>
-      <p:sp>
-        <p:nvSpPr>
-          <p:cNvPr id="5" name="done list"/>
-          <p:cNvSpPr txBox="1"/>
-          <p:nvPr/>
-        </p:nvSpPr>
-        <p:spPr>
-          <a:xfrm>
-            <a:off x="685800" y="1600200"/>
-            <a:ext cx="3657600" cy="2926080"/>
-          </a:xfrm>
-          <a:prstGeom prst="rect">
-            <a:avLst/>
-          </a:prstGeom>
-          <a:noFill/>
-          <a:ln/>
-        </p:spPr>
-        <p:txBody>
-          <a:bodyPr wrap="square" lIns="0" tIns="0" rIns="0" bIns="0" rtlCol="0" anchor="t"/>
-          <a:lstStyle/>
-          <a:p>
-            <a:pPr marL="342900" indent="-342900">
-              <a:spcAft>
-                <a:spcPts val="500"/>
-              </a:spcAft>
-              <a:buSzPct val="100000"/>
-              <a:buChar char="•"/>
-            </a:pPr>
-            <a:r>
-              <a:rPr lang="en-US" sz="1300" dirty="0">
-                <a:solidFill>
-                  <a:schemeClr val="tx1"/>
-                </a:solidFill>
-              </a:rPr>
-              <a:t>5 источников данных с единым форматом событий</a:t>
-            </a:r>
-            <a:endParaRPr lang="en-US" sz="1300" dirty="0"/>
-          </a:p>
-          <a:p>
-            <a:pPr marL="342900" indent="-342900">
-              <a:spcAft>
-                <a:spcPts val="500"/>
-              </a:spcAft>
-              <a:buSzPct val="100000"/>
-              <a:buChar char="•"/>
-            </a:pPr>
-            <a:r>
-              <a:rPr lang="en-US" sz="1300" dirty="0">
-                <a:solidFill>
-                  <a:schemeClr val="tx1"/>
-                </a:solidFill>
-              </a:rPr>
-              <a:t>«Что если» по 4 сценариям</a:t>
-            </a:r>
-            <a:endParaRPr lang="en-US" sz="1300" dirty="0"/>
-          </a:p>
-          <a:p>
-            <a:pPr marL="342900" indent="-342900">
-              <a:spcAft>
-                <a:spcPts val="500"/>
-              </a:spcAft>
-              <a:buSzPct val="100000"/>
-              <a:buChar char="•"/>
-            </a:pPr>
-            <a:r>
-              <a:rPr lang="en-US" sz="1300" dirty="0">
-                <a:solidFill>
-                  <a:schemeClr val="tx1"/>
-                </a:solidFill>
-              </a:rPr>
-              <a:t>План-факт с пересчётом прогноза</a:t>
-            </a:r>
-            <a:endParaRPr lang="en-US" sz="1300" dirty="0"/>
-          </a:p>
-          <a:p>
-            <a:pPr marL="342900" indent="-342900">
-              <a:spcAft>
-                <a:spcPts val="500"/>
-              </a:spcAft>
-              <a:buSzPct val="100000"/>
-              <a:buChar char="•"/>
-            </a:pPr>
-            <a:r>
-              <a:rPr lang="en-US" sz="1300" dirty="0">
-                <a:solidFill>
-                  <a:schemeClr val="tx1"/>
-                </a:solidFill>
-              </a:rPr>
-              <a:t>Быстрое обновление без пересчёта</a:t>
-            </a:r>
-            <a:endParaRPr lang="en-US" sz="1300" dirty="0"/>
-          </a:p>
-          <a:p>
-            <a:pPr marL="342900" indent="-342900">
-              <a:spcAft>
-                <a:spcPts val="500"/>
-              </a:spcAft>
-              <a:buSzPct val="100000"/>
-              <a:buChar char="•"/>
-            </a:pPr>
-            <a:r>
-              <a:rPr lang="en-US" sz="1300" dirty="0">
-                <a:solidFill>
-                  <a:schemeClr val="tx1"/>
-                </a:solidFill>
-              </a:rPr>
-              <a:t>Ручной ввод обычной фразой</a:t>
-            </a:r>
-            <a:endParaRPr lang="en-US" sz="1300" dirty="0"/>
-          </a:p>
-          <a:p>
-            <a:pPr marL="342900" indent="-342900">
-              <a:spcAft>
-                <a:spcPts val="500"/>
-              </a:spcAft>
-              <a:buSzPct val="100000"/>
-              <a:buChar char="•"/>
-            </a:pPr>
-            <a:r>
-              <a:rPr lang="en-US" sz="1300" dirty="0">
-                <a:solidFill>
-                  <a:schemeClr val="tx1"/>
-                </a:solidFill>
-              </a:rPr>
-              <a:t>Пакетный прогноз: 150 компаний за 85 с</a:t>
-            </a:r>
-            <a:endParaRPr lang="en-US" sz="1300" dirty="0"/>
-          </a:p>
-          <a:p>
-            <a:pPr marL="342900" indent="-342900">
-              <a:spcAft>
-                <a:spcPts val="500"/>
-              </a:spcAft>
-              <a:buSzPct val="100000"/>
-              <a:buChar char="•"/>
-            </a:pPr>
-            <a:r>
-              <a:rPr lang="en-US" sz="1300" dirty="0">
-                <a:solidFill>
-                  <a:schemeClr val="tx1"/>
-                </a:solidFill>
-              </a:rPr>
-              <a:t>Интерфейс для телефона</a:t>
-            </a:r>
-            <a:endParaRPr lang="en-US" sz="1300" dirty="0"/>
-          </a:p>
-        </p:txBody>
-      </p:sp>
-      <p:sp>
-        <p:nvSpPr>
-          <p:cNvPr id="6" name="mobile screenshot frame"/>
-          <p:cNvSpPr/>
-          <p:nvPr/>
-        </p:nvSpPr>
-        <p:spPr>
-          <a:xfrm>
-            <a:off x="4663440" y="1138827"/>
-            <a:ext cx="1645920" cy="3391627"/>
-          </a:xfrm>
-          <a:prstGeom prst="roundRect">
-            <a:avLst>
-              <a:gd name="adj" fmla="val 4444"/>
-            </a:avLst>
-          </a:prstGeom>
-          <a:solidFill>
-            <a:schemeClr val="tx2"/>
-          </a:solidFill>
-          <a:ln/>
-          <a:effectLst>
-            <a:outerShdw sx="100000" sy="100000" kx="0" ky="0" algn="bl" rotWithShape="0" blurRad="101600" dist="38100" dir="5400000">
-              <a:srgbClr val="000000">
-                <a:alpha val="18000"/>
-              </a:srgbClr>
-            </a:outerShdw>
-          </a:effectLst>
-        </p:spPr>
-      </p:sp>
-      <p:pic>
-        <p:nvPicPr>
-          <p:cNvPr id="7" name="mobile screenshot" descr="/Users/alex/Documents/HAKATON/cashflow/docs/screenshots/09_mobile.png">    </p:cNvPr>
-          <p:cNvPicPr>
-            <a:picLocks noChangeAspect="1"/>
-          </p:cNvPicPr>
-          <p:nvPr/>
-        </p:nvPicPr>
-        <p:blipFill>
-          <a:blip r:embed="rId1"/>
-          <a:stretch>
-            <a:fillRect/>
-          </a:stretch>
-        </p:blipFill>
-        <p:spPr>
-          <a:xfrm>
-            <a:off x="4736592" y="1211979"/>
-            <a:ext cx="1499616" cy="3245323"/>
-          </a:xfrm>
-          <a:prstGeom prst="rect">
-            <a:avLst/>
-          </a:prstGeom>
-        </p:spPr>
-      </p:pic>
-      <p:sp>
-        <p:nvSpPr>
-          <p:cNvPr id="8" name="next title"/>
-          <p:cNvSpPr txBox="1"/>
-          <p:nvPr/>
-        </p:nvSpPr>
-        <p:spPr>
-          <a:xfrm>
-            <a:off x="6537960" y="1188720"/>
-            <a:ext cx="2148840" cy="320040"/>
-          </a:xfrm>
-          <a:prstGeom prst="rect">
-            <a:avLst/>
-          </a:prstGeom>
-          <a:noFill/>
-          <a:ln/>
-        </p:spPr>
-        <p:txBody>
-          <a:bodyPr wrap="square" lIns="0" tIns="0" rIns="0" bIns="0" rtlCol="0" anchor="ctr"/>
-          <a:lstStyle/>
-          <a:p>
-            <a:pPr indent="0" marL="0">
-              <a:buNone/>
-            </a:pPr>
-            <a:r>
-              <a:rPr lang="en-US" sz="1600" b="1" dirty="0">
-                <a:solidFill>
-                  <a:schemeClr val="accent2"/>
-                </a:solidFill>
-              </a:rPr>
-              <a:t>Дальше</a:t>
-            </a:r>
-            <a:endParaRPr lang="en-US" sz="1600" dirty="0"/>
-          </a:p>
-        </p:txBody>
-      </p:sp>
-      <p:sp>
-        <p:nvSpPr>
-          <p:cNvPr id="9" name="next list"/>
-          <p:cNvSpPr txBox="1"/>
-          <p:nvPr/>
-        </p:nvSpPr>
-        <p:spPr>
-          <a:xfrm>
-            <a:off x="6537960" y="1600200"/>
-            <a:ext cx="2148840" cy="2926080"/>
-          </a:xfrm>
-          <a:prstGeom prst="rect">
-            <a:avLst/>
-          </a:prstGeom>
-          <a:noFill/>
-          <a:ln/>
-        </p:spPr>
-        <p:txBody>
-          <a:bodyPr wrap="square" lIns="0" tIns="0" rIns="0" bIns="0" rtlCol="0" anchor="t"/>
-          <a:lstStyle/>
-          <a:p>
-            <a:pPr marL="342900" indent="-342900">
-              <a:spcAft>
-                <a:spcPts val="500"/>
-              </a:spcAft>
-              <a:buSzPct val="100000"/>
-              <a:buChar char="•"/>
-            </a:pPr>
-            <a:r>
-              <a:rPr lang="en-US" sz="1200" dirty="0">
-                <a:solidFill>
-                  <a:schemeClr val="tx1"/>
-                </a:solidFill>
-              </a:rPr>
-              <a:t>Виджет в интернет-банке: выписка уже в банке</a:t>
-            </a:r>
-            <a:endParaRPr lang="en-US" sz="1200" dirty="0"/>
-          </a:p>
-          <a:p>
-            <a:pPr marL="342900" indent="-342900">
-              <a:spcAft>
-                <a:spcPts val="500"/>
-              </a:spcAft>
-              <a:buSzPct val="100000"/>
-              <a:buChar char="•"/>
-            </a:pPr>
-            <a:r>
-              <a:rPr lang="en-US" sz="1200" dirty="0">
-                <a:solidFill>
-                  <a:schemeClr val="tx1"/>
-                </a:solidFill>
-              </a:rPr>
-              <a:t>Уведомление за 2 недели до разрыва</a:t>
-            </a:r>
-            <a:endParaRPr lang="en-US" sz="1200" dirty="0"/>
-          </a:p>
-          <a:p>
-            <a:pPr marL="342900" indent="-342900">
-              <a:spcAft>
-                <a:spcPts val="500"/>
-              </a:spcAft>
-              <a:buSzPct val="100000"/>
-              <a:buChar char="•"/>
-            </a:pPr>
-            <a:r>
-              <a:rPr lang="en-US" sz="1200" dirty="0">
-                <a:solidFill>
-                  <a:schemeClr val="tx1"/>
-                </a:solidFill>
-              </a:rPr>
-              <a:t>Овердрафт прямо из предупреждения</a:t>
-            </a:r>
-            <a:endParaRPr lang="en-US" sz="1200" dirty="0"/>
-          </a:p>
-          <a:p>
-            <a:pPr marL="342900" indent="-342900">
-              <a:spcAft>
-                <a:spcPts val="500"/>
-              </a:spcAft>
-              <a:buSzPct val="100000"/>
-              <a:buChar char="•"/>
-            </a:pPr>
-            <a:r>
-              <a:rPr lang="en-US" sz="1200" dirty="0">
-                <a:solidFill>
-                  <a:schemeClr val="tx1"/>
-                </a:solidFill>
-              </a:rPr>
-              <a:t>Реальные API 1С и ФНС</a:t>
-            </a:r>
-            <a:endParaRPr lang="en-US" sz="1200" dirty="0"/>
-          </a:p>
-        </p:txBody>
-      </p:sp>
-      <p:sp>
-        <p:nvSpPr>
-          <p:cNvPr id="25" name="Slide Number Placeholder 0"/>
-          <p:cNvSpPr>
-            <a:spLocks noGrp="1"/>
-          </p:cNvSpPr>
-          <p:nvPr>
-            <p:ph type="sldNum" sz="quarter" idx="4294967295"/>
-          </p:nvPr>
-        </p:nvSpPr>
-        <p:spPr>
-          <a:xfrm>
-            <a:off x="8229600" y="4800600"/>
-            <a:ext cx="457200" cy="228600"/>
-          </a:xfrm>
-          <a:prstGeom prst="rect">
-            <a:avLst/>
-          </a:prstGeom>
-          <a:extLst>
-            <a:ext uri="{C572A759-6A51-4108-AA02-DFA0A04FC94B}">
-              <ma14:wrappingTextBoxFlag xmlns:ma14="http://schemas.microsoft.com/office/mac/drawingml/2011/main" val="0"/>
-            </a:ext>
-          </a:extLst>
-        </p:spPr>
-        <p:txBody>
-          <a:bodyPr/>
-          <a:lstStyle>
-            <a:lvl1pPr>
-              <a:defRPr sz="900">
-                <a:solidFill>
-                  <a:schemeClr val="accent6"/>
-                </a:solidFill>
-              </a:defRPr>
-            </a:lvl1pPr>
-          </a:lstStyle>
-          <a:p>
-            <a:pPr algn="r"/>
-            <a:fld id="{F7021451-1387-4CA6-816F-3879F97B5CBC}" type="slidenum">
-              <a:rPr b="0" lang="en-US"/>
-              <a:t>12</a:t>
-            </a:fld>
-            <a:endParaRPr lang="en-US"/>
-          </a:p>
-        </p:txBody>
-      </p:sp>
-    </p:spTree>
-  </p:cSld>
-  <p:clrMapOvr>
-    <a:masterClrMapping/>
-  </p:clrMapOvr>
-</p:sld>
-</file>
-
-<file path=ppt/slides/slide13.xml><?xml version="1.0" encoding="utf-8"?>
-<p:sld xmlns:a="http://schemas.openxmlformats.org/drawingml/2006/main" xmlns:r="http://schemas.openxmlformats.org/officeDocument/2006/relationships" xmlns:p="http://schemas.openxmlformats.org/presentationml/2006/main">
-  <p:cSld name="Slide 13">
-    <p:spTree>
-      <p:nvGrpSpPr>
-        <p:cNvPr id="1" name=""/>
-        <p:cNvGrpSpPr/>
-        <p:nvPr/>
-      </p:nvGrpSpPr>
-      <p:grpSpPr>
-        <a:xfrm>
-          <a:off x="0" y="0"/>
-          <a:ext cx="0" cy="0"/>
-          <a:chOff x="0" y="0"/>
-          <a:chExt cx="0" cy="0"/>
-        </a:xfrm>
-      </p:grpSpPr>
-      <p:sp>
-        <p:nvSpPr>
-          <p:cNvPr id="2" name="Text 0"/>
-          <p:cNvSpPr/>
-          <p:nvPr>
-            <p:ph idx="100" type="title" hasCustomPrompt="1"/>
-          </p:nvPr>
-        </p:nvSpPr>
-        <p:spPr>
-          <a:xfrm>
             <a:off x="548640" y="914400"/>
             <a:ext cx="8046720" cy="1691640"/>
           </a:xfrm>
@@ -4498,7 +3472,7 @@
                   <a:srgbClr val="CFE2D6"/>
                 </a:solidFill>
               </a:rPr>
-              <a:t>30+ дней прогноза по дням · дата, сумма и вероятность разрыва · 16% ошибки против 21% у наивной модели · разрыв S02 найден за 13 дней</a:t>
+              <a:t>Прогноз на 30+ дней по дням · дата, сумма и вероятность разрыва · ошибка 16% против 21% у наивной модели · реальный разрыв 30.09.2025 — за 14 дней</a:t>
             </a:r>
             <a:endParaRPr lang="en-US" sz="1800" dirty="0"/>
           </a:p>
@@ -4561,7 +3535,7 @@
                   <a:schemeClr val="tx2"/>
                 </a:solidFill>
               </a:rPr>
-              <a:t>Прибыльный бизнес, а платить зарплату нечем</a:t>
+              <a:t>Прибыльный бизнес, а на счёте −471 600 ₽</a:t>
             </a:r>
             <a:endParaRPr lang="en-US" sz="2600" dirty="0"/>
           </a:p>
@@ -4576,11 +3550,11 @@
         <p:spPr>
           <a:xfrm>
             <a:off x="457200" y="1097280"/>
-            <a:ext cx="3931920" cy="3474720"/>
+            <a:ext cx="4023360" cy="3520440"/>
           </a:xfrm>
           <a:prstGeom prst="roundRect">
             <a:avLst>
-              <a:gd name="adj" fmla="val 2632"/>
+              <a:gd name="adj" fmla="val 2597"/>
             </a:avLst>
           </a:prstGeom>
           <a:solidFill>
@@ -4642,7 +3616,7 @@
         <p:spPr>
           <a:xfrm>
             <a:off x="1417320" y="1325880"/>
-            <a:ext cx="2834640" cy="274320"/>
+            <a:ext cx="2926080" cy="274320"/>
           </a:xfrm>
           <a:prstGeom prst="rect">
             <a:avLst/>
@@ -4663,7 +3637,7 @@
                   <a:schemeClr val="tx1"/>
                 </a:solidFill>
               </a:rPr>
-              <a:t>ООО «Вектор Бизнес-Сервис»</a:t>
+              <a:t>ООО «Софт-Решения-771»</a:t>
             </a:r>
             <a:endParaRPr lang="en-US" sz="1400" dirty="0"/>
           </a:p>
@@ -4678,7 +3652,7 @@
         <p:spPr>
           <a:xfrm>
             <a:off x="1417320" y="1600200"/>
-            <a:ext cx="2834640" cy="274320"/>
+            <a:ext cx="2926080" cy="274320"/>
           </a:xfrm>
           <a:prstGeom prst="rect">
             <a:avLst/>
@@ -4699,7 +3673,7 @@
                   <a:schemeClr val="accent6"/>
                 </a:solidFill>
               </a:rPr>
-              <a:t>ИТ-аутсорсинг, 22 сотрудника, демо-компания S02</a:t>
+              <a:t>разработка ПО · реальная выписка из датасета (C124)</a:t>
             </a:r>
             <a:endParaRPr lang="en-US" sz="1100" dirty="0"/>
           </a:p>
@@ -4714,7 +3688,7 @@
         <p:spPr>
           <a:xfrm>
             <a:off x="731520" y="2103120"/>
-            <a:ext cx="3474720" cy="2286000"/>
+            <a:ext cx="3566160" cy="2331720"/>
           </a:xfrm>
           <a:prstGeom prst="rect">
             <a:avLst/>
@@ -4739,7 +3713,7 @@
                   <a:schemeClr val="tx1"/>
                 </a:solidFill>
               </a:rPr>
-              <a:t>2,5 млн ₽ на счёте сегодня</a:t>
+              <a:t>16 сентября на счёте 2,9 млн ₽</a:t>
             </a:r>
             <a:endParaRPr lang="en-US" sz="1400" dirty="0"/>
           </a:p>
@@ -4757,7 +3731,7 @@
                   <a:schemeClr val="tx1"/>
                 </a:solidFill>
               </a:rPr>
-              <a:t>45% выручки — один клиент, и он задерживает счёт на 2,3 млн ₽</a:t>
+              <a:t>29.09 — ЕНП 1,48 млн ₽, 30.09 — зарплата 2,48 млн ₽</a:t>
             </a:r>
             <a:endParaRPr lang="en-US" sz="1400" dirty="0"/>
           </a:p>
@@ -4775,7 +3749,7 @@
                   <a:schemeClr val="tx1"/>
                 </a:solidFill>
               </a:rPr>
-              <a:t>28 октября — ЕНП ≈ 1,5 млн ₽, 5 ноября — зарплата 956 тыс. ₽</a:t>
+              <a:t>клиент заплатил 1,27 млн ₽ только 3 октября</a:t>
             </a:r>
             <a:endParaRPr lang="en-US" sz="1400" dirty="0"/>
           </a:p>
@@ -4793,7 +3767,7 @@
                   <a:schemeClr val="tx1"/>
                 </a:solidFill>
               </a:rPr>
-              <a:t>В выписке этого не видно — разрыв обнаружится в день платежа</a:t>
+              <a:t>итог — овердрафт и проценты банку</a:t>
             </a:r>
             <a:endParaRPr lang="en-US" sz="1400" dirty="0"/>
           </a:p>
@@ -4801,14 +3775,58 @@
       </p:sp>
       <p:sp>
         <p:nvSpPr>
-          <p:cNvPr id="9" name="real gap value"/>
+          <p:cNvPr id="9" name="user circle"/>
+          <p:cNvSpPr/>
+          <p:nvPr/>
+        </p:nvSpPr>
+        <p:spPr>
+          <a:xfrm>
+            <a:off x="4846320" y="1188720"/>
+            <a:ext cx="548640" cy="548640"/>
+          </a:xfrm>
+          <a:prstGeom prst="ellipse">
+            <a:avLst/>
+          </a:prstGeom>
+          <a:solidFill>
+            <a:schemeClr val="accent3"/>
+          </a:solidFill>
+          <a:ln/>
+        </p:spPr>
+      </p:sp>
+      <p:pic>
+        <p:nvPicPr>
+          <p:cNvPr id="10" name="user icon" descr="preencoded.png">    </p:cNvPr>
+          <p:cNvPicPr>
+            <a:picLocks noChangeAspect="1"/>
+          </p:cNvPicPr>
+          <p:nvPr/>
+        </p:nvPicPr>
+        <p:blipFill>
+          <a:blip r:embed="rId2"/>
+          <a:stretch>
+            <a:fillRect/>
+          </a:stretch>
+        </p:blipFill>
+        <p:spPr>
+          <a:xfrm>
+            <a:off x="4983480" y="1325880"/>
+            <a:ext cx="274320" cy="274320"/>
+          </a:xfrm>
+          <a:prstGeom prst="rect">
+            <a:avLst/>
+          </a:prstGeom>
+        </p:spPr>
+      </p:pic>
+      <p:sp>
+        <p:nvSpPr>
+          <p:cNvPr id="11" name="user title"/>
           <p:cNvSpPr txBox="1"/>
           <p:nvPr/>
         </p:nvSpPr>
         <p:spPr>
           <a:xfrm>
-            <a:off x="4846320" y="1188720"/>
-            <a:ext cx="3840480" cy="685800"/>
+            <a:off x="5532120" y="1188720"/>
+            <a:ext cx="3108960" cy="274320"/>
           </a:xfrm>
           <a:prstGeom prst="rect">
             <a:avLst/>
@@ -4824,27 +3842,27 @@
               <a:buNone/>
             </a:pPr>
             <a:r>
-              <a:rPr lang="en-US" sz="4000" b="1" dirty="0">
-                <a:solidFill>
-                  <a:schemeClr val="accent3"/>
-                </a:solidFill>
-              </a:rPr>
-              <a:t>−544 000 ₽</a:t>
-            </a:r>
-            <a:endParaRPr lang="en-US" sz="4000" dirty="0"/>
-          </a:p>
-        </p:txBody>
-      </p:sp>
-      <p:sp>
-        <p:nvSpPr>
-          <p:cNvPr id="10" name="real gap label"/>
+              <a:rPr lang="en-US" sz="1500" b="1" dirty="0">
+                <a:solidFill>
+                  <a:schemeClr val="tx1"/>
+                </a:solidFill>
+              </a:rPr>
+              <a:t>Наш пользователь</a:t>
+            </a:r>
+            <a:endParaRPr lang="en-US" sz="1500" dirty="0"/>
+          </a:p>
+        </p:txBody>
+      </p:sp>
+      <p:sp>
+        <p:nvSpPr>
+          <p:cNvPr id="12" name="user text"/>
           <p:cNvSpPr txBox="1"/>
           <p:nvPr/>
         </p:nvSpPr>
         <p:spPr>
           <a:xfrm>
-            <a:off x="4846320" y="1874520"/>
-            <a:ext cx="3840480" cy="548640"/>
+            <a:off x="5532120" y="1508760"/>
+            <a:ext cx="3154680" cy="868680"/>
           </a:xfrm>
           <a:prstGeom prst="rect">
             <a:avLst/>
@@ -4862,10 +3880,10 @@
             <a:r>
               <a:rPr lang="en-US" sz="1200" dirty="0">
                 <a:solidFill>
-                  <a:schemeClr val="tx1"/>
-                </a:solidFill>
-              </a:rPr>
-              <a:t>реальный минимум остатка 5 ноября: остаток был ниже нуля с 5 по 13 ноября</a:t>
+                  <a:schemeClr val="tx2"/>
+                </a:solidFill>
+              </a:rPr>
+              <a:t>владелец малого бизнеса без финансового образования: ему нужна не таблица, а ответ — хватит денег или нет</a:t>
             </a:r>
             <a:endParaRPr lang="en-US" sz="1200" dirty="0"/>
           </a:p>
@@ -4873,14 +3891,58 @@
       </p:sp>
       <p:sp>
         <p:nvSpPr>
-          <p:cNvPr id="11" name="lead time value"/>
+          <p:cNvPr id="13" name="pain circle"/>
+          <p:cNvSpPr/>
+          <p:nvPr/>
+        </p:nvSpPr>
+        <p:spPr>
+          <a:xfrm>
+            <a:off x="4846320" y="2606040"/>
+            <a:ext cx="548640" cy="548640"/>
+          </a:xfrm>
+          <a:prstGeom prst="ellipse">
+            <a:avLst/>
+          </a:prstGeom>
+          <a:solidFill>
+            <a:schemeClr val="accent3"/>
+          </a:solidFill>
+          <a:ln/>
+        </p:spPr>
+      </p:sp>
+      <p:pic>
+        <p:nvPicPr>
+          <p:cNvPr id="14" name="pain icon" descr="preencoded.png">    </p:cNvPr>
+          <p:cNvPicPr>
+            <a:picLocks noChangeAspect="1"/>
+          </p:cNvPicPr>
+          <p:nvPr/>
+        </p:nvPicPr>
+        <p:blipFill>
+          <a:blip r:embed="rId3"/>
+          <a:stretch>
+            <a:fillRect/>
+          </a:stretch>
+        </p:blipFill>
+        <p:spPr>
+          <a:xfrm>
+            <a:off x="4983480" y="2743200"/>
+            <a:ext cx="274320" cy="274320"/>
+          </a:xfrm>
+          <a:prstGeom prst="rect">
+            <a:avLst/>
+          </a:prstGeom>
+        </p:spPr>
+      </p:pic>
+      <p:sp>
+        <p:nvSpPr>
+          <p:cNvPr id="15" name="pain title"/>
           <p:cNvSpPr txBox="1"/>
           <p:nvPr/>
         </p:nvSpPr>
         <p:spPr>
           <a:xfrm>
-            <a:off x="4846320" y="2514600"/>
-            <a:ext cx="3840480" cy="685800"/>
+            <a:off x="5532120" y="2606040"/>
+            <a:ext cx="3108960" cy="274320"/>
           </a:xfrm>
           <a:prstGeom prst="rect">
             <a:avLst/>
@@ -4896,27 +3958,27 @@
               <a:buNone/>
             </a:pPr>
             <a:r>
-              <a:rPr lang="en-US" sz="4000" b="1" dirty="0">
-                <a:solidFill>
-                  <a:schemeClr val="accent2"/>
-                </a:solidFill>
-              </a:rPr>
-              <a:t>за 13 дней</a:t>
-            </a:r>
-            <a:endParaRPr lang="en-US" sz="4000" dirty="0"/>
-          </a:p>
-        </p:txBody>
-      </p:sp>
-      <p:sp>
-        <p:nvSpPr>
-          <p:cNvPr id="12" name="lead time label"/>
+              <a:rPr lang="en-US" sz="1500" b="1" dirty="0">
+                <a:solidFill>
+                  <a:schemeClr val="tx1"/>
+                </a:solidFill>
+              </a:rPr>
+              <a:t>Почему так бывает</a:t>
+            </a:r>
+            <a:endParaRPr lang="en-US" sz="1500" dirty="0"/>
+          </a:p>
+        </p:txBody>
+      </p:sp>
+      <p:sp>
+        <p:nvSpPr>
+          <p:cNvPr id="16" name="pain text"/>
           <p:cNvSpPr txBox="1"/>
           <p:nvPr/>
         </p:nvSpPr>
         <p:spPr>
           <a:xfrm>
-            <a:off x="4846320" y="3200400"/>
-            <a:ext cx="3840480" cy="548640"/>
+            <a:off x="5532120" y="2926080"/>
+            <a:ext cx="3154680" cy="1097280"/>
           </a:xfrm>
           <a:prstGeom prst="rect">
             <a:avLst/>
@@ -4934,46 +3996,10 @@
             <a:r>
               <a:rPr lang="en-US" sz="1200" dirty="0">
                 <a:solidFill>
-                  <a:schemeClr val="tx1"/>
-                </a:solidFill>
-              </a:rPr>
-              <a:t>наш прогноз предупредил об этом разрыве, когда подключили 1С и открытые реестры</a:t>
-            </a:r>
-            <a:endParaRPr lang="en-US" sz="1200" dirty="0"/>
-          </a:p>
-        </p:txBody>
-      </p:sp>
-      <p:sp>
-        <p:nvSpPr>
-          <p:cNvPr id="13" name="target user"/>
-          <p:cNvSpPr txBox="1"/>
-          <p:nvPr/>
-        </p:nvSpPr>
-        <p:spPr>
-          <a:xfrm>
-            <a:off x="4846320" y="3886200"/>
-            <a:ext cx="3840480" cy="685800"/>
-          </a:xfrm>
-          <a:prstGeom prst="rect">
-            <a:avLst/>
-          </a:prstGeom>
-          <a:noFill/>
-          <a:ln/>
-        </p:spPr>
-        <p:txBody>
-          <a:bodyPr wrap="square" lIns="0" tIns="0" rIns="0" bIns="0" rtlCol="0" anchor="t"/>
-          <a:lstStyle/>
-          <a:p>
-            <a:pPr indent="0" marL="0">
-              <a:buNone/>
-            </a:pPr>
-            <a:r>
-              <a:rPr lang="en-US" sz="1200" i="1" dirty="0">
-                <a:solidFill>
                   <a:schemeClr val="tx2"/>
                 </a:solidFill>
               </a:rPr>
-              <a:t>Целевой пользователь — владелец малого бизнеса без финансового образования: ему нужна не таблица, а ответ «хватит или нет».</a:t>
+              <a:t>зарплата, налоги и аренда — по графику, а клиенты платят, когда платят; выписка показывает прошлое, а разрыв видно только в день платежа</a:t>
             </a:r>
             <a:endParaRPr lang="en-US" sz="1200" dirty="0"/>
           </a:p>
@@ -5197,7 +4223,7 @@
                   <a:schemeClr val="tx1"/>
                 </a:solidFill>
               </a:rPr>
-              <a:t>Светофор и одна фраза простыми словами: «через 13 дней, 5 ноября, может не хватить 685 000 ₽»</a:t>
+              <a:t>светофор и одна фраза: «через 14 дней, 30 сентября, может не хватить 678 000 ₽»</a:t>
             </a:r>
             <a:endParaRPr lang="en-US" sz="1200" dirty="0"/>
           </a:p>
@@ -5313,7 +4339,7 @@
                   <a:schemeClr val="tx1"/>
                 </a:solidFill>
               </a:rPr>
-              <a:t>Остаток по дням на 30+ дней: ожидаемый и возможный диапазон, дата, сумма и вероятность разрыва</a:t>
+              <a:t>остаток по дням на 30+ дней: ожидаемый и возможный диапазон, дата, сумма и вероятность разрыва</a:t>
             </a:r>
             <a:endParaRPr lang="en-US" sz="1200" dirty="0"/>
           </a:p>
@@ -5429,7 +4455,7 @@
                   <a:schemeClr val="tx1"/>
                 </a:solidFill>
               </a:rPr>
-              <a:t>2–3 конкретных действия: кого попросить заплатить раньше, что перенести, когда нужен овердрафт</a:t>
+              <a:t>конкретное действие: «попросите ООО «Ритейл-381» оплатить до 30 сентября»</a:t>
             </a:r>
             <a:endParaRPr lang="en-US" sz="1200" dirty="0"/>
           </a:p>
@@ -5443,12 +4469,12 @@
         </p:nvSpPr>
         <p:spPr>
           <a:xfrm>
-            <a:off x="4160520" y="2190584"/>
-            <a:ext cx="4526280" cy="1333833"/>
+            <a:off x="4160520" y="2148172"/>
+            <a:ext cx="4526280" cy="1418656"/>
           </a:xfrm>
           <a:prstGeom prst="roundRect">
             <a:avLst>
-              <a:gd name="adj" fmla="val 5484"/>
+              <a:gd name="adj" fmla="val 5156"/>
             </a:avLst>
           </a:prstGeom>
           <a:solidFill>
@@ -5466,7 +4492,7 @@
       </p:sp>
       <p:pic>
         <p:nvPicPr>
-          <p:cNvPr id="16" name="risk card screenshot" descr="/Users/alex/Documents/HAKATON/cashflow/docs/screenshots/02_risk_card.png">    </p:cNvPr>
+          <p:cNvPr id="16" name="risk card screenshot" descr="/Users/alex/Documents/HAKATON/cashflow/docs/screens/03_preduprezhdenie.png">    </p:cNvPr>
           <p:cNvPicPr>
             <a:picLocks noChangeAspect="1"/>
           </p:cNvPicPr>
@@ -5480,8 +4506,8 @@
         </p:blipFill>
         <p:spPr>
           <a:xfrm>
-            <a:off x="4233672" y="2263736"/>
-            <a:ext cx="4379976" cy="1187529"/>
+            <a:off x="4233672" y="2221324"/>
+            <a:ext cx="4379976" cy="1272352"/>
           </a:xfrm>
           <a:prstGeom prst="rect">
             <a:avLst/>
@@ -5590,7 +4616,7 @@
                   <a:schemeClr val="tx2"/>
                 </a:solidFill>
               </a:rPr>
-              <a:t>Демо: выписка → прогноз → предупреждение</a:t>
+              <a:t>Демо: прогноз от 16 сентября против факта</a:t>
             </a:r>
             <a:endParaRPr lang="en-US" sz="2600" dirty="0"/>
           </a:p>
@@ -5598,18 +4624,18 @@
       </p:sp>
       <p:sp>
         <p:nvSpPr>
-          <p:cNvPr id="3" name="dashboard screenshot frame"/>
+          <p:cNvPr id="3" name="chart screenshot frame"/>
           <p:cNvSpPr/>
           <p:nvPr/>
         </p:nvSpPr>
         <p:spPr>
           <a:xfrm>
-            <a:off x="464515" y="1005840"/>
-            <a:ext cx="5837530" cy="3703320"/>
+            <a:off x="457200" y="1213505"/>
+            <a:ext cx="5120640" cy="3287990"/>
           </a:xfrm>
           <a:prstGeom prst="roundRect">
             <a:avLst>
-              <a:gd name="adj" fmla="val 1975"/>
+              <a:gd name="adj" fmla="val 2225"/>
             </a:avLst>
           </a:prstGeom>
           <a:solidFill>
@@ -5627,7 +4653,7 @@
       </p:sp>
       <p:pic>
         <p:nvPicPr>
-          <p:cNvPr id="4" name="dashboard screenshot" descr="/Users/alex/Documents/HAKATON/cashflow/docs/screenshots/02_dashboard.png">    </p:cNvPr>
+          <p:cNvPr id="4" name="chart screenshot" descr="/Users/alex/Documents/HAKATON/cashflow/docs/screens/04_grafik.png">    </p:cNvPr>
           <p:cNvPicPr>
             <a:picLocks noChangeAspect="1"/>
           </p:cNvPicPr>
@@ -5641,8 +4667,8 @@
         </p:blipFill>
         <p:spPr>
           <a:xfrm>
-            <a:off x="537667" y="1078992"/>
-            <a:ext cx="5691226" cy="3557016"/>
+            <a:off x="530352" y="1286657"/>
+            <a:ext cx="4974336" cy="3141686"/>
           </a:xfrm>
           <a:prstGeom prst="rect">
             <a:avLst/>
@@ -5651,34 +4677,14 @@
       </p:pic>
       <p:sp>
         <p:nvSpPr>
-          <p:cNvPr id="5" name="step dot 0"/>
-          <p:cNvSpPr/>
-          <p:nvPr/>
-        </p:nvSpPr>
-        <p:spPr>
-          <a:xfrm>
-            <a:off x="6583680" y="1097280"/>
-            <a:ext cx="365760" cy="365760"/>
-          </a:xfrm>
-          <a:prstGeom prst="ellipse">
-            <a:avLst/>
-          </a:prstGeom>
-          <a:solidFill>
-            <a:schemeClr val="accent1"/>
-          </a:solidFill>
-          <a:ln/>
-        </p:spPr>
-      </p:sp>
-      <p:sp>
-        <p:nvSpPr>
-          <p:cNvPr id="6" name="step num 0"/>
+          <p:cNvPr id="5" name="fact value 0"/>
           <p:cNvSpPr txBox="1"/>
           <p:nvPr/>
         </p:nvSpPr>
         <p:spPr>
           <a:xfrm>
-            <a:off x="6583680" y="1097280"/>
-            <a:ext cx="365760" cy="365760"/>
+            <a:off x="5852160" y="1051560"/>
+            <a:ext cx="2834640" cy="548640"/>
           </a:xfrm>
           <a:prstGeom prst="rect">
             <a:avLst/>
@@ -5688,125 +4694,33 @@
         </p:spPr>
         <p:txBody>
           <a:bodyPr wrap="square" lIns="0" tIns="0" rIns="0" bIns="0" rtlCol="0" anchor="ctr"/>
-          <a:lstStyle/>
-          <a:p>
-            <a:pPr algn="ctr" indent="0" marL="0">
-              <a:buNone/>
-            </a:pPr>
-            <a:r>
-              <a:rPr lang="en-US" sz="1400" b="1" dirty="0">
-                <a:solidFill>
-                  <a:schemeClr val="tx2"/>
-                </a:solidFill>
-              </a:rPr>
-              <a:t>1</a:t>
-            </a:r>
-            <a:endParaRPr lang="en-US" sz="1400" dirty="0"/>
-          </a:p>
-        </p:txBody>
-      </p:sp>
-      <p:sp>
-        <p:nvSpPr>
-          <p:cNvPr id="7" name="step text 0"/>
-          <p:cNvSpPr txBox="1"/>
-          <p:nvPr/>
-        </p:nvSpPr>
-        <p:spPr>
-          <a:xfrm>
-            <a:off x="7086600" y="1051560"/>
-            <a:ext cx="1600200" cy="822960"/>
-          </a:xfrm>
-          <a:prstGeom prst="rect">
-            <a:avLst/>
-          </a:prstGeom>
-          <a:noFill/>
-          <a:ln/>
-        </p:spPr>
-        <p:txBody>
-          <a:bodyPr wrap="square" lIns="0" tIns="0" rIns="0" bIns="0" rtlCol="0" anchor="t"/>
           <a:lstStyle/>
           <a:p>
             <a:pPr indent="0" marL="0">
               <a:buNone/>
             </a:pPr>
             <a:r>
-              <a:rPr lang="en-US" sz="1100" dirty="0">
-                <a:solidFill>
-                  <a:schemeClr val="tx1"/>
-                </a:solidFill>
-              </a:rPr>
-              <a:t>Загрузили CSV выписки — 2 года, дубли и пропуски разобраны сами</a:t>
-            </a:r>
-            <a:endParaRPr lang="en-US" sz="1100" dirty="0"/>
-          </a:p>
-        </p:txBody>
-      </p:sp>
-      <p:sp>
-        <p:nvSpPr>
-          <p:cNvPr id="8" name="step dot 1"/>
-          <p:cNvSpPr/>
-          <p:nvPr/>
-        </p:nvSpPr>
-        <p:spPr>
-          <a:xfrm>
-            <a:off x="6583680" y="1993392"/>
-            <a:ext cx="365760" cy="365760"/>
-          </a:xfrm>
-          <a:prstGeom prst="ellipse">
-            <a:avLst/>
-          </a:prstGeom>
-          <a:solidFill>
-            <a:schemeClr val="accent1"/>
-          </a:solidFill>
-          <a:ln/>
-        </p:spPr>
-      </p:sp>
-      <p:sp>
-        <p:nvSpPr>
-          <p:cNvPr id="9" name="step num 1"/>
+              <a:rPr lang="en-US" sz="3000" b="1" dirty="0">
+                <a:solidFill>
+                  <a:schemeClr val="accent2"/>
+                </a:solidFill>
+              </a:rPr>
+              <a:t>30 сентября</a:t>
+            </a:r>
+            <a:endParaRPr lang="en-US" sz="3000" dirty="0"/>
+          </a:p>
+        </p:txBody>
+      </p:sp>
+      <p:sp>
+        <p:nvSpPr>
+          <p:cNvPr id="6" name="fact label 0"/>
           <p:cNvSpPr txBox="1"/>
           <p:nvPr/>
         </p:nvSpPr>
         <p:spPr>
           <a:xfrm>
-            <a:off x="6583680" y="1993392"/>
-            <a:ext cx="365760" cy="365760"/>
-          </a:xfrm>
-          <a:prstGeom prst="rect">
-            <a:avLst/>
-          </a:prstGeom>
-          <a:noFill/>
-          <a:ln/>
-        </p:spPr>
-        <p:txBody>
-          <a:bodyPr wrap="square" lIns="0" tIns="0" rIns="0" bIns="0" rtlCol="0" anchor="ctr"/>
-          <a:lstStyle/>
-          <a:p>
-            <a:pPr algn="ctr" indent="0" marL="0">
-              <a:buNone/>
-            </a:pPr>
-            <a:r>
-              <a:rPr lang="en-US" sz="1400" b="1" dirty="0">
-                <a:solidFill>
-                  <a:schemeClr val="tx2"/>
-                </a:solidFill>
-              </a:rPr>
-              <a:t>2</a:t>
-            </a:r>
-            <a:endParaRPr lang="en-US" sz="1400" dirty="0"/>
-          </a:p>
-        </p:txBody>
-      </p:sp>
-      <p:sp>
-        <p:nvSpPr>
-          <p:cNvPr id="10" name="step text 1"/>
-          <p:cNvSpPr txBox="1"/>
-          <p:nvPr/>
-        </p:nvSpPr>
-        <p:spPr>
-          <a:xfrm>
-            <a:off x="7086600" y="1947672"/>
-            <a:ext cx="1600200" cy="822960"/>
+            <a:off x="5852160" y="1600200"/>
+            <a:ext cx="2834640" cy="548640"/>
           </a:xfrm>
           <a:prstGeom prst="rect">
             <a:avLst/>
@@ -5822,47 +4736,27 @@
               <a:buNone/>
             </a:pPr>
             <a:r>
-              <a:rPr lang="en-US" sz="1100" dirty="0">
+              <a:rPr lang="en-US" sz="1200" dirty="0">
                 <a:solidFill>
                   <a:schemeClr val="tx1"/>
                 </a:solidFill>
               </a:rPr>
-              <a:t>Подключили 1С, налоговый календарь, банк, реестры</a:t>
-            </a:r>
-            <a:endParaRPr lang="en-US" sz="1100" dirty="0"/>
-          </a:p>
-        </p:txBody>
-      </p:sp>
-      <p:sp>
-        <p:nvSpPr>
-          <p:cNvPr id="11" name="step dot 2"/>
-          <p:cNvSpPr/>
-          <p:nvPr/>
-        </p:nvSpPr>
-        <p:spPr>
-          <a:xfrm>
-            <a:off x="6583680" y="2889504"/>
-            <a:ext cx="365760" cy="365760"/>
-          </a:xfrm>
-          <a:prstGeom prst="ellipse">
-            <a:avLst/>
-          </a:prstGeom>
-          <a:solidFill>
-            <a:schemeClr val="accent1"/>
-          </a:solidFill>
-          <a:ln/>
-        </p:spPr>
-      </p:sp>
-      <p:sp>
-        <p:nvSpPr>
-          <p:cNvPr id="12" name="step num 2"/>
+              <a:t>дата разрыва: прогноз = факт</a:t>
+            </a:r>
+            <a:endParaRPr lang="en-US" sz="1200" dirty="0"/>
+          </a:p>
+        </p:txBody>
+      </p:sp>
+      <p:sp>
+        <p:nvSpPr>
+          <p:cNvPr id="7" name="fact value 1"/>
           <p:cNvSpPr txBox="1"/>
           <p:nvPr/>
         </p:nvSpPr>
         <p:spPr>
           <a:xfrm>
-            <a:off x="6583680" y="2889504"/>
-            <a:ext cx="365760" cy="365760"/>
+            <a:off x="5852160" y="2240280"/>
+            <a:ext cx="2834640" cy="548640"/>
           </a:xfrm>
           <a:prstGeom prst="rect">
             <a:avLst/>
@@ -5872,125 +4766,33 @@
         </p:spPr>
         <p:txBody>
           <a:bodyPr wrap="square" lIns="0" tIns="0" rIns="0" bIns="0" rtlCol="0" anchor="ctr"/>
-          <a:lstStyle/>
-          <a:p>
-            <a:pPr algn="ctr" indent="0" marL="0">
-              <a:buNone/>
-            </a:pPr>
-            <a:r>
-              <a:rPr lang="en-US" sz="1400" b="1" dirty="0">
-                <a:solidFill>
-                  <a:schemeClr val="tx2"/>
-                </a:solidFill>
-              </a:rPr>
-              <a:t>3</a:t>
-            </a:r>
-            <a:endParaRPr lang="en-US" sz="1400" dirty="0"/>
-          </a:p>
-        </p:txBody>
-      </p:sp>
-      <p:sp>
-        <p:nvSpPr>
-          <p:cNvPr id="13" name="step text 2"/>
-          <p:cNvSpPr txBox="1"/>
-          <p:nvPr/>
-        </p:nvSpPr>
-        <p:spPr>
-          <a:xfrm>
-            <a:off x="7086600" y="2843784"/>
-            <a:ext cx="1600200" cy="822960"/>
-          </a:xfrm>
-          <a:prstGeom prst="rect">
-            <a:avLst/>
-          </a:prstGeom>
-          <a:noFill/>
-          <a:ln/>
-        </p:spPr>
-        <p:txBody>
-          <a:bodyPr wrap="square" lIns="0" tIns="0" rIns="0" bIns="0" rtlCol="0" anchor="t"/>
           <a:lstStyle/>
           <a:p>
             <a:pPr indent="0" marL="0">
               <a:buNone/>
             </a:pPr>
             <a:r>
-              <a:rPr lang="en-US" sz="1100" dirty="0">
-                <a:solidFill>
-                  <a:schemeClr val="tx1"/>
-                </a:solidFill>
-              </a:rPr>
-              <a:t>Главная: светофор, причина, первое действие</a:t>
-            </a:r>
-            <a:endParaRPr lang="en-US" sz="1100" dirty="0"/>
-          </a:p>
-        </p:txBody>
-      </p:sp>
-      <p:sp>
-        <p:nvSpPr>
-          <p:cNvPr id="14" name="step dot 3"/>
-          <p:cNvSpPr/>
-          <p:nvPr/>
-        </p:nvSpPr>
-        <p:spPr>
-          <a:xfrm>
-            <a:off x="6583680" y="3785616"/>
-            <a:ext cx="365760" cy="365760"/>
-          </a:xfrm>
-          <a:prstGeom prst="ellipse">
-            <a:avLst/>
-          </a:prstGeom>
-          <a:solidFill>
-            <a:schemeClr val="accent1"/>
-          </a:solidFill>
-          <a:ln/>
-        </p:spPr>
-      </p:sp>
-      <p:sp>
-        <p:nvSpPr>
-          <p:cNvPr id="15" name="step num 3"/>
+              <a:rPr lang="en-US" sz="3000" b="1" dirty="0">
+                <a:solidFill>
+                  <a:schemeClr val="accent3"/>
+                </a:solidFill>
+              </a:rPr>
+              <a:t>98%</a:t>
+            </a:r>
+            <a:endParaRPr lang="en-US" sz="3000" dirty="0"/>
+          </a:p>
+        </p:txBody>
+      </p:sp>
+      <p:sp>
+        <p:nvSpPr>
+          <p:cNvPr id="8" name="fact label 1"/>
           <p:cNvSpPr txBox="1"/>
           <p:nvPr/>
         </p:nvSpPr>
         <p:spPr>
           <a:xfrm>
-            <a:off x="6583680" y="3785616"/>
-            <a:ext cx="365760" cy="365760"/>
-          </a:xfrm>
-          <a:prstGeom prst="rect">
-            <a:avLst/>
-          </a:prstGeom>
-          <a:noFill/>
-          <a:ln/>
-        </p:spPr>
-        <p:txBody>
-          <a:bodyPr wrap="square" lIns="0" tIns="0" rIns="0" bIns="0" rtlCol="0" anchor="ctr"/>
-          <a:lstStyle/>
-          <a:p>
-            <a:pPr algn="ctr" indent="0" marL="0">
-              <a:buNone/>
-            </a:pPr>
-            <a:r>
-              <a:rPr lang="en-US" sz="1400" b="1" dirty="0">
-                <a:solidFill>
-                  <a:schemeClr val="tx2"/>
-                </a:solidFill>
-              </a:rPr>
-              <a:t>4</a:t>
-            </a:r>
-            <a:endParaRPr lang="en-US" sz="1400" dirty="0"/>
-          </a:p>
-        </p:txBody>
-      </p:sp>
-      <p:sp>
-        <p:nvSpPr>
-          <p:cNvPr id="16" name="step text 3"/>
-          <p:cNvSpPr txBox="1"/>
-          <p:nvPr/>
-        </p:nvSpPr>
-        <p:spPr>
-          <a:xfrm>
-            <a:off x="7086600" y="3739896"/>
-            <a:ext cx="1600200" cy="822960"/>
+            <a:off x="5852160" y="2788920"/>
+            <a:ext cx="2834640" cy="548640"/>
           </a:xfrm>
           <a:prstGeom prst="rect">
             <a:avLst/>
@@ -6006,14 +4808,86 @@
               <a:buNone/>
             </a:pPr>
             <a:r>
-              <a:rPr lang="en-US" sz="1100" dirty="0">
+              <a:rPr lang="en-US" sz="1200" dirty="0">
                 <a:solidFill>
                   <a:schemeClr val="tx1"/>
                 </a:solidFill>
               </a:rPr>
-              <a:t>График: ожидаемый остаток, диапазон, красная зона, значки платежей</a:t>
-            </a:r>
-            <a:endParaRPr lang="en-US" sz="1100" dirty="0"/>
+              <a:t>вероятность — за 14 дней; за 10 и 7 дней — 97%</a:t>
+            </a:r>
+            <a:endParaRPr lang="en-US" sz="1200" dirty="0"/>
+          </a:p>
+        </p:txBody>
+      </p:sp>
+      <p:sp>
+        <p:nvSpPr>
+          <p:cNvPr id="9" name="fact value 2"/>
+          <p:cNvSpPr txBox="1"/>
+          <p:nvPr/>
+        </p:nvSpPr>
+        <p:spPr>
+          <a:xfrm>
+            <a:off x="5852160" y="3429000"/>
+            <a:ext cx="2834640" cy="548640"/>
+          </a:xfrm>
+          <a:prstGeom prst="rect">
+            <a:avLst/>
+          </a:prstGeom>
+          <a:noFill/>
+          <a:ln/>
+        </p:spPr>
+        <p:txBody>
+          <a:bodyPr wrap="square" lIns="0" tIns="0" rIns="0" bIns="0" rtlCol="0" anchor="ctr"/>
+          <a:lstStyle/>
+          <a:p>
+            <a:pPr indent="0" marL="0">
+              <a:buNone/>
+            </a:pPr>
+            <a:r>
+              <a:rPr lang="en-US" sz="3000" b="1" dirty="0">
+                <a:solidFill>
+                  <a:schemeClr val="tx2"/>
+                </a:solidFill>
+              </a:rPr>
+              <a:t>−678 тыс. ₽</a:t>
+            </a:r>
+            <a:endParaRPr lang="en-US" sz="3000" dirty="0"/>
+          </a:p>
+        </p:txBody>
+      </p:sp>
+      <p:sp>
+        <p:nvSpPr>
+          <p:cNvPr id="10" name="fact label 2"/>
+          <p:cNvSpPr txBox="1"/>
+          <p:nvPr/>
+        </p:nvSpPr>
+        <p:spPr>
+          <a:xfrm>
+            <a:off x="5852160" y="3977640"/>
+            <a:ext cx="2834640" cy="548640"/>
+          </a:xfrm>
+          <a:prstGeom prst="rect">
+            <a:avLst/>
+          </a:prstGeom>
+          <a:noFill/>
+          <a:ln/>
+        </p:spPr>
+        <p:txBody>
+          <a:bodyPr wrap="square" lIns="0" tIns="0" rIns="0" bIns="0" rtlCol="0" anchor="t"/>
+          <a:lstStyle/>
+          <a:p>
+            <a:pPr indent="0" marL="0">
+              <a:buNone/>
+            </a:pPr>
+            <a:r>
+              <a:rPr lang="en-US" sz="1200" dirty="0">
+                <a:solidFill>
+                  <a:schemeClr val="tx1"/>
+                </a:solidFill>
+              </a:rPr>
+              <a:t>ожидаемый остаток; на деле −472 тыс. ₽ — налог сервис оценил выше факта</a:t>
+            </a:r>
+            <a:endParaRPr lang="en-US" sz="1200" dirty="0"/>
           </a:p>
         </p:txBody>
       </p:sp>
@@ -6119,7 +4993,7 @@
                   <a:schemeClr val="tx2"/>
                 </a:solidFill>
               </a:rPr>
-              <a:t>«Что если»: клиент заплатит на 3 недели позже</a:t>
+              <a:t>«Что если» и источники: прогноз меняется сразу</a:t>
             </a:r>
             <a:endParaRPr lang="en-US" sz="2600" dirty="0"/>
           </a:p>
@@ -6133,12 +5007,12 @@
         </p:nvSpPr>
         <p:spPr>
           <a:xfrm>
-            <a:off x="457200" y="1151951"/>
-            <a:ext cx="5852160" cy="3411098"/>
+            <a:off x="457200" y="1011974"/>
+            <a:ext cx="4663440" cy="2730933"/>
           </a:xfrm>
           <a:prstGeom prst="roundRect">
             <a:avLst>
-              <a:gd name="adj" fmla="val 2145"/>
+              <a:gd name="adj" fmla="val 2679"/>
             </a:avLst>
           </a:prstGeom>
           <a:solidFill>
@@ -6156,7 +5030,7 @@
       </p:sp>
       <p:pic>
         <p:nvPicPr>
-          <p:cNvPr id="4" name="scenario screenshot" descr="/Users/alex/Documents/HAKATON/cashflow/docs/screenshots/03_scenario_delay_card.png">    </p:cNvPr>
+          <p:cNvPr id="4" name="scenario screenshot" descr="/Users/alex/Documents/HAKATON/cashflow/docs/screens/06_chto_esli.png">    </p:cNvPr>
           <p:cNvPicPr>
             <a:picLocks noChangeAspect="1"/>
           </p:cNvPicPr>
@@ -6170,8 +5044,8 @@
         </p:blipFill>
         <p:spPr>
           <a:xfrm>
-            <a:off x="530352" y="1225103"/>
-            <a:ext cx="5705856" cy="3264794"/>
+            <a:off x="530352" y="1085126"/>
+            <a:ext cx="4517136" cy="2584629"/>
           </a:xfrm>
           <a:prstGeom prst="rect">
             <a:avLst/>
@@ -6180,27 +5054,72 @@
       </p:pic>
       <p:sp>
         <p:nvSpPr>
-          <p:cNvPr id="5" name="scenario circle"/>
+          <p:cNvPr id="5" name="scenario note"/>
+          <p:cNvSpPr txBox="1"/>
+          <p:nvPr/>
+        </p:nvSpPr>
+        <p:spPr>
+          <a:xfrm>
+            <a:off x="457200" y="3840480"/>
+            <a:ext cx="4663440" cy="731520"/>
+          </a:xfrm>
+          <a:prstGeom prst="rect">
+            <a:avLst/>
+          </a:prstGeom>
+          <a:noFill/>
+          <a:ln/>
+        </p:spPr>
+        <p:txBody>
+          <a:bodyPr wrap="square" lIns="0" tIns="0" rIns="0" bIns="0" rtlCol="0" anchor="t"/>
+          <a:lstStyle/>
+          <a:p>
+            <a:pPr indent="0" marL="0">
+              <a:buNone/>
+            </a:pPr>
+            <a:r>
+              <a:rPr lang="en-US" sz="1200" dirty="0">
+                <a:solidFill>
+                  <a:schemeClr val="tx1"/>
+                </a:solidFill>
+              </a:rPr>
+              <a:t>Клиент заплатит на 3 недели позже → «не хватит уже 1 473 000 ₽ вместо 678 000 ₽». База и сценарий — на одном графике.</a:t>
+            </a:r>
+            <a:endParaRPr lang="en-US" sz="1200" dirty="0"/>
+          </a:p>
+        </p:txBody>
+      </p:sp>
+      <p:sp>
+        <p:nvSpPr>
+          <p:cNvPr id="6" name="sources screenshot frame"/>
           <p:cNvSpPr/>
           <p:nvPr/>
         </p:nvSpPr>
         <p:spPr>
           <a:xfrm>
-            <a:off x="6583680" y="1097280"/>
-            <a:ext cx="502920" cy="502920"/>
-          </a:xfrm>
-          <a:prstGeom prst="ellipse">
-            <a:avLst/>
+            <a:off x="5303520" y="1117721"/>
+            <a:ext cx="3383280" cy="2153679"/>
+          </a:xfrm>
+          <a:prstGeom prst="roundRect">
+            <a:avLst>
+              <a:gd name="adj" fmla="val 3397"/>
+            </a:avLst>
           </a:prstGeom>
           <a:solidFill>
-            <a:schemeClr val="accent3"/>
+            <a:schemeClr val="tx2"/>
           </a:solidFill>
           <a:ln/>
+          <a:effectLst>
+            <a:outerShdw sx="100000" sy="100000" kx="0" ky="0" algn="bl" rotWithShape="0" blurRad="101600" dist="38100" dir="5400000">
+              <a:srgbClr val="000000">
+                <a:alpha val="18000"/>
+              </a:srgbClr>
+            </a:outerShdw>
+          </a:effectLst>
         </p:spPr>
       </p:sp>
       <p:pic>
         <p:nvPicPr>
-          <p:cNvPr id="6" name="scenario icon" descr="preencoded.png">    </p:cNvPr>
+          <p:cNvPr id="7" name="sources screenshot" descr="/Users/alex/Documents/HAKATON/cashflow/docs/screens/05_istochniki.png">    </p:cNvPr>
           <p:cNvPicPr>
             <a:picLocks noChangeAspect="1"/>
           </p:cNvPicPr>
@@ -6208,14 +5127,13 @@
         </p:nvPicPr>
         <p:blipFill>
           <a:blip r:embed="rId2"/>
-          <a:stretch>
-            <a:fillRect/>
-          </a:stretch>
+          <a:srcRect l="0" r="0" t="0" b="778"/>
+          <a:stretch/>
         </p:blipFill>
         <p:spPr>
           <a:xfrm>
-            <a:off x="6709410" y="1223010"/>
-            <a:ext cx="251460" cy="251460"/>
+            <a:off x="5376672" y="1190873"/>
+            <a:ext cx="3236976" cy="2007375"/>
           </a:xfrm>
           <a:prstGeom prst="rect">
             <a:avLst/>
@@ -6224,50 +5142,14 @@
       </p:pic>
       <p:sp>
         <p:nvSpPr>
-          <p:cNvPr id="7" name="scenario title"/>
+          <p:cNvPr id="8" name="sources list"/>
           <p:cNvSpPr txBox="1"/>
           <p:nvPr/>
         </p:nvSpPr>
         <p:spPr>
           <a:xfrm>
-            <a:off x="6583680" y="1737360"/>
-            <a:ext cx="2103120" cy="320040"/>
-          </a:xfrm>
-          <a:prstGeom prst="rect">
-            <a:avLst/>
-          </a:prstGeom>
-          <a:noFill/>
-          <a:ln/>
-        </p:spPr>
-        <p:txBody>
-          <a:bodyPr wrap="square" lIns="0" tIns="0" rIns="0" bIns="0" rtlCol="0" anchor="ctr"/>
-          <a:lstStyle/>
-          <a:p>
-            <a:pPr indent="0" marL="0">
-              <a:buNone/>
-            </a:pPr>
-            <a:r>
-              <a:rPr lang="en-US" sz="1500" b="1" dirty="0">
-                <a:solidFill>
-                  <a:schemeClr val="tx1"/>
-                </a:solidFill>
-              </a:rPr>
-              <a:t>Четыре сценария</a:t>
-            </a:r>
-            <a:endParaRPr lang="en-US" sz="1500" dirty="0"/>
-          </a:p>
-        </p:txBody>
-      </p:sp>
-      <p:sp>
-        <p:nvSpPr>
-          <p:cNvPr id="8" name="scenario list"/>
-          <p:cNvSpPr txBox="1"/>
-          <p:nvPr/>
-        </p:nvSpPr>
-        <p:spPr>
-          <a:xfrm>
-            <a:off x="6583680" y="2103120"/>
-            <a:ext cx="2103120" cy="1371600"/>
+            <a:off x="5303520" y="3520440"/>
+            <a:ext cx="3383280" cy="1097280"/>
           </a:xfrm>
           <a:prstGeom prst="rect">
             <a:avLst/>
@@ -6292,7 +5174,7 @@
                   <a:schemeClr val="tx1"/>
                 </a:solidFill>
               </a:rPr>
-              <a:t>клиент платит позже на 2–4 недели</a:t>
+              <a:t>платёж фразой: «клиент обещал 300 000 ₽ 20-го»</a:t>
             </a:r>
             <a:endParaRPr lang="en-US" sz="1200" dirty="0"/>
           </a:p>
@@ -6310,7 +5192,7 @@
                   <a:schemeClr val="tx1"/>
                 </a:solidFill>
               </a:rPr>
-              <a:t>выручка ниже на 10–30%</a:t>
+              <a:t>у каждого события виден источник</a:t>
             </a:r>
             <a:endParaRPr lang="en-US" sz="1200" dirty="0"/>
           </a:p>
@@ -6328,61 +5210,7 @@
                   <a:schemeClr val="tx1"/>
                 </a:solidFill>
               </a:rPr>
-              <a:t>внеплановый расход</a:t>
-            </a:r>
-            <a:endParaRPr lang="en-US" sz="1200" dirty="0"/>
-          </a:p>
-          <a:p>
-            <a:pPr marL="342900" indent="-342900">
-              <a:spcAft>
-                <a:spcPts val="400"/>
-              </a:spcAft>
-              <a:buSzPct val="100000"/>
-              <a:buChar char="•"/>
-            </a:pPr>
-            <a:r>
-              <a:rPr lang="en-US" sz="1200" dirty="0">
-                <a:solidFill>
-                  <a:schemeClr val="tx1"/>
-                </a:solidFill>
-              </a:rPr>
-              <a:t>рост постоянных расходов</a:t>
-            </a:r>
-            <a:endParaRPr lang="en-US" sz="1200" dirty="0"/>
-          </a:p>
-        </p:txBody>
-      </p:sp>
-      <p:sp>
-        <p:nvSpPr>
-          <p:cNvPr id="9" name="scenario note"/>
-          <p:cNvSpPr txBox="1"/>
-          <p:nvPr/>
-        </p:nvSpPr>
-        <p:spPr>
-          <a:xfrm>
-            <a:off x="6583680" y="3566160"/>
-            <a:ext cx="2103120" cy="1005840"/>
-          </a:xfrm>
-          <a:prstGeom prst="rect">
-            <a:avLst/>
-          </a:prstGeom>
-          <a:noFill/>
-          <a:ln/>
-        </p:spPr>
-        <p:txBody>
-          <a:bodyPr wrap="square" lIns="0" tIns="0" rIns="0" bIns="0" rtlCol="0" anchor="t"/>
-          <a:lstStyle/>
-          <a:p>
-            <a:pPr indent="0" marL="0">
-              <a:buNone/>
-            </a:pPr>
-            <a:r>
-              <a:rPr lang="en-US" sz="1200" i="1" dirty="0">
-                <a:solidFill>
-                  <a:schemeClr val="tx2"/>
-                </a:solidFill>
-              </a:rPr>
-              <a:t>Обычный и негативный прогноз — на одном графике, результат — одной фразой</a:t>
+              <a:t>план-факт: не пришёл платёж → прогноз пересчитан</a:t>
             </a:r>
             <a:endParaRPr lang="en-US" sz="1200" dirty="0"/>
           </a:p>
@@ -6490,7 +5318,7 @@
                   <a:schemeClr val="tx2"/>
                 </a:solidFill>
               </a:rPr>
-              <a:t>План-факт и источники: прогноз живой</a:t>
+              <a:t>Источники данных: каждый добавляет точность</a:t>
             </a:r>
             <a:endParaRPr lang="en-US" sz="2600" dirty="0"/>
           </a:p>
@@ -6498,36 +5326,27 @@
       </p:sp>
       <p:sp>
         <p:nvSpPr>
-          <p:cNvPr id="3" name="plan fact screenshot frame"/>
+          <p:cNvPr id="3" name="source 0 circle"/>
           <p:cNvSpPr/>
           <p:nvPr/>
         </p:nvSpPr>
         <p:spPr>
           <a:xfrm>
-            <a:off x="457200" y="1330452"/>
-            <a:ext cx="4023360" cy="3054096"/>
-          </a:xfrm>
-          <a:prstGeom prst="roundRect">
-            <a:avLst>
-              <a:gd name="adj" fmla="val 2395"/>
-            </a:avLst>
+            <a:off x="457200" y="1051560"/>
+            <a:ext cx="457200" cy="457200"/>
+          </a:xfrm>
+          <a:prstGeom prst="ellipse">
+            <a:avLst/>
           </a:prstGeom>
           <a:solidFill>
-            <a:schemeClr val="tx2"/>
+            <a:schemeClr val="accent2"/>
           </a:solidFill>
           <a:ln/>
-          <a:effectLst>
-            <a:outerShdw sx="100000" sy="100000" kx="0" ky="0" algn="bl" rotWithShape="0" blurRad="101600" dist="38100" dir="5400000">
-              <a:srgbClr val="000000">
-                <a:alpha val="18000"/>
-              </a:srgbClr>
-            </a:outerShdw>
-          </a:effectLst>
         </p:spPr>
       </p:sp>
       <p:pic>
         <p:nvPicPr>
-          <p:cNvPr id="4" name="plan fact screenshot" descr="/Users/alex/Documents/HAKATON/cashflow/docs/screenshots/04_plan_fact.png">    </p:cNvPr>
+          <p:cNvPr id="4" name="source 0 icon" descr="preencoded.png">    </p:cNvPr>
           <p:cNvPicPr>
             <a:picLocks noChangeAspect="1"/>
           </p:cNvPicPr>
@@ -6535,13 +5354,14 @@
         </p:nvPicPr>
         <p:blipFill>
           <a:blip r:embed="rId1"/>
-          <a:srcRect l="0" r="0" t="0" b="30052"/>
-          <a:stretch/>
+          <a:stretch>
+            <a:fillRect/>
+          </a:stretch>
         </p:blipFill>
         <p:spPr>
           <a:xfrm>
-            <a:off x="530352" y="1403604"/>
-            <a:ext cx="3877056" cy="2907792"/>
+            <a:off x="571500" y="1165860"/>
+            <a:ext cx="228600" cy="228600"/>
           </a:xfrm>
           <a:prstGeom prst="rect">
             <a:avLst/>
@@ -6550,36 +5370,99 @@
       </p:pic>
       <p:sp>
         <p:nvSpPr>
-          <p:cNvPr id="5" name="events screenshot frame"/>
+          <p:cNvPr id="5" name="source name 0"/>
+          <p:cNvSpPr txBox="1"/>
+          <p:nvPr/>
+        </p:nvSpPr>
+        <p:spPr>
+          <a:xfrm>
+            <a:off x="1051560" y="1051560"/>
+            <a:ext cx="3108960" cy="237744"/>
+          </a:xfrm>
+          <a:prstGeom prst="rect">
+            <a:avLst/>
+          </a:prstGeom>
+          <a:noFill/>
+          <a:ln/>
+        </p:spPr>
+        <p:txBody>
+          <a:bodyPr wrap="square" lIns="0" tIns="0" rIns="0" bIns="0" rtlCol="0" anchor="ctr"/>
+          <a:lstStyle/>
+          <a:p>
+            <a:pPr indent="0" marL="0">
+              <a:buNone/>
+            </a:pPr>
+            <a:r>
+              <a:rPr lang="en-US" sz="1300" b="1" dirty="0">
+                <a:solidFill>
+                  <a:schemeClr val="tx1"/>
+                </a:solidFill>
+              </a:rPr>
+              <a:t>Банк</a:t>
+            </a:r>
+            <a:endParaRPr lang="en-US" sz="1300" dirty="0"/>
+          </a:p>
+        </p:txBody>
+      </p:sp>
+      <p:sp>
+        <p:nvSpPr>
+          <p:cNvPr id="6" name="source text 0"/>
+          <p:cNvSpPr txBox="1"/>
+          <p:nvPr/>
+        </p:nvSpPr>
+        <p:spPr>
+          <a:xfrm>
+            <a:off x="1051560" y="1298448"/>
+            <a:ext cx="3108960" cy="457200"/>
+          </a:xfrm>
+          <a:prstGeom prst="rect">
+            <a:avLst/>
+          </a:prstGeom>
+          <a:noFill/>
+          <a:ln/>
+        </p:spPr>
+        <p:txBody>
+          <a:bodyPr wrap="square" lIns="0" tIns="0" rIns="0" bIns="0" rtlCol="0" anchor="t"/>
+          <a:lstStyle/>
+          <a:p>
+            <a:pPr indent="0" marL="0">
+              <a:buNone/>
+            </a:pPr>
+            <a:r>
+              <a:rPr lang="en-US" sz="1100" dirty="0">
+                <a:solidFill>
+                  <a:schemeClr val="tx2"/>
+                </a:solidFill>
+              </a:rPr>
+              <a:t>выписка, регулярные платежи, графики кредитов, подписанные платёжки</a:t>
+            </a:r>
+            <a:endParaRPr lang="en-US" sz="1100" dirty="0"/>
+          </a:p>
+        </p:txBody>
+      </p:sp>
+      <p:sp>
+        <p:nvSpPr>
+          <p:cNvPr id="7" name="source 1 circle"/>
           <p:cNvSpPr/>
           <p:nvPr/>
         </p:nvSpPr>
         <p:spPr>
           <a:xfrm>
-            <a:off x="4663440" y="1024128"/>
-            <a:ext cx="4023360" cy="2569464"/>
-          </a:xfrm>
-          <a:prstGeom prst="roundRect">
-            <a:avLst>
-              <a:gd name="adj" fmla="val 2847"/>
-            </a:avLst>
+            <a:off x="457200" y="1783080"/>
+            <a:ext cx="457200" cy="457200"/>
+          </a:xfrm>
+          <a:prstGeom prst="ellipse">
+            <a:avLst/>
           </a:prstGeom>
           <a:solidFill>
-            <a:schemeClr val="tx2"/>
+            <a:schemeClr val="accent2"/>
           </a:solidFill>
           <a:ln/>
-          <a:effectLst>
-            <a:outerShdw sx="100000" sy="100000" kx="0" ky="0" algn="bl" rotWithShape="0" blurRad="101600" dist="38100" dir="5400000">
-              <a:srgbClr val="000000">
-                <a:alpha val="18000"/>
-              </a:srgbClr>
-            </a:outerShdw>
-          </a:effectLst>
         </p:spPr>
       </p:sp>
       <p:pic>
         <p:nvPicPr>
-          <p:cNvPr id="6" name="events screenshot" descr="/Users/alex/Documents/HAKATON/cashflow/docs/screenshots/05_events.png">    </p:cNvPr>
+          <p:cNvPr id="8" name="source 1 icon" descr="preencoded.png">    </p:cNvPr>
           <p:cNvPicPr>
             <a:picLocks noChangeAspect="1"/>
           </p:cNvPicPr>
@@ -6593,8 +5476,8 @@
         </p:blipFill>
         <p:spPr>
           <a:xfrm>
-            <a:off x="4736592" y="1097280"/>
-            <a:ext cx="3877056" cy="2423160"/>
+            <a:off x="571500" y="1897380"/>
+            <a:ext cx="228600" cy="228600"/>
           </a:xfrm>
           <a:prstGeom prst="rect">
             <a:avLst/>
@@ -6603,14 +5486,14 @@
       </p:pic>
       <p:sp>
         <p:nvSpPr>
-          <p:cNvPr id="7" name="plan fact note"/>
+          <p:cNvPr id="9" name="source name 1"/>
           <p:cNvSpPr txBox="1"/>
           <p:nvPr/>
         </p:nvSpPr>
         <p:spPr>
           <a:xfrm>
-            <a:off x="4663440" y="3749040"/>
-            <a:ext cx="4023360" cy="822960"/>
+            <a:off x="1051560" y="1783080"/>
+            <a:ext cx="3108960" cy="237744"/>
           </a:xfrm>
           <a:prstGeom prst="rect">
             <a:avLst/>
@@ -6619,19 +5502,455 @@
           <a:ln/>
         </p:spPr>
         <p:txBody>
-          <a:bodyPr wrap="square" lIns="0" tIns="0" rIns="0" bIns="0" rtlCol="0" anchor="t"/>
+          <a:bodyPr wrap="square" lIns="0" tIns="0" rIns="0" bIns="0" rtlCol="0" anchor="ctr"/>
           <a:lstStyle/>
           <a:p>
             <a:pPr indent="0" marL="0">
               <a:buNone/>
             </a:pPr>
             <a:r>
-              <a:rPr lang="en-US" sz="1200" dirty="0">
+              <a:rPr lang="en-US" sz="1300" b="1" dirty="0">
                 <a:solidFill>
                   <a:schemeClr val="tx1"/>
                 </a:solidFill>
               </a:rPr>
-              <a:t>Ожидаемый платёж не пришёл → счёт помечен «просрочен» → прогноз пересчитан. Каждое событие подписано источником.</a:t>
+              <a:t>1С</a:t>
+            </a:r>
+            <a:endParaRPr lang="en-US" sz="1300" dirty="0"/>
+          </a:p>
+        </p:txBody>
+      </p:sp>
+      <p:sp>
+        <p:nvSpPr>
+          <p:cNvPr id="10" name="source text 1"/>
+          <p:cNvSpPr txBox="1"/>
+          <p:nvPr/>
+        </p:nvSpPr>
+        <p:spPr>
+          <a:xfrm>
+            <a:off x="1051560" y="2029968"/>
+            <a:ext cx="3108960" cy="457200"/>
+          </a:xfrm>
+          <a:prstGeom prst="rect">
+            <a:avLst/>
+          </a:prstGeom>
+          <a:noFill/>
+          <a:ln/>
+        </p:spPr>
+        <p:txBody>
+          <a:bodyPr wrap="square" lIns="0" tIns="0" rIns="0" bIns="0" rtlCol="0" anchor="t"/>
+          <a:lstStyle/>
+          <a:p>
+            <a:pPr indent="0" marL="0">
+              <a:buNone/>
+            </a:pPr>
+            <a:r>
+              <a:rPr lang="en-US" sz="1100" dirty="0">
+                <a:solidFill>
+                  <a:schemeClr val="tx2"/>
+                </a:solidFill>
+              </a:rPr>
+              <a:t>счета, договоры, зарплатные ведомости, просрочки</a:t>
+            </a:r>
+            <a:endParaRPr lang="en-US" sz="1100" dirty="0"/>
+          </a:p>
+        </p:txBody>
+      </p:sp>
+      <p:sp>
+        <p:nvSpPr>
+          <p:cNvPr id="11" name="source 2 circle"/>
+          <p:cNvSpPr/>
+          <p:nvPr/>
+        </p:nvSpPr>
+        <p:spPr>
+          <a:xfrm>
+            <a:off x="457200" y="2514600"/>
+            <a:ext cx="457200" cy="457200"/>
+          </a:xfrm>
+          <a:prstGeom prst="ellipse">
+            <a:avLst/>
+          </a:prstGeom>
+          <a:solidFill>
+            <a:schemeClr val="accent2"/>
+          </a:solidFill>
+          <a:ln/>
+        </p:spPr>
+      </p:sp>
+      <p:pic>
+        <p:nvPicPr>
+          <p:cNvPr id="12" name="source 2 icon" descr="preencoded.png">    </p:cNvPr>
+          <p:cNvPicPr>
+            <a:picLocks noChangeAspect="1"/>
+          </p:cNvPicPr>
+          <p:nvPr/>
+        </p:nvPicPr>
+        <p:blipFill>
+          <a:blip r:embed="rId3"/>
+          <a:stretch>
+            <a:fillRect/>
+          </a:stretch>
+        </p:blipFill>
+        <p:spPr>
+          <a:xfrm>
+            <a:off x="571500" y="2628900"/>
+            <a:ext cx="228600" cy="228600"/>
+          </a:xfrm>
+          <a:prstGeom prst="rect">
+            <a:avLst/>
+          </a:prstGeom>
+        </p:spPr>
+      </p:pic>
+      <p:sp>
+        <p:nvSpPr>
+          <p:cNvPr id="13" name="source name 2"/>
+          <p:cNvSpPr txBox="1"/>
+          <p:nvPr/>
+        </p:nvSpPr>
+        <p:spPr>
+          <a:xfrm>
+            <a:off x="1051560" y="2514600"/>
+            <a:ext cx="3108960" cy="237744"/>
+          </a:xfrm>
+          <a:prstGeom prst="rect">
+            <a:avLst/>
+          </a:prstGeom>
+          <a:noFill/>
+          <a:ln/>
+        </p:spPr>
+        <p:txBody>
+          <a:bodyPr wrap="square" lIns="0" tIns="0" rIns="0" bIns="0" rtlCol="0" anchor="ctr"/>
+          <a:lstStyle/>
+          <a:p>
+            <a:pPr indent="0" marL="0">
+              <a:buNone/>
+            </a:pPr>
+            <a:r>
+              <a:rPr lang="en-US" sz="1300" b="1" dirty="0">
+                <a:solidFill>
+                  <a:schemeClr val="tx1"/>
+                </a:solidFill>
+              </a:rPr>
+              <a:t>Налоговый календарь</a:t>
+            </a:r>
+            <a:endParaRPr lang="en-US" sz="1300" dirty="0"/>
+          </a:p>
+        </p:txBody>
+      </p:sp>
+      <p:sp>
+        <p:nvSpPr>
+          <p:cNvPr id="14" name="source text 2"/>
+          <p:cNvSpPr txBox="1"/>
+          <p:nvPr/>
+        </p:nvSpPr>
+        <p:spPr>
+          <a:xfrm>
+            <a:off x="1051560" y="2761488"/>
+            <a:ext cx="3108960" cy="457200"/>
+          </a:xfrm>
+          <a:prstGeom prst="rect">
+            <a:avLst/>
+          </a:prstGeom>
+          <a:noFill/>
+          <a:ln/>
+        </p:spPr>
+        <p:txBody>
+          <a:bodyPr wrap="square" lIns="0" tIns="0" rIns="0" bIns="0" rtlCol="0" anchor="t"/>
+          <a:lstStyle/>
+          <a:p>
+            <a:pPr indent="0" marL="0">
+              <a:buNone/>
+            </a:pPr>
+            <a:r>
+              <a:rPr lang="en-US" sz="1100" dirty="0">
+                <a:solidFill>
+                  <a:schemeClr val="tx2"/>
+                </a:solidFill>
+              </a:rPr>
+              <a:t>ЕНП 28-го, УСН, НДС; режим определяем по выписке</a:t>
+            </a:r>
+            <a:endParaRPr lang="en-US" sz="1100" dirty="0"/>
+          </a:p>
+        </p:txBody>
+      </p:sp>
+      <p:sp>
+        <p:nvSpPr>
+          <p:cNvPr id="15" name="source 3 circle"/>
+          <p:cNvSpPr/>
+          <p:nvPr/>
+        </p:nvSpPr>
+        <p:spPr>
+          <a:xfrm>
+            <a:off x="457200" y="3246120"/>
+            <a:ext cx="457200" cy="457200"/>
+          </a:xfrm>
+          <a:prstGeom prst="ellipse">
+            <a:avLst/>
+          </a:prstGeom>
+          <a:solidFill>
+            <a:schemeClr val="accent2"/>
+          </a:solidFill>
+          <a:ln/>
+        </p:spPr>
+      </p:sp>
+      <p:pic>
+        <p:nvPicPr>
+          <p:cNvPr id="16" name="source 3 icon" descr="preencoded.png">    </p:cNvPr>
+          <p:cNvPicPr>
+            <a:picLocks noChangeAspect="1"/>
+          </p:cNvPicPr>
+          <p:nvPr/>
+        </p:nvPicPr>
+        <p:blipFill>
+          <a:blip r:embed="rId4"/>
+          <a:stretch>
+            <a:fillRect/>
+          </a:stretch>
+        </p:blipFill>
+        <p:spPr>
+          <a:xfrm>
+            <a:off x="571500" y="3360420"/>
+            <a:ext cx="228600" cy="228600"/>
+          </a:xfrm>
+          <a:prstGeom prst="rect">
+            <a:avLst/>
+          </a:prstGeom>
+        </p:spPr>
+      </p:pic>
+      <p:sp>
+        <p:nvSpPr>
+          <p:cNvPr id="17" name="source name 3"/>
+          <p:cNvSpPr txBox="1"/>
+          <p:nvPr/>
+        </p:nvSpPr>
+        <p:spPr>
+          <a:xfrm>
+            <a:off x="1051560" y="3246120"/>
+            <a:ext cx="3108960" cy="237744"/>
+          </a:xfrm>
+          <a:prstGeom prst="rect">
+            <a:avLst/>
+          </a:prstGeom>
+          <a:noFill/>
+          <a:ln/>
+        </p:spPr>
+        <p:txBody>
+          <a:bodyPr wrap="square" lIns="0" tIns="0" rIns="0" bIns="0" rtlCol="0" anchor="ctr"/>
+          <a:lstStyle/>
+          <a:p>
+            <a:pPr indent="0" marL="0">
+              <a:buNone/>
+            </a:pPr>
+            <a:r>
+              <a:rPr lang="en-US" sz="1300" b="1" dirty="0">
+                <a:solidFill>
+                  <a:schemeClr val="tx1"/>
+                </a:solidFill>
+              </a:rPr>
+              <a:t>Открытые реестры</a:t>
+            </a:r>
+            <a:endParaRPr lang="en-US" sz="1300" dirty="0"/>
+          </a:p>
+        </p:txBody>
+      </p:sp>
+      <p:sp>
+        <p:nvSpPr>
+          <p:cNvPr id="18" name="source text 3"/>
+          <p:cNvSpPr txBox="1"/>
+          <p:nvPr/>
+        </p:nvSpPr>
+        <p:spPr>
+          <a:xfrm>
+            <a:off x="1051560" y="3493008"/>
+            <a:ext cx="3108960" cy="457200"/>
+          </a:xfrm>
+          <a:prstGeom prst="rect">
+            <a:avLst/>
+          </a:prstGeom>
+          <a:noFill/>
+          <a:ln/>
+        </p:spPr>
+        <p:txBody>
+          <a:bodyPr wrap="square" lIns="0" tIns="0" rIns="0" bIns="0" rtlCol="0" anchor="t"/>
+          <a:lstStyle/>
+          <a:p>
+            <a:pPr indent="0" marL="0">
+              <a:buNone/>
+            </a:pPr>
+            <a:r>
+              <a:rPr lang="en-US" sz="1100" dirty="0">
+                <a:solidFill>
+                  <a:schemeClr val="tx2"/>
+                </a:solidFill>
+              </a:rPr>
+              <a:t>долги и суды контрагента → риск задержки оплаты</a:t>
+            </a:r>
+            <a:endParaRPr lang="en-US" sz="1100" dirty="0"/>
+          </a:p>
+        </p:txBody>
+      </p:sp>
+      <p:sp>
+        <p:nvSpPr>
+          <p:cNvPr id="19" name="source 4 circle"/>
+          <p:cNvSpPr/>
+          <p:nvPr/>
+        </p:nvSpPr>
+        <p:spPr>
+          <a:xfrm>
+            <a:off x="457200" y="3977640"/>
+            <a:ext cx="457200" cy="457200"/>
+          </a:xfrm>
+          <a:prstGeom prst="ellipse">
+            <a:avLst/>
+          </a:prstGeom>
+          <a:solidFill>
+            <a:schemeClr val="accent2"/>
+          </a:solidFill>
+          <a:ln/>
+        </p:spPr>
+      </p:sp>
+      <p:pic>
+        <p:nvPicPr>
+          <p:cNvPr id="20" name="source 4 icon" descr="preencoded.png">    </p:cNvPr>
+          <p:cNvPicPr>
+            <a:picLocks noChangeAspect="1"/>
+          </p:cNvPicPr>
+          <p:nvPr/>
+        </p:nvPicPr>
+        <p:blipFill>
+          <a:blip r:embed="rId5"/>
+          <a:stretch>
+            <a:fillRect/>
+          </a:stretch>
+        </p:blipFill>
+        <p:spPr>
+          <a:xfrm>
+            <a:off x="571500" y="4091940"/>
+            <a:ext cx="228600" cy="228600"/>
+          </a:xfrm>
+          <a:prstGeom prst="rect">
+            <a:avLst/>
+          </a:prstGeom>
+        </p:spPr>
+      </p:pic>
+      <p:sp>
+        <p:nvSpPr>
+          <p:cNvPr id="21" name="source name 4"/>
+          <p:cNvSpPr txBox="1"/>
+          <p:nvPr/>
+        </p:nvSpPr>
+        <p:spPr>
+          <a:xfrm>
+            <a:off x="1051560" y="3977640"/>
+            <a:ext cx="3108960" cy="237744"/>
+          </a:xfrm>
+          <a:prstGeom prst="rect">
+            <a:avLst/>
+          </a:prstGeom>
+          <a:noFill/>
+          <a:ln/>
+        </p:spPr>
+        <p:txBody>
+          <a:bodyPr wrap="square" lIns="0" tIns="0" rIns="0" bIns="0" rtlCol="0" anchor="ctr"/>
+          <a:lstStyle/>
+          <a:p>
+            <a:pPr indent="0" marL="0">
+              <a:buNone/>
+            </a:pPr>
+            <a:r>
+              <a:rPr lang="en-US" sz="1300" b="1" dirty="0">
+                <a:solidFill>
+                  <a:schemeClr val="tx1"/>
+                </a:solidFill>
+              </a:rPr>
+              <a:t>Ручной ввод</a:t>
+            </a:r>
+            <a:endParaRPr lang="en-US" sz="1300" dirty="0"/>
+          </a:p>
+        </p:txBody>
+      </p:sp>
+      <p:sp>
+        <p:nvSpPr>
+          <p:cNvPr id="22" name="source text 4"/>
+          <p:cNvSpPr txBox="1"/>
+          <p:nvPr/>
+        </p:nvSpPr>
+        <p:spPr>
+          <a:xfrm>
+            <a:off x="1051560" y="4224528"/>
+            <a:ext cx="3108960" cy="457200"/>
+          </a:xfrm>
+          <a:prstGeom prst="rect">
+            <a:avLst/>
+          </a:prstGeom>
+          <a:noFill/>
+          <a:ln/>
+        </p:spPr>
+        <p:txBody>
+          <a:bodyPr wrap="square" lIns="0" tIns="0" rIns="0" bIns="0" rtlCol="0" anchor="t"/>
+          <a:lstStyle/>
+          <a:p>
+            <a:pPr indent="0" marL="0">
+              <a:buNone/>
+            </a:pPr>
+            <a:r>
+              <a:rPr lang="en-US" sz="1100" dirty="0">
+                <a:solidFill>
+                  <a:schemeClr val="tx2"/>
+                </a:solidFill>
+              </a:rPr>
+              <a:t>форма или обычная фраза</a:t>
+            </a:r>
+            <a:endParaRPr lang="en-US" sz="1100" dirty="0"/>
+          </a:p>
+        </p:txBody>
+      </p:sp>
+      <p:graphicFrame>
+        <p:nvGraphicFramePr>
+          <p:cNvPr id="23" name="sources chart" descr=""/>
+          <p:cNvGraphicFramePr/>
+          <p:nvPr/>
+        </p:nvGraphicFramePr>
+        <p:xfrm>
+          <a:off x="4480560" y="1005840"/>
+          <a:ext cx="4206240" cy="2926080"/>
+        </p:xfrm>
+        <a:graphic xmlns:a="http://schemas.openxmlformats.org/drawingml/2006/main">
+          <a:graphicData uri="http://schemas.openxmlformats.org/drawingml/2006/chart">
+            <c:chart xmlns:c="http://schemas.openxmlformats.org/drawingml/2006/chart" r:id="rId6"/>
+          </a:graphicData>
+        </a:graphic>
+      </p:graphicFrame>
+      <p:sp>
+        <p:nvSpPr>
+          <p:cNvPr id="24" name="sources takeaway"/>
+          <p:cNvSpPr txBox="1"/>
+          <p:nvPr/>
+        </p:nvSpPr>
+        <p:spPr>
+          <a:xfrm>
+            <a:off x="4480560" y="3977640"/>
+            <a:ext cx="4206240" cy="640080"/>
+          </a:xfrm>
+          <a:prstGeom prst="rect">
+            <a:avLst/>
+          </a:prstGeom>
+          <a:noFill/>
+          <a:ln/>
+        </p:spPr>
+        <p:txBody>
+          <a:bodyPr wrap="square" lIns="0" tIns="0" rIns="0" bIns="0" rtlCol="0" anchor="t"/>
+          <a:lstStyle/>
+          <a:p>
+            <a:pPr indent="0" marL="0">
+              <a:buNone/>
+            </a:pPr>
+            <a:r>
+              <a:rPr lang="en-US" sz="1200" b="1" dirty="0">
+                <a:solidFill>
+                  <a:schemeClr val="tx2"/>
+                </a:solidFill>
+              </a:rPr>
+              <a:t>Только по выписке разрыв 5 ноября не виден (вероятность 18%). С 1С и реестрами — найден, вероятность 75%.</a:t>
             </a:r>
             <a:endParaRPr lang="en-US" sz="1200" dirty="0"/>
           </a:p>
@@ -6739,7 +6058,7 @@
                   <a:schemeClr val="tx2"/>
                 </a:solidFill>
               </a:rPr>
-              <a:t>Источники данных: каждый добавляет точность</a:t>
+              <a:t>Как строим прогноз</a:t>
             </a:r>
             <a:endParaRPr lang="en-US" sz="2600" dirty="0"/>
           </a:p>
@@ -6747,14 +6066,36 @@
       </p:sp>
       <p:sp>
         <p:nvSpPr>
-          <p:cNvPr id="3" name="source 0 circle"/>
+          <p:cNvPr id="3" name="pipe card 0"/>
           <p:cNvSpPr/>
           <p:nvPr/>
         </p:nvSpPr>
         <p:spPr>
           <a:xfrm>
-            <a:off x="457200" y="1051560"/>
-            <a:ext cx="457200" cy="457200"/>
+            <a:off x="457200" y="1188720"/>
+            <a:ext cx="1536192" cy="2194560"/>
+          </a:xfrm>
+          <a:prstGeom prst="roundRect">
+            <a:avLst>
+              <a:gd name="adj" fmla="val 5952"/>
+            </a:avLst>
+          </a:prstGeom>
+          <a:solidFill>
+            <a:schemeClr val="bg2"/>
+          </a:solidFill>
+          <a:ln/>
+        </p:spPr>
+      </p:sp>
+      <p:sp>
+        <p:nvSpPr>
+          <p:cNvPr id="4" name="pipe 0 circle"/>
+          <p:cNvSpPr/>
+          <p:nvPr/>
+        </p:nvSpPr>
+        <p:spPr>
+          <a:xfrm>
+            <a:off x="950976" y="1371600"/>
+            <a:ext cx="548640" cy="548640"/>
           </a:xfrm>
           <a:prstGeom prst="ellipse">
             <a:avLst/>
@@ -6767,7 +6108,7 @@
       </p:sp>
       <p:pic>
         <p:nvPicPr>
-          <p:cNvPr id="4" name="source 0 icon" descr="preencoded.png">    </p:cNvPr>
+          <p:cNvPr id="5" name="pipe 0 icon" descr="preencoded.png">    </p:cNvPr>
           <p:cNvPicPr>
             <a:picLocks noChangeAspect="1"/>
           </p:cNvPicPr>
@@ -6781,8 +6122,8 @@
         </p:blipFill>
         <p:spPr>
           <a:xfrm>
-            <a:off x="571500" y="1165860"/>
-            <a:ext cx="228600" cy="228600"/>
+            <a:off x="1088136" y="1508760"/>
+            <a:ext cx="274320" cy="274320"/>
           </a:xfrm>
           <a:prstGeom prst="rect">
             <a:avLst/>
@@ -6791,14 +6132,14 @@
       </p:pic>
       <p:sp>
         <p:nvSpPr>
-          <p:cNvPr id="5" name="source name 0"/>
+          <p:cNvPr id="6" name="pipe title 0"/>
           <p:cNvSpPr txBox="1"/>
           <p:nvPr/>
         </p:nvSpPr>
         <p:spPr>
           <a:xfrm>
-            <a:off x="1051560" y="1051560"/>
-            <a:ext cx="3108960" cy="237744"/>
+            <a:off x="548640" y="2011680"/>
+            <a:ext cx="1353312" cy="320040"/>
           </a:xfrm>
           <a:prstGeom prst="rect">
             <a:avLst/>
@@ -6810,7 +6151,7 @@
           <a:bodyPr wrap="square" lIns="0" tIns="0" rIns="0" bIns="0" rtlCol="0" anchor="ctr"/>
           <a:lstStyle/>
           <a:p>
-            <a:pPr indent="0" marL="0">
+            <a:pPr algn="ctr" indent="0" marL="0">
               <a:buNone/>
             </a:pPr>
             <a:r>
@@ -6819,7 +6160,7 @@
                   <a:schemeClr val="tx1"/>
                 </a:solidFill>
               </a:rPr>
-              <a:t>Банк</a:t>
+              <a:t>Выписка</a:t>
             </a:r>
             <a:endParaRPr lang="en-US" sz="1300" dirty="0"/>
           </a:p>
@@ -6827,14 +6168,14 @@
       </p:sp>
       <p:sp>
         <p:nvSpPr>
-          <p:cNvPr id="6" name="source text 0"/>
+          <p:cNvPr id="7" name="pipe text 0"/>
           <p:cNvSpPr txBox="1"/>
           <p:nvPr/>
         </p:nvSpPr>
         <p:spPr>
           <a:xfrm>
-            <a:off x="1051560" y="1298448"/>
-            <a:ext cx="3108960" cy="457200"/>
+            <a:off x="566928" y="2377440"/>
+            <a:ext cx="1316736" cy="914400"/>
           </a:xfrm>
           <a:prstGeom prst="rect">
             <a:avLst/>
@@ -6846,7 +6187,7 @@
           <a:bodyPr wrap="square" lIns="0" tIns="0" rIns="0" bIns="0" rtlCol="0" anchor="t"/>
           <a:lstStyle/>
           <a:p>
-            <a:pPr indent="0" marL="0">
+            <a:pPr algn="ctr" indent="0" marL="0">
               <a:buNone/>
             </a:pPr>
             <a:r>
@@ -6855,7 +6196,7 @@
                   <a:schemeClr val="tx2"/>
                 </a:solidFill>
               </a:rPr>
-              <a:t>история, регулярные платежи, графики кредитов, подписанные платёжки</a:t>
+              <a:t>дубли, пропуски, BOM, «;», ИНН строкой</a:t>
             </a:r>
             <a:endParaRPr lang="en-US" sz="1100" dirty="0"/>
           </a:p>
@@ -6863,14 +6204,36 @@
       </p:sp>
       <p:sp>
         <p:nvSpPr>
-          <p:cNvPr id="7" name="source 1 circle"/>
+          <p:cNvPr id="8" name="pipe card 1"/>
           <p:cNvSpPr/>
           <p:nvPr/>
         </p:nvSpPr>
         <p:spPr>
           <a:xfrm>
-            <a:off x="457200" y="1783080"/>
-            <a:ext cx="457200" cy="457200"/>
+            <a:off x="2130552" y="1188720"/>
+            <a:ext cx="1536192" cy="2194560"/>
+          </a:xfrm>
+          <a:prstGeom prst="roundRect">
+            <a:avLst>
+              <a:gd name="adj" fmla="val 5952"/>
+            </a:avLst>
+          </a:prstGeom>
+          <a:solidFill>
+            <a:schemeClr val="bg2"/>
+          </a:solidFill>
+          <a:ln/>
+        </p:spPr>
+      </p:sp>
+      <p:sp>
+        <p:nvSpPr>
+          <p:cNvPr id="9" name="pipe 1 circle"/>
+          <p:cNvSpPr/>
+          <p:nvPr/>
+        </p:nvSpPr>
+        <p:spPr>
+          <a:xfrm>
+            <a:off x="2624328" y="1371600"/>
+            <a:ext cx="548640" cy="548640"/>
           </a:xfrm>
           <a:prstGeom prst="ellipse">
             <a:avLst/>
@@ -6883,7 +6246,7 @@
       </p:sp>
       <p:pic>
         <p:nvPicPr>
-          <p:cNvPr id="8" name="source 1 icon" descr="preencoded.png">    </p:cNvPr>
+          <p:cNvPr id="10" name="pipe 1 icon" descr="preencoded.png">    </p:cNvPr>
           <p:cNvPicPr>
             <a:picLocks noChangeAspect="1"/>
           </p:cNvPicPr>
@@ -6897,8 +6260,8 @@
         </p:blipFill>
         <p:spPr>
           <a:xfrm>
-            <a:off x="571500" y="1897380"/>
-            <a:ext cx="228600" cy="228600"/>
+            <a:off x="2761488" y="1508760"/>
+            <a:ext cx="274320" cy="274320"/>
           </a:xfrm>
           <a:prstGeom prst="rect">
             <a:avLst/>
@@ -6907,14 +6270,14 @@
       </p:pic>
       <p:sp>
         <p:nvSpPr>
-          <p:cNvPr id="9" name="source name 1"/>
+          <p:cNvPr id="11" name="pipe title 1"/>
           <p:cNvSpPr txBox="1"/>
           <p:nvPr/>
         </p:nvSpPr>
         <p:spPr>
           <a:xfrm>
-            <a:off x="1051560" y="1783080"/>
-            <a:ext cx="3108960" cy="237744"/>
+            <a:off x="2221992" y="2011680"/>
+            <a:ext cx="1353312" cy="320040"/>
           </a:xfrm>
           <a:prstGeom prst="rect">
             <a:avLst/>
@@ -6926,7 +6289,7 @@
           <a:bodyPr wrap="square" lIns="0" tIns="0" rIns="0" bIns="0" rtlCol="0" anchor="ctr"/>
           <a:lstStyle/>
           <a:p>
-            <a:pPr indent="0" marL="0">
+            <a:pPr algn="ctr" indent="0" marL="0">
               <a:buNone/>
             </a:pPr>
             <a:r>
@@ -6935,7 +6298,7 @@
                   <a:schemeClr val="tx1"/>
                 </a:solidFill>
               </a:rPr>
-              <a:t>1С</a:t>
+              <a:t>Категории</a:t>
             </a:r>
             <a:endParaRPr lang="en-US" sz="1300" dirty="0"/>
           </a:p>
@@ -6943,14 +6306,14 @@
       </p:sp>
       <p:sp>
         <p:nvSpPr>
-          <p:cNvPr id="10" name="source text 1"/>
+          <p:cNvPr id="12" name="pipe text 1"/>
           <p:cNvSpPr txBox="1"/>
           <p:nvPr/>
         </p:nvSpPr>
         <p:spPr>
           <a:xfrm>
-            <a:off x="1051560" y="2029968"/>
-            <a:ext cx="3108960" cy="457200"/>
+            <a:off x="2240280" y="2377440"/>
+            <a:ext cx="1316736" cy="914400"/>
           </a:xfrm>
           <a:prstGeom prst="rect">
             <a:avLst/>
@@ -6962,7 +6325,7 @@
           <a:bodyPr wrap="square" lIns="0" tIns="0" rIns="0" bIns="0" rtlCol="0" anchor="t"/>
           <a:lstStyle/>
           <a:p>
-            <a:pPr indent="0" marL="0">
+            <a:pPr algn="ctr" indent="0" marL="0">
               <a:buNone/>
             </a:pPr>
             <a:r>
@@ -6971,7 +6334,7 @@
                   <a:schemeClr val="tx2"/>
                 </a:solidFill>
               </a:rPr>
-              <a:t>счета, договоры, зарплатные ведомости, просрочки</a:t>
+              <a:t>правила + обучение на операциях самой компании</a:t>
             </a:r>
             <a:endParaRPr lang="en-US" sz="1100" dirty="0"/>
           </a:p>
@@ -6979,14 +6342,36 @@
       </p:sp>
       <p:sp>
         <p:nvSpPr>
-          <p:cNvPr id="11" name="source 2 circle"/>
+          <p:cNvPr id="13" name="pipe card 2"/>
           <p:cNvSpPr/>
           <p:nvPr/>
         </p:nvSpPr>
         <p:spPr>
           <a:xfrm>
-            <a:off x="457200" y="2514600"/>
-            <a:ext cx="457200" cy="457200"/>
+            <a:off x="3803904" y="1188720"/>
+            <a:ext cx="1536192" cy="2194560"/>
+          </a:xfrm>
+          <a:prstGeom prst="roundRect">
+            <a:avLst>
+              <a:gd name="adj" fmla="val 5952"/>
+            </a:avLst>
+          </a:prstGeom>
+          <a:solidFill>
+            <a:schemeClr val="bg2"/>
+          </a:solidFill>
+          <a:ln/>
+        </p:spPr>
+      </p:sp>
+      <p:sp>
+        <p:nvSpPr>
+          <p:cNvPr id="14" name="pipe 2 circle"/>
+          <p:cNvSpPr/>
+          <p:nvPr/>
+        </p:nvSpPr>
+        <p:spPr>
+          <a:xfrm>
+            <a:off x="4297680" y="1371600"/>
+            <a:ext cx="548640" cy="548640"/>
           </a:xfrm>
           <a:prstGeom prst="ellipse">
             <a:avLst/>
@@ -6999,7 +6384,7 @@
       </p:sp>
       <p:pic>
         <p:nvPicPr>
-          <p:cNvPr id="12" name="source 2 icon" descr="preencoded.png">    </p:cNvPr>
+          <p:cNvPr id="15" name="pipe 2 icon" descr="preencoded.png">    </p:cNvPr>
           <p:cNvPicPr>
             <a:picLocks noChangeAspect="1"/>
           </p:cNvPicPr>
@@ -7013,8 +6398,8 @@
         </p:blipFill>
         <p:spPr>
           <a:xfrm>
-            <a:off x="571500" y="2628900"/>
-            <a:ext cx="228600" cy="228600"/>
+            <a:off x="4434840" y="1508760"/>
+            <a:ext cx="274320" cy="274320"/>
           </a:xfrm>
           <a:prstGeom prst="rect">
             <a:avLst/>
@@ -7023,14 +6408,14 @@
       </p:pic>
       <p:sp>
         <p:nvSpPr>
-          <p:cNvPr id="13" name="source name 2"/>
+          <p:cNvPr id="16" name="pipe title 2"/>
           <p:cNvSpPr txBox="1"/>
           <p:nvPr/>
         </p:nvSpPr>
         <p:spPr>
           <a:xfrm>
-            <a:off x="1051560" y="2514600"/>
-            <a:ext cx="3108960" cy="237744"/>
+            <a:off x="3895344" y="2011680"/>
+            <a:ext cx="1353312" cy="320040"/>
           </a:xfrm>
           <a:prstGeom prst="rect">
             <a:avLst/>
@@ -7042,7 +6427,7 @@
           <a:bodyPr wrap="square" lIns="0" tIns="0" rIns="0" bIns="0" rtlCol="0" anchor="ctr"/>
           <a:lstStyle/>
           <a:p>
-            <a:pPr indent="0" marL="0">
+            <a:pPr algn="ctr" indent="0" marL="0">
               <a:buNone/>
             </a:pPr>
             <a:r>
@@ -7051,7 +6436,7 @@
                   <a:schemeClr val="tx1"/>
                 </a:solidFill>
               </a:rPr>
-              <a:t>Налоговый календарь</a:t>
+              <a:t>Регулярные платежи</a:t>
             </a:r>
             <a:endParaRPr lang="en-US" sz="1300" dirty="0"/>
           </a:p>
@@ -7059,14 +6444,14 @@
       </p:sp>
       <p:sp>
         <p:nvSpPr>
-          <p:cNvPr id="14" name="source text 2"/>
+          <p:cNvPr id="17" name="pipe text 2"/>
           <p:cNvSpPr txBox="1"/>
           <p:nvPr/>
         </p:nvSpPr>
         <p:spPr>
           <a:xfrm>
-            <a:off x="1051560" y="2761488"/>
-            <a:ext cx="3108960" cy="457200"/>
+            <a:off x="3913632" y="2377440"/>
+            <a:ext cx="1316736" cy="914400"/>
           </a:xfrm>
           <a:prstGeom prst="rect">
             <a:avLst/>
@@ -7078,7 +6463,7 @@
           <a:bodyPr wrap="square" lIns="0" tIns="0" rIns="0" bIns="0" rtlCol="0" anchor="t"/>
           <a:lstStyle/>
           <a:p>
-            <a:pPr indent="0" marL="0">
+            <a:pPr algn="ctr" indent="0" marL="0">
               <a:buNone/>
             </a:pPr>
             <a:r>
@@ -7087,7 +6472,7 @@
                   <a:schemeClr val="tx2"/>
                 </a:solidFill>
               </a:rPr>
-              <a:t>ЕНП 28-го, УСН, НДС; режим оцениваем по выписке, ошибка суммы ЕНП ≈ 6%</a:t>
+              <a:t>зарплата, аренда, ЕНП, кредиты, дивиденды</a:t>
             </a:r>
             <a:endParaRPr lang="en-US" sz="1100" dirty="0"/>
           </a:p>
@@ -7095,14 +6480,36 @@
       </p:sp>
       <p:sp>
         <p:nvSpPr>
-          <p:cNvPr id="15" name="source 3 circle"/>
+          <p:cNvPr id="18" name="pipe card 3"/>
           <p:cNvSpPr/>
           <p:nvPr/>
         </p:nvSpPr>
         <p:spPr>
           <a:xfrm>
-            <a:off x="457200" y="3246120"/>
-            <a:ext cx="457200" cy="457200"/>
+            <a:off x="5477256" y="1188720"/>
+            <a:ext cx="1536192" cy="2194560"/>
+          </a:xfrm>
+          <a:prstGeom prst="roundRect">
+            <a:avLst>
+              <a:gd name="adj" fmla="val 5952"/>
+            </a:avLst>
+          </a:prstGeom>
+          <a:solidFill>
+            <a:schemeClr val="bg2"/>
+          </a:solidFill>
+          <a:ln/>
+        </p:spPr>
+      </p:sp>
+      <p:sp>
+        <p:nvSpPr>
+          <p:cNvPr id="19" name="pipe 3 circle"/>
+          <p:cNvSpPr/>
+          <p:nvPr/>
+        </p:nvSpPr>
+        <p:spPr>
+          <a:xfrm>
+            <a:off x="5971032" y="1371600"/>
+            <a:ext cx="548640" cy="548640"/>
           </a:xfrm>
           <a:prstGeom prst="ellipse">
             <a:avLst/>
@@ -7115,7 +6522,7 @@
       </p:sp>
       <p:pic>
         <p:nvPicPr>
-          <p:cNvPr id="16" name="source 3 icon" descr="preencoded.png">    </p:cNvPr>
+          <p:cNvPr id="20" name="pipe 3 icon" descr="preencoded.png">    </p:cNvPr>
           <p:cNvPicPr>
             <a:picLocks noChangeAspect="1"/>
           </p:cNvPicPr>
@@ -7129,8 +6536,8 @@
         </p:blipFill>
         <p:spPr>
           <a:xfrm>
-            <a:off x="571500" y="3360420"/>
-            <a:ext cx="228600" cy="228600"/>
+            <a:off x="6108192" y="1508760"/>
+            <a:ext cx="274320" cy="274320"/>
           </a:xfrm>
           <a:prstGeom prst="rect">
             <a:avLst/>
@@ -7139,14 +6546,14 @@
       </p:pic>
       <p:sp>
         <p:nvSpPr>
-          <p:cNvPr id="17" name="source name 3"/>
+          <p:cNvPr id="21" name="pipe title 3"/>
           <p:cNvSpPr txBox="1"/>
           <p:nvPr/>
         </p:nvSpPr>
         <p:spPr>
           <a:xfrm>
-            <a:off x="1051560" y="3246120"/>
-            <a:ext cx="3108960" cy="237744"/>
+            <a:off x="5568696" y="2011680"/>
+            <a:ext cx="1353312" cy="320040"/>
           </a:xfrm>
           <a:prstGeom prst="rect">
             <a:avLst/>
@@ -7158,7 +6565,7 @@
           <a:bodyPr wrap="square" lIns="0" tIns="0" rIns="0" bIns="0" rtlCol="0" anchor="ctr"/>
           <a:lstStyle/>
           <a:p>
-            <a:pPr indent="0" marL="0">
+            <a:pPr algn="ctr" indent="0" marL="0">
               <a:buNone/>
             </a:pPr>
             <a:r>
@@ -7167,7 +6574,7 @@
                   <a:schemeClr val="tx1"/>
                 </a:solidFill>
               </a:rPr>
-              <a:t>Открытые реестры</a:t>
+              <a:t>Монте-Карло</a:t>
             </a:r>
             <a:endParaRPr lang="en-US" sz="1300" dirty="0"/>
           </a:p>
@@ -7175,14 +6582,14 @@
       </p:sp>
       <p:sp>
         <p:nvSpPr>
-          <p:cNvPr id="18" name="source text 3"/>
+          <p:cNvPr id="22" name="pipe text 3"/>
           <p:cNvSpPr txBox="1"/>
           <p:nvPr/>
         </p:nvSpPr>
         <p:spPr>
           <a:xfrm>
-            <a:off x="1051560" y="3493008"/>
-            <a:ext cx="3108960" cy="457200"/>
+            <a:off x="5586984" y="2377440"/>
+            <a:ext cx="1316736" cy="914400"/>
           </a:xfrm>
           <a:prstGeom prst="rect">
             <a:avLst/>
@@ -7194,7 +6601,7 @@
           <a:bodyPr wrap="square" lIns="0" tIns="0" rIns="0" bIns="0" rtlCol="0" anchor="t"/>
           <a:lstStyle/>
           <a:p>
-            <a:pPr indent="0" marL="0">
+            <a:pPr algn="ctr" indent="0" marL="0">
               <a:buNone/>
             </a:pPr>
             <a:r>
@@ -7203,7 +6610,7 @@
                   <a:schemeClr val="tx2"/>
                 </a:solidFill>
               </a:rPr>
-              <a:t>долги, арбитраж, ФССП контрагента → вероятность задержки оплаты</a:t>
+              <a:t>2 000 вариантов будущего: задержки оплат, колебания выручки</a:t>
             </a:r>
             <a:endParaRPr lang="en-US" sz="1100" dirty="0"/>
           </a:p>
@@ -7211,27 +6618,49 @@
       </p:sp>
       <p:sp>
         <p:nvSpPr>
-          <p:cNvPr id="19" name="source 4 circle"/>
+          <p:cNvPr id="23" name="pipe card 4"/>
           <p:cNvSpPr/>
           <p:nvPr/>
         </p:nvSpPr>
         <p:spPr>
           <a:xfrm>
-            <a:off x="457200" y="3977640"/>
-            <a:ext cx="457200" cy="457200"/>
+            <a:off x="7150608" y="1188720"/>
+            <a:ext cx="1536192" cy="2194560"/>
+          </a:xfrm>
+          <a:prstGeom prst="roundRect">
+            <a:avLst>
+              <a:gd name="adj" fmla="val 5952"/>
+            </a:avLst>
+          </a:prstGeom>
+          <a:solidFill>
+            <a:schemeClr val="bg2"/>
+          </a:solidFill>
+          <a:ln/>
+        </p:spPr>
+      </p:sp>
+      <p:sp>
+        <p:nvSpPr>
+          <p:cNvPr id="24" name="pipe 4 circle"/>
+          <p:cNvSpPr/>
+          <p:nvPr/>
+        </p:nvSpPr>
+        <p:spPr>
+          <a:xfrm>
+            <a:off x="7644384" y="1371600"/>
+            <a:ext cx="548640" cy="548640"/>
           </a:xfrm>
           <a:prstGeom prst="ellipse">
             <a:avLst/>
           </a:prstGeom>
           <a:solidFill>
-            <a:schemeClr val="accent2"/>
+            <a:schemeClr val="accent3"/>
           </a:solidFill>
           <a:ln/>
         </p:spPr>
       </p:sp>
       <p:pic>
         <p:nvPicPr>
-          <p:cNvPr id="20" name="source 4 icon" descr="preencoded.png">    </p:cNvPr>
+          <p:cNvPr id="25" name="pipe 4 icon" descr="preencoded.png">    </p:cNvPr>
           <p:cNvPicPr>
             <a:picLocks noChangeAspect="1"/>
           </p:cNvPicPr>
@@ -7245,8 +6674,8 @@
         </p:blipFill>
         <p:spPr>
           <a:xfrm>
-            <a:off x="571500" y="4091940"/>
-            <a:ext cx="228600" cy="228600"/>
+            <a:off x="7781544" y="1508760"/>
+            <a:ext cx="274320" cy="274320"/>
           </a:xfrm>
           <a:prstGeom prst="rect">
             <a:avLst/>
@@ -7255,14 +6684,14 @@
       </p:pic>
       <p:sp>
         <p:nvSpPr>
-          <p:cNvPr id="21" name="source name 4"/>
+          <p:cNvPr id="26" name="pipe title 4"/>
           <p:cNvSpPr txBox="1"/>
           <p:nvPr/>
         </p:nvSpPr>
         <p:spPr>
           <a:xfrm>
-            <a:off x="1051560" y="3977640"/>
-            <a:ext cx="3108960" cy="237744"/>
+            <a:off x="7242048" y="2011680"/>
+            <a:ext cx="1353312" cy="320040"/>
           </a:xfrm>
           <a:prstGeom prst="rect">
             <a:avLst/>
@@ -7272,6 +6701,78 @@
         </p:spPr>
         <p:txBody>
           <a:bodyPr wrap="square" lIns="0" tIns="0" rIns="0" bIns="0" rtlCol="0" anchor="ctr"/>
+          <a:lstStyle/>
+          <a:p>
+            <a:pPr algn="ctr" indent="0" marL="0">
+              <a:buNone/>
+            </a:pPr>
+            <a:r>
+              <a:rPr lang="en-US" sz="1300" b="1" dirty="0">
+                <a:solidFill>
+                  <a:schemeClr val="tx1"/>
+                </a:solidFill>
+              </a:rPr>
+              <a:t>Риски</a:t>
+            </a:r>
+            <a:endParaRPr lang="en-US" sz="1300" dirty="0"/>
+          </a:p>
+        </p:txBody>
+      </p:sp>
+      <p:sp>
+        <p:nvSpPr>
+          <p:cNvPr id="27" name="pipe text 4"/>
+          <p:cNvSpPr txBox="1"/>
+          <p:nvPr/>
+        </p:nvSpPr>
+        <p:spPr>
+          <a:xfrm>
+            <a:off x="7260336" y="2377440"/>
+            <a:ext cx="1316736" cy="914400"/>
+          </a:xfrm>
+          <a:prstGeom prst="rect">
+            <a:avLst/>
+          </a:prstGeom>
+          <a:noFill/>
+          <a:ln/>
+        </p:spPr>
+        <p:txBody>
+          <a:bodyPr wrap="square" lIns="0" tIns="0" rIns="0" bIns="0" rtlCol="0" anchor="t"/>
+          <a:lstStyle/>
+          <a:p>
+            <a:pPr algn="ctr" indent="0" marL="0">
+              <a:buNone/>
+            </a:pPr>
+            <a:r>
+              <a:rPr lang="en-US" sz="1100" dirty="0">
+                <a:solidFill>
+                  <a:schemeClr val="tx2"/>
+                </a:solidFill>
+              </a:rPr>
+              <a:t>дата, сумма, вероятность, причина и действия</a:t>
+            </a:r>
+            <a:endParaRPr lang="en-US" sz="1100" dirty="0"/>
+          </a:p>
+        </p:txBody>
+      </p:sp>
+      <p:sp>
+        <p:nvSpPr>
+          <p:cNvPr id="28" name="pipe result"/>
+          <p:cNvSpPr txBox="1"/>
+          <p:nvPr/>
+        </p:nvSpPr>
+        <p:spPr>
+          <a:xfrm>
+            <a:off x="457200" y="3611880"/>
+            <a:ext cx="8229600" cy="914400"/>
+          </a:xfrm>
+          <a:prstGeom prst="rect">
+            <a:avLst/>
+          </a:prstGeom>
+          <a:noFill/>
+          <a:ln/>
+        </p:spPr>
+        <p:txBody>
+          <a:bodyPr wrap="square" lIns="0" tIns="0" rIns="0" bIns="0" rtlCol="0" anchor="t"/>
           <a:lstStyle/>
           <a:p>
             <a:pPr indent="0" marL="0">
@@ -7283,97 +6784,20 @@
                   <a:schemeClr val="tx1"/>
                 </a:solidFill>
               </a:rPr>
-              <a:t>Ручной ввод</a:t>
-            </a:r>
-            <a:endParaRPr lang="en-US" sz="1300" dirty="0"/>
-          </a:p>
-        </p:txBody>
-      </p:sp>
-      <p:sp>
-        <p:nvSpPr>
-          <p:cNvPr id="22" name="source text 4"/>
-          <p:cNvSpPr txBox="1"/>
-          <p:nvPr/>
-        </p:nvSpPr>
-        <p:spPr>
-          <a:xfrm>
-            <a:off x="1051560" y="4224528"/>
-            <a:ext cx="3108960" cy="457200"/>
-          </a:xfrm>
-          <a:prstGeom prst="rect">
-            <a:avLst/>
-          </a:prstGeom>
-          <a:noFill/>
-          <a:ln/>
-        </p:spPr>
-        <p:txBody>
-          <a:bodyPr wrap="square" lIns="0" tIns="0" rIns="0" bIns="0" rtlCol="0" anchor="t"/>
-          <a:lstStyle/>
-          <a:p>
+              <a:t>Результат: </a:t>
+            </a:r>
             <a:pPr indent="0" marL="0">
               <a:buNone/>
             </a:pPr>
             <a:r>
-              <a:rPr lang="en-US" sz="1100" dirty="0">
-                <a:solidFill>
-                  <a:schemeClr val="tx2"/>
-                </a:solidFill>
-              </a:rPr>
-              <a:t>«клиент обещал заплатить» — форма или фраза</a:t>
-            </a:r>
-            <a:endParaRPr lang="en-US" sz="1100" dirty="0"/>
-          </a:p>
-        </p:txBody>
-      </p:sp>
-      <p:graphicFrame>
-        <p:nvGraphicFramePr>
-          <p:cNvPr id="23" name="sources chart" descr=""/>
-          <p:cNvGraphicFramePr/>
-          <p:nvPr/>
-        </p:nvGraphicFramePr>
-        <p:xfrm>
-          <a:off x="4480560" y="1005840"/>
-          <a:ext cx="4206240" cy="2926080"/>
-        </p:xfrm>
-        <a:graphic xmlns:a="http://schemas.openxmlformats.org/drawingml/2006/main">
-          <a:graphicData uri="http://schemas.openxmlformats.org/drawingml/2006/chart">
-            <c:chart xmlns:c="http://schemas.openxmlformats.org/drawingml/2006/chart" r:id="rId6"/>
-          </a:graphicData>
-        </a:graphic>
-      </p:graphicFrame>
-      <p:sp>
-        <p:nvSpPr>
-          <p:cNvPr id="24" name="sources takeaway"/>
-          <p:cNvSpPr txBox="1"/>
-          <p:nvPr/>
-        </p:nvSpPr>
-        <p:spPr>
-          <a:xfrm>
-            <a:off x="4480560" y="3977640"/>
-            <a:ext cx="4206240" cy="640080"/>
-          </a:xfrm>
-          <a:prstGeom prst="rect">
-            <a:avLst/>
-          </a:prstGeom>
-          <a:noFill/>
-          <a:ln/>
-        </p:spPr>
-        <p:txBody>
-          <a:bodyPr wrap="square" lIns="0" tIns="0" rIns="0" bIns="0" rtlCol="0" anchor="t"/>
-          <a:lstStyle/>
-          <a:p>
-            <a:pPr indent="0" marL="0">
-              <a:buNone/>
-            </a:pPr>
-            <a:r>
-              <a:rPr lang="en-US" sz="1200" b="1" dirty="0">
-                <a:solidFill>
-                  <a:schemeClr val="tx2"/>
-                </a:solidFill>
-              </a:rPr>
-              <a:t>Только по выписке разрыв 5 ноября не виден (вероятность 18%). С 1С и реестрами — найден, вероятность 75%.</a:t>
-            </a:r>
-            <a:endParaRPr lang="en-US" sz="1200" dirty="0"/>
+              <a:rPr lang="en-US" sz="1300" dirty="0">
+                <a:solidFill>
+                  <a:schemeClr val="tx1"/>
+                </a:solidFill>
+              </a:rPr>
+              <a:t>остаток по дням — ожидаемый (P50) и возможный диапазон (P10–P90). Два вида риска: разрыв ниже 0 ₽ и остаток ниже комфортного минимума. Без утечки из будущего (тест) и без подгонки под компании.</a:t>
+            </a:r>
+            <a:endParaRPr lang="en-US" sz="1300" dirty="0"/>
           </a:p>
         </p:txBody>
       </p:sp>
@@ -7479,7 +6903,7 @@
                   <a:schemeClr val="tx2"/>
                 </a:solidFill>
               </a:rPr>
-              <a:t>Как строим прогноз</a:t>
+              <a:t>Проверка качества: честный бэктест</a:t>
             </a:r>
             <a:endParaRPr lang="en-US" sz="2600" dirty="0"/>
           </a:p>
@@ -7487,18 +6911,250 @@
       </p:sp>
       <p:sp>
         <p:nvSpPr>
-          <p:cNvPr id="3" name="pipe card 0"/>
+          <p:cNvPr id="3" name="mae value"/>
+          <p:cNvSpPr txBox="1"/>
+          <p:nvPr/>
+        </p:nvSpPr>
+        <p:spPr>
+          <a:xfrm>
+            <a:off x="457200" y="1051560"/>
+            <a:ext cx="2651760" cy="685800"/>
+          </a:xfrm>
+          <a:prstGeom prst="rect">
+            <a:avLst/>
+          </a:prstGeom>
+          <a:noFill/>
+          <a:ln/>
+        </p:spPr>
+        <p:txBody>
+          <a:bodyPr wrap="square" lIns="0" tIns="0" rIns="0" bIns="0" rtlCol="0" anchor="ctr"/>
+          <a:lstStyle/>
+          <a:p>
+            <a:pPr indent="0" marL="0">
+              <a:buNone/>
+            </a:pPr>
+            <a:r>
+              <a:rPr lang="en-US" sz="4000" b="1" dirty="0">
+                <a:solidFill>
+                  <a:schemeClr val="accent2"/>
+                </a:solidFill>
+              </a:rPr>
+              <a:t>16%</a:t>
+            </a:r>
+            <a:endParaRPr lang="en-US" sz="4000" dirty="0"/>
+          </a:p>
+        </p:txBody>
+      </p:sp>
+      <p:sp>
+        <p:nvSpPr>
+          <p:cNvPr id="4" name="mae label"/>
+          <p:cNvSpPr txBox="1"/>
+          <p:nvPr/>
+        </p:nvSpPr>
+        <p:spPr>
+          <a:xfrm>
+            <a:off x="457200" y="1737360"/>
+            <a:ext cx="2651760" cy="548640"/>
+          </a:xfrm>
+          <a:prstGeom prst="rect">
+            <a:avLst/>
+          </a:prstGeom>
+          <a:noFill/>
+          <a:ln/>
+        </p:spPr>
+        <p:txBody>
+          <a:bodyPr wrap="square" lIns="0" tIns="0" rIns="0" bIns="0" rtlCol="0" anchor="t"/>
+          <a:lstStyle/>
+          <a:p>
+            <a:pPr indent="0" marL="0">
+              <a:buNone/>
+            </a:pPr>
+            <a:r>
+              <a:rPr lang="en-US" sz="1200" dirty="0">
+                <a:solidFill>
+                  <a:schemeClr val="tx1"/>
+                </a:solidFill>
+              </a:rPr>
+              <a:t>ошибка остатка на 30 дней; у наивной модели 21%</a:t>
+            </a:r>
+            <a:endParaRPr lang="en-US" sz="1200" dirty="0"/>
+          </a:p>
+        </p:txBody>
+      </p:sp>
+      <p:sp>
+        <p:nvSpPr>
+          <p:cNvPr id="5" name="coverage value"/>
+          <p:cNvSpPr txBox="1"/>
+          <p:nvPr/>
+        </p:nvSpPr>
+        <p:spPr>
+          <a:xfrm>
+            <a:off x="457200" y="2240280"/>
+            <a:ext cx="2651760" cy="685800"/>
+          </a:xfrm>
+          <a:prstGeom prst="rect">
+            <a:avLst/>
+          </a:prstGeom>
+          <a:noFill/>
+          <a:ln/>
+        </p:spPr>
+        <p:txBody>
+          <a:bodyPr wrap="square" lIns="0" tIns="0" rIns="0" bIns="0" rtlCol="0" anchor="ctr"/>
+          <a:lstStyle/>
+          <a:p>
+            <a:pPr indent="0" marL="0">
+              <a:buNone/>
+            </a:pPr>
+            <a:r>
+              <a:rPr lang="en-US" sz="4000" b="1" dirty="0">
+                <a:solidFill>
+                  <a:schemeClr val="accent2"/>
+                </a:solidFill>
+              </a:rPr>
+              <a:t>80%</a:t>
+            </a:r>
+            <a:endParaRPr lang="en-US" sz="4000" dirty="0"/>
+          </a:p>
+        </p:txBody>
+      </p:sp>
+      <p:sp>
+        <p:nvSpPr>
+          <p:cNvPr id="6" name="coverage label"/>
+          <p:cNvSpPr txBox="1"/>
+          <p:nvPr/>
+        </p:nvSpPr>
+        <p:spPr>
+          <a:xfrm>
+            <a:off x="457200" y="2926080"/>
+            <a:ext cx="2651760" cy="548640"/>
+          </a:xfrm>
+          <a:prstGeom prst="rect">
+            <a:avLst/>
+          </a:prstGeom>
+          <a:noFill/>
+          <a:ln/>
+        </p:spPr>
+        <p:txBody>
+          <a:bodyPr wrap="square" lIns="0" tIns="0" rIns="0" bIns="0" rtlCol="0" anchor="t"/>
+          <a:lstStyle/>
+          <a:p>
+            <a:pPr indent="0" marL="0">
+              <a:buNone/>
+            </a:pPr>
+            <a:r>
+              <a:rPr lang="en-US" sz="1200" dirty="0">
+                <a:solidFill>
+                  <a:schemeClr val="tx1"/>
+                </a:solidFill>
+              </a:rPr>
+              <a:t>дней факт внутри «возможного диапазона» (цель 80%)</a:t>
+            </a:r>
+            <a:endParaRPr lang="en-US" sz="1200" dirty="0"/>
+          </a:p>
+        </p:txBody>
+      </p:sp>
+      <p:sp>
+        <p:nvSpPr>
+          <p:cNvPr id="7" name="recall value"/>
+          <p:cNvSpPr txBox="1"/>
+          <p:nvPr/>
+        </p:nvSpPr>
+        <p:spPr>
+          <a:xfrm>
+            <a:off x="457200" y="3429000"/>
+            <a:ext cx="2651760" cy="685800"/>
+          </a:xfrm>
+          <a:prstGeom prst="rect">
+            <a:avLst/>
+          </a:prstGeom>
+          <a:noFill/>
+          <a:ln/>
+        </p:spPr>
+        <p:txBody>
+          <a:bodyPr wrap="square" lIns="0" tIns="0" rIns="0" bIns="0" rtlCol="0" anchor="ctr"/>
+          <a:lstStyle/>
+          <a:p>
+            <a:pPr indent="0" marL="0">
+              <a:buNone/>
+            </a:pPr>
+            <a:r>
+              <a:rPr lang="en-US" sz="4000" b="1" dirty="0">
+                <a:solidFill>
+                  <a:schemeClr val="accent3"/>
+                </a:solidFill>
+              </a:rPr>
+              <a:t>72%</a:t>
+            </a:r>
+            <a:endParaRPr lang="en-US" sz="4000" dirty="0"/>
+          </a:p>
+        </p:txBody>
+      </p:sp>
+      <p:sp>
+        <p:nvSpPr>
+          <p:cNvPr id="8" name="recall label"/>
+          <p:cNvSpPr txBox="1"/>
+          <p:nvPr/>
+        </p:nvSpPr>
+        <p:spPr>
+          <a:xfrm>
+            <a:off x="457200" y="4114800"/>
+            <a:ext cx="2651760" cy="548640"/>
+          </a:xfrm>
+          <a:prstGeom prst="rect">
+            <a:avLst/>
+          </a:prstGeom>
+          <a:noFill/>
+          <a:ln/>
+        </p:spPr>
+        <p:txBody>
+          <a:bodyPr wrap="square" lIns="0" tIns="0" rIns="0" bIns="0" rtlCol="0" anchor="t"/>
+          <a:lstStyle/>
+          <a:p>
+            <a:pPr indent="0" marL="0">
+              <a:buNone/>
+            </a:pPr>
+            <a:r>
+              <a:rPr lang="en-US" sz="1200" dirty="0">
+                <a:solidFill>
+                  <a:schemeClr val="tx1"/>
+                </a:solidFill>
+              </a:rPr>
+              <a:t>разрывов найдено заранее, в среднем за 14 дней</a:t>
+            </a:r>
+            <a:endParaRPr lang="en-US" sz="1200" dirty="0"/>
+          </a:p>
+        </p:txBody>
+      </p:sp>
+      <p:graphicFrame>
+        <p:nvGraphicFramePr>
+          <p:cNvPr id="9" name="models chart" descr=""/>
+          <p:cNvGraphicFramePr/>
+          <p:nvPr/>
+        </p:nvGraphicFramePr>
+        <p:xfrm>
+          <a:off x="3383280" y="1005840"/>
+          <a:ext cx="5303520" cy="2651760"/>
+        </p:xfrm>
+        <a:graphic xmlns:a="http://schemas.openxmlformats.org/drawingml/2006/main">
+          <a:graphicData uri="http://schemas.openxmlformats.org/drawingml/2006/chart">
+            <c:chart xmlns:c="http://schemas.openxmlformats.org/drawingml/2006/chart" r:id="rId1"/>
+          </a:graphicData>
+        </a:graphic>
+      </p:graphicFrame>
+      <p:sp>
+        <p:nvSpPr>
+          <p:cNvPr id="10" name="method card"/>
           <p:cNvSpPr/>
           <p:nvPr/>
         </p:nvSpPr>
         <p:spPr>
           <a:xfrm>
-            <a:off x="457200" y="1188720"/>
-            <a:ext cx="1536192" cy="2194560"/>
+            <a:off x="3383280" y="3749040"/>
+            <a:ext cx="5303520" cy="868680"/>
           </a:xfrm>
           <a:prstGeom prst="roundRect">
             <a:avLst>
-              <a:gd name="adj" fmla="val 5952"/>
+              <a:gd name="adj" fmla="val 10526"/>
             </a:avLst>
           </a:prstGeom>
           <a:solidFill>
@@ -7509,58 +7165,14 @@
       </p:sp>
       <p:sp>
         <p:nvSpPr>
-          <p:cNvPr id="4" name="pipe 0 circle"/>
-          <p:cNvSpPr/>
-          <p:nvPr/>
-        </p:nvSpPr>
-        <p:spPr>
-          <a:xfrm>
-            <a:off x="950976" y="1371600"/>
-            <a:ext cx="548640" cy="548640"/>
-          </a:xfrm>
-          <a:prstGeom prst="ellipse">
-            <a:avLst/>
-          </a:prstGeom>
-          <a:solidFill>
-            <a:schemeClr val="accent2"/>
-          </a:solidFill>
-          <a:ln/>
-        </p:spPr>
-      </p:sp>
-      <p:pic>
-        <p:nvPicPr>
-          <p:cNvPr id="5" name="pipe 0 icon" descr="preencoded.png">    </p:cNvPr>
-          <p:cNvPicPr>
-            <a:picLocks noChangeAspect="1"/>
-          </p:cNvPicPr>
-          <p:nvPr/>
-        </p:nvPicPr>
-        <p:blipFill>
-          <a:blip r:embed="rId1"/>
-          <a:stretch>
-            <a:fillRect/>
-          </a:stretch>
-        </p:blipFill>
-        <p:spPr>
-          <a:xfrm>
-            <a:off x="1088136" y="1508760"/>
-            <a:ext cx="274320" cy="274320"/>
-          </a:xfrm>
-          <a:prstGeom prst="rect">
-            <a:avLst/>
-          </a:prstGeom>
-        </p:spPr>
-      </p:pic>
-      <p:sp>
-        <p:nvSpPr>
-          <p:cNvPr id="6" name="pipe title 0"/>
+          <p:cNvPr id="11" name="method text"/>
           <p:cNvSpPr txBox="1"/>
           <p:nvPr/>
         </p:nvSpPr>
         <p:spPr>
           <a:xfrm>
-            <a:off x="548640" y="2011680"/>
-            <a:ext cx="1353312" cy="320040"/>
+            <a:off x="3520440" y="3813048"/>
+            <a:ext cx="5029200" cy="731520"/>
           </a:xfrm>
           <a:prstGeom prst="rect">
             <a:avLst/>
@@ -7570,655 +7182,20 @@
         </p:spPr>
         <p:txBody>
           <a:bodyPr wrap="square" lIns="0" tIns="0" rIns="0" bIns="0" rtlCol="0" anchor="ctr"/>
-          <a:lstStyle/>
-          <a:p>
-            <a:pPr algn="ctr" indent="0" marL="0">
-              <a:buNone/>
-            </a:pPr>
-            <a:r>
-              <a:rPr lang="en-US" sz="1300" b="1" dirty="0">
-                <a:solidFill>
-                  <a:schemeClr val="tx1"/>
-                </a:solidFill>
-              </a:rPr>
-              <a:t>Выписка</a:t>
-            </a:r>
-            <a:endParaRPr lang="en-US" sz="1300" dirty="0"/>
-          </a:p>
-        </p:txBody>
-      </p:sp>
-      <p:sp>
-        <p:nvSpPr>
-          <p:cNvPr id="7" name="pipe text 0"/>
-          <p:cNvSpPr txBox="1"/>
-          <p:nvPr/>
-        </p:nvSpPr>
-        <p:spPr>
-          <a:xfrm>
-            <a:off x="566928" y="2377440"/>
-            <a:ext cx="1316736" cy="914400"/>
-          </a:xfrm>
-          <a:prstGeom prst="rect">
-            <a:avLst/>
-          </a:prstGeom>
-          <a:noFill/>
-          <a:ln/>
-        </p:spPr>
-        <p:txBody>
-          <a:bodyPr wrap="square" lIns="0" tIns="0" rIns="0" bIns="0" rtlCol="0" anchor="t"/>
-          <a:lstStyle/>
-          <a:p>
-            <a:pPr algn="ctr" indent="0" marL="0">
-              <a:buNone/>
-            </a:pPr>
-            <a:r>
-              <a:rPr lang="en-US" sz="1100" dirty="0">
-                <a:solidFill>
-                  <a:schemeClr val="tx2"/>
-                </a:solidFill>
-              </a:rPr>
-              <a:t>чистка: дубли, пропуски, BOM, ИНН строкой</a:t>
-            </a:r>
-            <a:endParaRPr lang="en-US" sz="1100" dirty="0"/>
-          </a:p>
-        </p:txBody>
-      </p:sp>
-      <p:sp>
-        <p:nvSpPr>
-          <p:cNvPr id="8" name="pipe card 1"/>
-          <p:cNvSpPr/>
-          <p:nvPr/>
-        </p:nvSpPr>
-        <p:spPr>
-          <a:xfrm>
-            <a:off x="2130552" y="1188720"/>
-            <a:ext cx="1536192" cy="2194560"/>
-          </a:xfrm>
-          <a:prstGeom prst="roundRect">
-            <a:avLst>
-              <a:gd name="adj" fmla="val 5952"/>
-            </a:avLst>
-          </a:prstGeom>
-          <a:solidFill>
-            <a:schemeClr val="bg2"/>
-          </a:solidFill>
-          <a:ln/>
-        </p:spPr>
-      </p:sp>
-      <p:sp>
-        <p:nvSpPr>
-          <p:cNvPr id="9" name="pipe 1 circle"/>
-          <p:cNvSpPr/>
-          <p:nvPr/>
-        </p:nvSpPr>
-        <p:spPr>
-          <a:xfrm>
-            <a:off x="2624328" y="1371600"/>
-            <a:ext cx="548640" cy="548640"/>
-          </a:xfrm>
-          <a:prstGeom prst="ellipse">
-            <a:avLst/>
-          </a:prstGeom>
-          <a:solidFill>
-            <a:schemeClr val="accent2"/>
-          </a:solidFill>
-          <a:ln/>
-        </p:spPr>
-      </p:sp>
-      <p:pic>
-        <p:nvPicPr>
-          <p:cNvPr id="10" name="pipe 1 icon" descr="preencoded.png">    </p:cNvPr>
-          <p:cNvPicPr>
-            <a:picLocks noChangeAspect="1"/>
-          </p:cNvPicPr>
-          <p:nvPr/>
-        </p:nvPicPr>
-        <p:blipFill>
-          <a:blip r:embed="rId2"/>
-          <a:stretch>
-            <a:fillRect/>
-          </a:stretch>
-        </p:blipFill>
-        <p:spPr>
-          <a:xfrm>
-            <a:off x="2761488" y="1508760"/>
-            <a:ext cx="274320" cy="274320"/>
-          </a:xfrm>
-          <a:prstGeom prst="rect">
-            <a:avLst/>
-          </a:prstGeom>
-        </p:spPr>
-      </p:pic>
-      <p:sp>
-        <p:nvSpPr>
-          <p:cNvPr id="11" name="pipe title 1"/>
-          <p:cNvSpPr txBox="1"/>
-          <p:nvPr/>
-        </p:nvSpPr>
-        <p:spPr>
-          <a:xfrm>
-            <a:off x="2221992" y="2011680"/>
-            <a:ext cx="1353312" cy="320040"/>
-          </a:xfrm>
-          <a:prstGeom prst="rect">
-            <a:avLst/>
-          </a:prstGeom>
-          <a:noFill/>
-          <a:ln/>
-        </p:spPr>
-        <p:txBody>
-          <a:bodyPr wrap="square" lIns="0" tIns="0" rIns="0" bIns="0" rtlCol="0" anchor="ctr"/>
-          <a:lstStyle/>
-          <a:p>
-            <a:pPr algn="ctr" indent="0" marL="0">
-              <a:buNone/>
-            </a:pPr>
-            <a:r>
-              <a:rPr lang="en-US" sz="1300" b="1" dirty="0">
-                <a:solidFill>
-                  <a:schemeClr val="tx1"/>
-                </a:solidFill>
-              </a:rPr>
-              <a:t>Категории</a:t>
-            </a:r>
-            <a:endParaRPr lang="en-US" sz="1300" dirty="0"/>
-          </a:p>
-        </p:txBody>
-      </p:sp>
-      <p:sp>
-        <p:nvSpPr>
-          <p:cNvPr id="12" name="pipe text 1"/>
-          <p:cNvSpPr txBox="1"/>
-          <p:nvPr/>
-        </p:nvSpPr>
-        <p:spPr>
-          <a:xfrm>
-            <a:off x="2240280" y="2377440"/>
-            <a:ext cx="1316736" cy="914400"/>
-          </a:xfrm>
-          <a:prstGeom prst="rect">
-            <a:avLst/>
-          </a:prstGeom>
-          <a:noFill/>
-          <a:ln/>
-        </p:spPr>
-        <p:txBody>
-          <a:bodyPr wrap="square" lIns="0" tIns="0" rIns="0" bIns="0" rtlCol="0" anchor="t"/>
-          <a:lstStyle/>
-          <a:p>
-            <a:pPr algn="ctr" indent="0" marL="0">
-              <a:buNone/>
-            </a:pPr>
-            <a:r>
-              <a:rPr lang="en-US" sz="1100" dirty="0">
-                <a:solidFill>
-                  <a:schemeClr val="tx2"/>
-                </a:solidFill>
-              </a:rPr>
-              <a:t>правила + память контрагента + ML</a:t>
-            </a:r>
-            <a:endParaRPr lang="en-US" sz="1100" dirty="0"/>
-          </a:p>
-        </p:txBody>
-      </p:sp>
-      <p:sp>
-        <p:nvSpPr>
-          <p:cNvPr id="13" name="pipe card 2"/>
-          <p:cNvSpPr/>
-          <p:nvPr/>
-        </p:nvSpPr>
-        <p:spPr>
-          <a:xfrm>
-            <a:off x="3803904" y="1188720"/>
-            <a:ext cx="1536192" cy="2194560"/>
-          </a:xfrm>
-          <a:prstGeom prst="roundRect">
-            <a:avLst>
-              <a:gd name="adj" fmla="val 5952"/>
-            </a:avLst>
-          </a:prstGeom>
-          <a:solidFill>
-            <a:schemeClr val="bg2"/>
-          </a:solidFill>
-          <a:ln/>
-        </p:spPr>
-      </p:sp>
-      <p:sp>
-        <p:nvSpPr>
-          <p:cNvPr id="14" name="pipe 2 circle"/>
-          <p:cNvSpPr/>
-          <p:nvPr/>
-        </p:nvSpPr>
-        <p:spPr>
-          <a:xfrm>
-            <a:off x="4297680" y="1371600"/>
-            <a:ext cx="548640" cy="548640"/>
-          </a:xfrm>
-          <a:prstGeom prst="ellipse">
-            <a:avLst/>
-          </a:prstGeom>
-          <a:solidFill>
-            <a:schemeClr val="accent2"/>
-          </a:solidFill>
-          <a:ln/>
-        </p:spPr>
-      </p:sp>
-      <p:pic>
-        <p:nvPicPr>
-          <p:cNvPr id="15" name="pipe 2 icon" descr="preencoded.png">    </p:cNvPr>
-          <p:cNvPicPr>
-            <a:picLocks noChangeAspect="1"/>
-          </p:cNvPicPr>
-          <p:nvPr/>
-        </p:nvPicPr>
-        <p:blipFill>
-          <a:blip r:embed="rId3"/>
-          <a:stretch>
-            <a:fillRect/>
-          </a:stretch>
-        </p:blipFill>
-        <p:spPr>
-          <a:xfrm>
-            <a:off x="4434840" y="1508760"/>
-            <a:ext cx="274320" cy="274320"/>
-          </a:xfrm>
-          <a:prstGeom prst="rect">
-            <a:avLst/>
-          </a:prstGeom>
-        </p:spPr>
-      </p:pic>
-      <p:sp>
-        <p:nvSpPr>
-          <p:cNvPr id="16" name="pipe title 2"/>
-          <p:cNvSpPr txBox="1"/>
-          <p:nvPr/>
-        </p:nvSpPr>
-        <p:spPr>
-          <a:xfrm>
-            <a:off x="3895344" y="2011680"/>
-            <a:ext cx="1353312" cy="320040"/>
-          </a:xfrm>
-          <a:prstGeom prst="rect">
-            <a:avLst/>
-          </a:prstGeom>
-          <a:noFill/>
-          <a:ln/>
-        </p:spPr>
-        <p:txBody>
-          <a:bodyPr wrap="square" lIns="0" tIns="0" rIns="0" bIns="0" rtlCol="0" anchor="ctr"/>
-          <a:lstStyle/>
-          <a:p>
-            <a:pPr algn="ctr" indent="0" marL="0">
-              <a:buNone/>
-            </a:pPr>
-            <a:r>
-              <a:rPr lang="en-US" sz="1300" b="1" dirty="0">
-                <a:solidFill>
-                  <a:schemeClr val="tx1"/>
-                </a:solidFill>
-              </a:rPr>
-              <a:t>Регулярные платежи</a:t>
-            </a:r>
-            <a:endParaRPr lang="en-US" sz="1300" dirty="0"/>
-          </a:p>
-        </p:txBody>
-      </p:sp>
-      <p:sp>
-        <p:nvSpPr>
-          <p:cNvPr id="17" name="pipe text 2"/>
-          <p:cNvSpPr txBox="1"/>
-          <p:nvPr/>
-        </p:nvSpPr>
-        <p:spPr>
-          <a:xfrm>
-            <a:off x="3913632" y="2377440"/>
-            <a:ext cx="1316736" cy="914400"/>
-          </a:xfrm>
-          <a:prstGeom prst="rect">
-            <a:avLst/>
-          </a:prstGeom>
-          <a:noFill/>
-          <a:ln/>
-        </p:spPr>
-        <p:txBody>
-          <a:bodyPr wrap="square" lIns="0" tIns="0" rIns="0" bIns="0" rtlCol="0" anchor="t"/>
-          <a:lstStyle/>
-          <a:p>
-            <a:pPr algn="ctr" indent="0" marL="0">
-              <a:buNone/>
-            </a:pPr>
-            <a:r>
-              <a:rPr lang="en-US" sz="1100" dirty="0">
-                <a:solidFill>
-                  <a:schemeClr val="tx2"/>
-                </a:solidFill>
-              </a:rPr>
-              <a:t>зарплата, аренда, ЕНП, кредиты; 74% приходят в ±3 дня</a:t>
-            </a:r>
-            <a:endParaRPr lang="en-US" sz="1100" dirty="0"/>
-          </a:p>
-        </p:txBody>
-      </p:sp>
-      <p:sp>
-        <p:nvSpPr>
-          <p:cNvPr id="18" name="pipe card 3"/>
-          <p:cNvSpPr/>
-          <p:nvPr/>
-        </p:nvSpPr>
-        <p:spPr>
-          <a:xfrm>
-            <a:off x="5477256" y="1188720"/>
-            <a:ext cx="1536192" cy="2194560"/>
-          </a:xfrm>
-          <a:prstGeom prst="roundRect">
-            <a:avLst>
-              <a:gd name="adj" fmla="val 5952"/>
-            </a:avLst>
-          </a:prstGeom>
-          <a:solidFill>
-            <a:schemeClr val="bg2"/>
-          </a:solidFill>
-          <a:ln/>
-        </p:spPr>
-      </p:sp>
-      <p:sp>
-        <p:nvSpPr>
-          <p:cNvPr id="19" name="pipe 3 circle"/>
-          <p:cNvSpPr/>
-          <p:nvPr/>
-        </p:nvSpPr>
-        <p:spPr>
-          <a:xfrm>
-            <a:off x="5971032" y="1371600"/>
-            <a:ext cx="548640" cy="548640"/>
-          </a:xfrm>
-          <a:prstGeom prst="ellipse">
-            <a:avLst/>
-          </a:prstGeom>
-          <a:solidFill>
-            <a:schemeClr val="accent2"/>
-          </a:solidFill>
-          <a:ln/>
-        </p:spPr>
-      </p:sp>
-      <p:pic>
-        <p:nvPicPr>
-          <p:cNvPr id="20" name="pipe 3 icon" descr="preencoded.png">    </p:cNvPr>
-          <p:cNvPicPr>
-            <a:picLocks noChangeAspect="1"/>
-          </p:cNvPicPr>
-          <p:nvPr/>
-        </p:nvPicPr>
-        <p:blipFill>
-          <a:blip r:embed="rId4"/>
-          <a:stretch>
-            <a:fillRect/>
-          </a:stretch>
-        </p:blipFill>
-        <p:spPr>
-          <a:xfrm>
-            <a:off x="6108192" y="1508760"/>
-            <a:ext cx="274320" cy="274320"/>
-          </a:xfrm>
-          <a:prstGeom prst="rect">
-            <a:avLst/>
-          </a:prstGeom>
-        </p:spPr>
-      </p:pic>
-      <p:sp>
-        <p:nvSpPr>
-          <p:cNvPr id="21" name="pipe title 3"/>
-          <p:cNvSpPr txBox="1"/>
-          <p:nvPr/>
-        </p:nvSpPr>
-        <p:spPr>
-          <a:xfrm>
-            <a:off x="5568696" y="2011680"/>
-            <a:ext cx="1353312" cy="320040"/>
-          </a:xfrm>
-          <a:prstGeom prst="rect">
-            <a:avLst/>
-          </a:prstGeom>
-          <a:noFill/>
-          <a:ln/>
-        </p:spPr>
-        <p:txBody>
-          <a:bodyPr wrap="square" lIns="0" tIns="0" rIns="0" bIns="0" rtlCol="0" anchor="ctr"/>
-          <a:lstStyle/>
-          <a:p>
-            <a:pPr algn="ctr" indent="0" marL="0">
-              <a:buNone/>
-            </a:pPr>
-            <a:r>
-              <a:rPr lang="en-US" sz="1300" b="1" dirty="0">
-                <a:solidFill>
-                  <a:schemeClr val="tx1"/>
-                </a:solidFill>
-              </a:rPr>
-              <a:t>Монте-Карло</a:t>
-            </a:r>
-            <a:endParaRPr lang="en-US" sz="1300" dirty="0"/>
-          </a:p>
-        </p:txBody>
-      </p:sp>
-      <p:sp>
-        <p:nvSpPr>
-          <p:cNvPr id="22" name="pipe text 3"/>
-          <p:cNvSpPr txBox="1"/>
-          <p:nvPr/>
-        </p:nvSpPr>
-        <p:spPr>
-          <a:xfrm>
-            <a:off x="5586984" y="2377440"/>
-            <a:ext cx="1316736" cy="914400"/>
-          </a:xfrm>
-          <a:prstGeom prst="rect">
-            <a:avLst/>
-          </a:prstGeom>
-          <a:noFill/>
-          <a:ln/>
-        </p:spPr>
-        <p:txBody>
-          <a:bodyPr wrap="square" lIns="0" tIns="0" rIns="0" bIns="0" rtlCol="0" anchor="t"/>
-          <a:lstStyle/>
-          <a:p>
-            <a:pPr algn="ctr" indent="0" marL="0">
-              <a:buNone/>
-            </a:pPr>
-            <a:r>
-              <a:rPr lang="en-US" sz="1100" dirty="0">
-                <a:solidFill>
-                  <a:schemeClr val="tx2"/>
-                </a:solidFill>
-              </a:rPr>
-              <a:t>2 000 вариантов будущего: задержки оплат, колебания выручки</a:t>
-            </a:r>
-            <a:endParaRPr lang="en-US" sz="1100" dirty="0"/>
-          </a:p>
-        </p:txBody>
-      </p:sp>
-      <p:sp>
-        <p:nvSpPr>
-          <p:cNvPr id="23" name="pipe card 4"/>
-          <p:cNvSpPr/>
-          <p:nvPr/>
-        </p:nvSpPr>
-        <p:spPr>
-          <a:xfrm>
-            <a:off x="7150608" y="1188720"/>
-            <a:ext cx="1536192" cy="2194560"/>
-          </a:xfrm>
-          <a:prstGeom prst="roundRect">
-            <a:avLst>
-              <a:gd name="adj" fmla="val 5952"/>
-            </a:avLst>
-          </a:prstGeom>
-          <a:solidFill>
-            <a:schemeClr val="bg2"/>
-          </a:solidFill>
-          <a:ln/>
-        </p:spPr>
-      </p:sp>
-      <p:sp>
-        <p:nvSpPr>
-          <p:cNvPr id="24" name="pipe 4 circle"/>
-          <p:cNvSpPr/>
-          <p:nvPr/>
-        </p:nvSpPr>
-        <p:spPr>
-          <a:xfrm>
-            <a:off x="7644384" y="1371600"/>
-            <a:ext cx="548640" cy="548640"/>
-          </a:xfrm>
-          <a:prstGeom prst="ellipse">
-            <a:avLst/>
-          </a:prstGeom>
-          <a:solidFill>
-            <a:schemeClr val="accent3"/>
-          </a:solidFill>
-          <a:ln/>
-        </p:spPr>
-      </p:sp>
-      <p:pic>
-        <p:nvPicPr>
-          <p:cNvPr id="25" name="pipe 4 icon" descr="preencoded.png">    </p:cNvPr>
-          <p:cNvPicPr>
-            <a:picLocks noChangeAspect="1"/>
-          </p:cNvPicPr>
-          <p:nvPr/>
-        </p:nvPicPr>
-        <p:blipFill>
-          <a:blip r:embed="rId5"/>
-          <a:stretch>
-            <a:fillRect/>
-          </a:stretch>
-        </p:blipFill>
-        <p:spPr>
-          <a:xfrm>
-            <a:off x="7781544" y="1508760"/>
-            <a:ext cx="274320" cy="274320"/>
-          </a:xfrm>
-          <a:prstGeom prst="rect">
-            <a:avLst/>
-          </a:prstGeom>
-        </p:spPr>
-      </p:pic>
-      <p:sp>
-        <p:nvSpPr>
-          <p:cNvPr id="26" name="pipe title 4"/>
-          <p:cNvSpPr txBox="1"/>
-          <p:nvPr/>
-        </p:nvSpPr>
-        <p:spPr>
-          <a:xfrm>
-            <a:off x="7242048" y="2011680"/>
-            <a:ext cx="1353312" cy="320040"/>
-          </a:xfrm>
-          <a:prstGeom prst="rect">
-            <a:avLst/>
-          </a:prstGeom>
-          <a:noFill/>
-          <a:ln/>
-        </p:spPr>
-        <p:txBody>
-          <a:bodyPr wrap="square" lIns="0" tIns="0" rIns="0" bIns="0" rtlCol="0" anchor="ctr"/>
-          <a:lstStyle/>
-          <a:p>
-            <a:pPr algn="ctr" indent="0" marL="0">
-              <a:buNone/>
-            </a:pPr>
-            <a:r>
-              <a:rPr lang="en-US" sz="1300" b="1" dirty="0">
-                <a:solidFill>
-                  <a:schemeClr val="tx1"/>
-                </a:solidFill>
-              </a:rPr>
-              <a:t>Риски</a:t>
-            </a:r>
-            <a:endParaRPr lang="en-US" sz="1300" dirty="0"/>
-          </a:p>
-        </p:txBody>
-      </p:sp>
-      <p:sp>
-        <p:nvSpPr>
-          <p:cNvPr id="27" name="pipe text 4"/>
-          <p:cNvSpPr txBox="1"/>
-          <p:nvPr/>
-        </p:nvSpPr>
-        <p:spPr>
-          <a:xfrm>
-            <a:off x="7260336" y="2377440"/>
-            <a:ext cx="1316736" cy="914400"/>
-          </a:xfrm>
-          <a:prstGeom prst="rect">
-            <a:avLst/>
-          </a:prstGeom>
-          <a:noFill/>
-          <a:ln/>
-        </p:spPr>
-        <p:txBody>
-          <a:bodyPr wrap="square" lIns="0" tIns="0" rIns="0" bIns="0" rtlCol="0" anchor="t"/>
-          <a:lstStyle/>
-          <a:p>
-            <a:pPr algn="ctr" indent="0" marL="0">
-              <a:buNone/>
-            </a:pPr>
-            <a:r>
-              <a:rPr lang="en-US" sz="1100" dirty="0">
-                <a:solidFill>
-                  <a:schemeClr val="tx2"/>
-                </a:solidFill>
-              </a:rPr>
-              <a:t>дата, сумма, вероятность, причина и действия</a:t>
-            </a:r>
-            <a:endParaRPr lang="en-US" sz="1100" dirty="0"/>
-          </a:p>
-        </p:txBody>
-      </p:sp>
-      <p:sp>
-        <p:nvSpPr>
-          <p:cNvPr id="28" name="pipe result"/>
-          <p:cNvSpPr txBox="1"/>
-          <p:nvPr/>
-        </p:nvSpPr>
-        <p:spPr>
-          <a:xfrm>
-            <a:off x="457200" y="3611880"/>
-            <a:ext cx="8229600" cy="914400"/>
-          </a:xfrm>
-          <a:prstGeom prst="rect">
-            <a:avLst/>
-          </a:prstGeom>
-          <a:noFill/>
-          <a:ln/>
-        </p:spPr>
-        <p:txBody>
-          <a:bodyPr wrap="square" lIns="0" tIns="0" rIns="0" bIns="0" rtlCol="0" anchor="t"/>
           <a:lstStyle/>
           <a:p>
             <a:pPr indent="0" marL="0">
               <a:buNone/>
             </a:pPr>
             <a:r>
-              <a:rPr lang="en-US" sz="1300" b="1" dirty="0">
+              <a:rPr lang="en-US" sz="1100" dirty="0">
                 <a:solidFill>
                   <a:schemeClr val="tx1"/>
                 </a:solidFill>
               </a:rPr>
-              <a:t>Результат: </a:t>
-            </a:r>
-            <a:pPr indent="0" marL="0">
-              <a:buNone/>
-            </a:pPr>
-            <a:r>
-              <a:rPr lang="en-US" sz="1300" dirty="0">
-                <a:solidFill>
-                  <a:schemeClr val="tx1"/>
-                </a:solidFill>
-              </a:rPr>
-              <a:t>остаток по дням — ожидаемый (P50) и возможный диапазон (P10–P90). Два вида риска: разрыв ниже 0 ₽ и остаток ниже комфортного минимума владельца. Новые операции обновляют прогноз без полного пересчёта (~0,05 с).</a:t>
-            </a:r>
-            <a:endParaRPr lang="en-US" sz="1300" dirty="0"/>
+              <a:t>150 компаний разделены на dev и holdout (по отраслям). Параметры — только на dev; цифры — только holdout: 73 компании, 542 прогнозов на модель, rolling origin 8 × 30 дней.</a:t>
+            </a:r>
+            <a:endParaRPr lang="en-US" sz="1100" dirty="0"/>
           </a:p>
         </p:txBody>
       </p:sp>
@@ -8324,22 +7301,90 @@
                   <a:schemeClr val="tx2"/>
                 </a:solidFill>
               </a:rPr>
-              <a:t>Проверка качества: честный бэктест</a:t>
+              <a:t>Архитектура и безопасность</a:t>
             </a:r>
             <a:endParaRPr lang="en-US" sz="2600" dirty="0"/>
           </a:p>
         </p:txBody>
       </p:sp>
-      <p:sp>
-        <p:nvSpPr>
-          <p:cNvPr id="3" name="mae value"/>
+      <p:pic>
+        <p:nvPicPr>
+          <p:cNvPr id="3" name="architecture diagram" descr="/Users/alex/Documents/HAKATON/cashflow/docs/architecture_slide.png">    </p:cNvPr>
+          <p:cNvPicPr>
+            <a:picLocks noChangeAspect="1"/>
+          </p:cNvPicPr>
+          <p:nvPr/>
+        </p:nvPicPr>
+        <p:blipFill>
+          <a:blip r:embed="rId1"/>
+          <a:stretch>
+            <a:fillRect/>
+          </a:stretch>
+        </p:blipFill>
+        <p:spPr>
+          <a:xfrm>
+            <a:off x="457200" y="1051560"/>
+            <a:ext cx="4685553" cy="2743200"/>
+          </a:xfrm>
+          <a:prstGeom prst="rect">
+            <a:avLst/>
+          </a:prstGeom>
+        </p:spPr>
+      </p:pic>
+      <p:sp>
+        <p:nvSpPr>
+          <p:cNvPr id="4" name="security 0 circle"/>
+          <p:cNvSpPr/>
+          <p:nvPr/>
+        </p:nvSpPr>
+        <p:spPr>
+          <a:xfrm>
+            <a:off x="5417073" y="1051560"/>
+            <a:ext cx="384048" cy="384048"/>
+          </a:xfrm>
+          <a:prstGeom prst="ellipse">
+            <a:avLst/>
+          </a:prstGeom>
+          <a:solidFill>
+            <a:schemeClr val="accent2"/>
+          </a:solidFill>
+          <a:ln/>
+        </p:spPr>
+      </p:sp>
+      <p:pic>
+        <p:nvPicPr>
+          <p:cNvPr id="5" name="security 0 icon" descr="preencoded.png">    </p:cNvPr>
+          <p:cNvPicPr>
+            <a:picLocks noChangeAspect="1"/>
+          </p:cNvPicPr>
+          <p:nvPr/>
+        </p:nvPicPr>
+        <p:blipFill>
+          <a:blip r:embed="rId2"/>
+          <a:stretch>
+            <a:fillRect/>
+          </a:stretch>
+        </p:blipFill>
+        <p:spPr>
+          <a:xfrm>
+            <a:off x="5513085" y="1147572"/>
+            <a:ext cx="192024" cy="192024"/>
+          </a:xfrm>
+          <a:prstGeom prst="rect">
+            <a:avLst/>
+          </a:prstGeom>
+        </p:spPr>
+      </p:pic>
+      <p:sp>
+        <p:nvSpPr>
+          <p:cNvPr id="6" name="security text 0"/>
           <p:cNvSpPr txBox="1"/>
           <p:nvPr/>
         </p:nvSpPr>
         <p:spPr>
           <a:xfrm>
-            <a:off x="457200" y="1051560"/>
-            <a:ext cx="2651760" cy="685800"/>
+            <a:off x="5919993" y="1033272"/>
+            <a:ext cx="2766807" cy="457200"/>
           </a:xfrm>
           <a:prstGeom prst="rect">
             <a:avLst/>
@@ -8355,27 +7400,71 @@
               <a:buNone/>
             </a:pPr>
             <a:r>
-              <a:rPr lang="en-US" sz="4000" b="1" dirty="0">
-                <a:solidFill>
-                  <a:schemeClr val="accent2"/>
-                </a:solidFill>
-              </a:rPr>
-              <a:t>16%</a:t>
-            </a:r>
-            <a:endParaRPr lang="en-US" sz="4000" dirty="0"/>
-          </a:p>
-        </p:txBody>
-      </p:sp>
-      <p:sp>
-        <p:nvSpPr>
-          <p:cNvPr id="4" name="mae label"/>
+              <a:rPr lang="en-US" sz="1100" dirty="0">
+                <a:solidFill>
+                  <a:schemeClr val="tx1"/>
+                </a:solidFill>
+              </a:rPr>
+              <a:t>JWT, пароли PBKDF2</a:t>
+            </a:r>
+            <a:endParaRPr lang="en-US" sz="1100" dirty="0"/>
+          </a:p>
+        </p:txBody>
+      </p:sp>
+      <p:sp>
+        <p:nvSpPr>
+          <p:cNvPr id="7" name="security 1 circle"/>
+          <p:cNvSpPr/>
+          <p:nvPr/>
+        </p:nvSpPr>
+        <p:spPr>
+          <a:xfrm>
+            <a:off x="5417073" y="1618488"/>
+            <a:ext cx="384048" cy="384048"/>
+          </a:xfrm>
+          <a:prstGeom prst="ellipse">
+            <a:avLst/>
+          </a:prstGeom>
+          <a:solidFill>
+            <a:schemeClr val="accent2"/>
+          </a:solidFill>
+          <a:ln/>
+        </p:spPr>
+      </p:sp>
+      <p:pic>
+        <p:nvPicPr>
+          <p:cNvPr id="8" name="security 1 icon" descr="preencoded.png">    </p:cNvPr>
+          <p:cNvPicPr>
+            <a:picLocks noChangeAspect="1"/>
+          </p:cNvPicPr>
+          <p:nvPr/>
+        </p:nvPicPr>
+        <p:blipFill>
+          <a:blip r:embed="rId3"/>
+          <a:stretch>
+            <a:fillRect/>
+          </a:stretch>
+        </p:blipFill>
+        <p:spPr>
+          <a:xfrm>
+            <a:off x="5513085" y="1714500"/>
+            <a:ext cx="192024" cy="192024"/>
+          </a:xfrm>
+          <a:prstGeom prst="rect">
+            <a:avLst/>
+          </a:prstGeom>
+        </p:spPr>
+      </p:pic>
+      <p:sp>
+        <p:nvSpPr>
+          <p:cNvPr id="9" name="security text 1"/>
           <p:cNvSpPr txBox="1"/>
           <p:nvPr/>
         </p:nvSpPr>
         <p:spPr>
           <a:xfrm>
-            <a:off x="457200" y="1737360"/>
-            <a:ext cx="2651760" cy="548640"/>
+            <a:off x="5919993" y="1600200"/>
+            <a:ext cx="2766807" cy="457200"/>
           </a:xfrm>
           <a:prstGeom prst="rect">
             <a:avLst/>
@@ -8384,34 +7473,78 @@
           <a:ln/>
         </p:spPr>
         <p:txBody>
-          <a:bodyPr wrap="square" lIns="0" tIns="0" rIns="0" bIns="0" rtlCol="0" anchor="t"/>
+          <a:bodyPr wrap="square" lIns="0" tIns="0" rIns="0" bIns="0" rtlCol="0" anchor="ctr"/>
           <a:lstStyle/>
           <a:p>
             <a:pPr indent="0" marL="0">
               <a:buNone/>
             </a:pPr>
             <a:r>
-              <a:rPr lang="en-US" sz="1200" dirty="0">
+              <a:rPr lang="en-US" sz="1100" dirty="0">
                 <a:solidFill>
                   <a:schemeClr val="tx1"/>
                 </a:solidFill>
               </a:rPr>
-              <a:t>ошибка остатка на 30 дней; у наивной модели 21%</a:t>
-            </a:r>
-            <a:endParaRPr lang="en-US" sz="1200" dirty="0"/>
-          </a:p>
-        </p:txBody>
-      </p:sp>
-      <p:sp>
-        <p:nvSpPr>
-          <p:cNvPr id="5" name="coverage value"/>
+              <a:t>только своя компания; у гостя демо — своя копия</a:t>
+            </a:r>
+            <a:endParaRPr lang="en-US" sz="1100" dirty="0"/>
+          </a:p>
+        </p:txBody>
+      </p:sp>
+      <p:sp>
+        <p:nvSpPr>
+          <p:cNvPr id="10" name="security 2 circle"/>
+          <p:cNvSpPr/>
+          <p:nvPr/>
+        </p:nvSpPr>
+        <p:spPr>
+          <a:xfrm>
+            <a:off x="5417073" y="2185416"/>
+            <a:ext cx="384048" cy="384048"/>
+          </a:xfrm>
+          <a:prstGeom prst="ellipse">
+            <a:avLst/>
+          </a:prstGeom>
+          <a:solidFill>
+            <a:schemeClr val="accent2"/>
+          </a:solidFill>
+          <a:ln/>
+        </p:spPr>
+      </p:sp>
+      <p:pic>
+        <p:nvPicPr>
+          <p:cNvPr id="11" name="security 2 icon" descr="preencoded.png">    </p:cNvPr>
+          <p:cNvPicPr>
+            <a:picLocks noChangeAspect="1"/>
+          </p:cNvPicPr>
+          <p:nvPr/>
+        </p:nvPicPr>
+        <p:blipFill>
+          <a:blip r:embed="rId4"/>
+          <a:stretch>
+            <a:fillRect/>
+          </a:stretch>
+        </p:blipFill>
+        <p:spPr>
+          <a:xfrm>
+            <a:off x="5513085" y="2281428"/>
+            <a:ext cx="192024" cy="192024"/>
+          </a:xfrm>
+          <a:prstGeom prst="rect">
+            <a:avLst/>
+          </a:prstGeom>
+        </p:spPr>
+      </p:pic>
+      <p:sp>
+        <p:nvSpPr>
+          <p:cNvPr id="12" name="security text 2"/>
           <p:cNvSpPr txBox="1"/>
           <p:nvPr/>
         </p:nvSpPr>
         <p:spPr>
           <a:xfrm>
-            <a:off x="457200" y="2240280"/>
-            <a:ext cx="2651760" cy="685800"/>
+            <a:off x="5919993" y="2167128"/>
+            <a:ext cx="2766807" cy="457200"/>
           </a:xfrm>
           <a:prstGeom prst="rect">
             <a:avLst/>
@@ -8427,27 +7560,71 @@
               <a:buNone/>
             </a:pPr>
             <a:r>
-              <a:rPr lang="en-US" sz="4000" b="1" dirty="0">
-                <a:solidFill>
-                  <a:schemeClr val="accent2"/>
-                </a:solidFill>
-              </a:rPr>
-              <a:t>80%</a:t>
-            </a:r>
-            <a:endParaRPr lang="en-US" sz="4000" dirty="0"/>
-          </a:p>
-        </p:txBody>
-      </p:sp>
-      <p:sp>
-        <p:nvSpPr>
-          <p:cNvPr id="6" name="coverage label"/>
+              <a:rPr lang="en-US" sz="1100" dirty="0">
+                <a:solidFill>
+                  <a:schemeClr val="tx1"/>
+                </a:solidFill>
+              </a:rPr>
+              <a:t>в логах нет ИНН, сумм, названий, токенов (тест)</a:t>
+            </a:r>
+            <a:endParaRPr lang="en-US" sz="1100" dirty="0"/>
+          </a:p>
+        </p:txBody>
+      </p:sp>
+      <p:sp>
+        <p:nvSpPr>
+          <p:cNvPr id="13" name="security 3 circle"/>
+          <p:cNvSpPr/>
+          <p:nvPr/>
+        </p:nvSpPr>
+        <p:spPr>
+          <a:xfrm>
+            <a:off x="5417073" y="2752344"/>
+            <a:ext cx="384048" cy="384048"/>
+          </a:xfrm>
+          <a:prstGeom prst="ellipse">
+            <a:avLst/>
+          </a:prstGeom>
+          <a:solidFill>
+            <a:schemeClr val="accent2"/>
+          </a:solidFill>
+          <a:ln/>
+        </p:spPr>
+      </p:sp>
+      <p:pic>
+        <p:nvPicPr>
+          <p:cNvPr id="14" name="security 3 icon" descr="preencoded.png">    </p:cNvPr>
+          <p:cNvPicPr>
+            <a:picLocks noChangeAspect="1"/>
+          </p:cNvPicPr>
+          <p:nvPr/>
+        </p:nvPicPr>
+        <p:blipFill>
+          <a:blip r:embed="rId5"/>
+          <a:stretch>
+            <a:fillRect/>
+          </a:stretch>
+        </p:blipFill>
+        <p:spPr>
+          <a:xfrm>
+            <a:off x="5513085" y="2848356"/>
+            <a:ext cx="192024" cy="192024"/>
+          </a:xfrm>
+          <a:prstGeom prst="rect">
+            <a:avLst/>
+          </a:prstGeom>
+        </p:spPr>
+      </p:pic>
+      <p:sp>
+        <p:nvSpPr>
+          <p:cNvPr id="15" name="security text 3"/>
           <p:cNvSpPr txBox="1"/>
           <p:nvPr/>
         </p:nvSpPr>
         <p:spPr>
           <a:xfrm>
-            <a:off x="457200" y="2926080"/>
-            <a:ext cx="2651760" cy="548640"/>
+            <a:off x="5919993" y="2734056"/>
+            <a:ext cx="2766807" cy="457200"/>
           </a:xfrm>
           <a:prstGeom prst="rect">
             <a:avLst/>
@@ -8456,34 +7633,78 @@
           <a:ln/>
         </p:spPr>
         <p:txBody>
-          <a:bodyPr wrap="square" lIns="0" tIns="0" rIns="0" bIns="0" rtlCol="0" anchor="t"/>
+          <a:bodyPr wrap="square" lIns="0" tIns="0" rIns="0" bIns="0" rtlCol="0" anchor="ctr"/>
           <a:lstStyle/>
           <a:p>
             <a:pPr indent="0" marL="0">
               <a:buNone/>
             </a:pPr>
             <a:r>
-              <a:rPr lang="en-US" sz="1200" dirty="0">
+              <a:rPr lang="en-US" sz="1100" dirty="0">
                 <a:solidFill>
                   <a:schemeClr val="tx1"/>
                 </a:solidFill>
               </a:rPr>
-              <a:t>дней факт внутри «возможного диапазона»</a:t>
-            </a:r>
-            <a:endParaRPr lang="en-US" sz="1200" dirty="0"/>
-          </a:p>
-        </p:txBody>
-      </p:sp>
-      <p:sp>
-        <p:nvSpPr>
-          <p:cNvPr id="7" name="recall value"/>
+              <a:t>лимит запросов и размера файла</a:t>
+            </a:r>
+            <a:endParaRPr lang="en-US" sz="1100" dirty="0"/>
+          </a:p>
+        </p:txBody>
+      </p:sp>
+      <p:sp>
+        <p:nvSpPr>
+          <p:cNvPr id="16" name="security 4 circle"/>
+          <p:cNvSpPr/>
+          <p:nvPr/>
+        </p:nvSpPr>
+        <p:spPr>
+          <a:xfrm>
+            <a:off x="5417073" y="3319272"/>
+            <a:ext cx="384048" cy="384048"/>
+          </a:xfrm>
+          <a:prstGeom prst="ellipse">
+            <a:avLst/>
+          </a:prstGeom>
+          <a:solidFill>
+            <a:schemeClr val="accent2"/>
+          </a:solidFill>
+          <a:ln/>
+        </p:spPr>
+      </p:sp>
+      <p:pic>
+        <p:nvPicPr>
+          <p:cNvPr id="17" name="security 4 icon" descr="preencoded.png">    </p:cNvPr>
+          <p:cNvPicPr>
+            <a:picLocks noChangeAspect="1"/>
+          </p:cNvPicPr>
+          <p:nvPr/>
+        </p:nvPicPr>
+        <p:blipFill>
+          <a:blip r:embed="rId6"/>
+          <a:stretch>
+            <a:fillRect/>
+          </a:stretch>
+        </p:blipFill>
+        <p:spPr>
+          <a:xfrm>
+            <a:off x="5513085" y="3415284"/>
+            <a:ext cx="192024" cy="192024"/>
+          </a:xfrm>
+          <a:prstGeom prst="rect">
+            <a:avLst/>
+          </a:prstGeom>
+        </p:spPr>
+      </p:pic>
+      <p:sp>
+        <p:nvSpPr>
+          <p:cNvPr id="18" name="security text 4"/>
           <p:cNvSpPr txBox="1"/>
           <p:nvPr/>
         </p:nvSpPr>
         <p:spPr>
           <a:xfrm>
-            <a:off x="457200" y="3429000"/>
-            <a:ext cx="2651760" cy="685800"/>
+            <a:off x="5919993" y="3300984"/>
+            <a:ext cx="2766807" cy="457200"/>
           </a:xfrm>
           <a:prstGeom prst="rect">
             <a:avLst/>
@@ -8499,27 +7720,27 @@
               <a:buNone/>
             </a:pPr>
             <a:r>
-              <a:rPr lang="en-US" sz="4000" b="1" dirty="0">
-                <a:solidFill>
-                  <a:schemeClr val="accent3"/>
-                </a:solidFill>
-              </a:rPr>
-              <a:t>72%</a:t>
-            </a:r>
-            <a:endParaRPr lang="en-US" sz="4000" dirty="0"/>
-          </a:p>
-        </p:txBody>
-      </p:sp>
-      <p:sp>
-        <p:nvSpPr>
-          <p:cNvPr id="8" name="recall label"/>
+              <a:rPr lang="en-US" sz="1100" dirty="0">
+                <a:solidFill>
+                  <a:schemeClr val="tx1"/>
+                </a:solidFill>
+              </a:rPr>
+              <a:t>HTTPS: Caddy + Let’s Encrypt, docker-compose</a:t>
+            </a:r>
+            <a:endParaRPr lang="en-US" sz="1100" dirty="0"/>
+          </a:p>
+        </p:txBody>
+      </p:sp>
+      <p:sp>
+        <p:nvSpPr>
+          <p:cNvPr id="19" name="architecture caption"/>
           <p:cNvSpPr txBox="1"/>
           <p:nvPr/>
         </p:nvSpPr>
         <p:spPr>
           <a:xfrm>
-            <a:off x="457200" y="4114800"/>
-            <a:ext cx="2651760" cy="548640"/>
+            <a:off x="457200" y="4023360"/>
+            <a:ext cx="8229600" cy="457200"/>
           </a:xfrm>
           <a:prstGeom prst="rect">
             <a:avLst/>
@@ -8528,7 +7749,7 @@
           <a:ln/>
         </p:spPr>
         <p:txBody>
-          <a:bodyPr wrap="square" lIns="0" tIns="0" rIns="0" bIns="0" rtlCol="0" anchor="t"/>
+          <a:bodyPr wrap="square" lIns="0" tIns="0" rIns="0" bIns="0" rtlCol="0" anchor="ctr"/>
           <a:lstStyle/>
           <a:p>
             <a:pPr indent="0" marL="0">
@@ -8537,86 +7758,12 @@
             <a:r>
               <a:rPr lang="en-US" sz="1200" dirty="0">
                 <a:solidFill>
-                  <a:schemeClr val="tx1"/>
-                </a:solidFill>
-              </a:rPr>
-              <a:t>реальных разрывов найдено, в среднем за 14 дней</a:t>
+                  <a:schemeClr val="tx2"/>
+                </a:solidFill>
+              </a:rPr>
+              <a:t>web (React) → API (FastAPI, SQLite, интеграции) → ядро cashflow_core (Python). Единый контракт JSON.</a:t>
             </a:r>
             <a:endParaRPr lang="en-US" sz="1200" dirty="0"/>
-          </a:p>
-        </p:txBody>
-      </p:sp>
-      <p:graphicFrame>
-        <p:nvGraphicFramePr>
-          <p:cNvPr id="9" name="models chart" descr=""/>
-          <p:cNvGraphicFramePr/>
-          <p:nvPr/>
-        </p:nvGraphicFramePr>
-        <p:xfrm>
-          <a:off x="3383280" y="1005840"/>
-          <a:ext cx="5303520" cy="2651760"/>
-        </p:xfrm>
-        <a:graphic xmlns:a="http://schemas.openxmlformats.org/drawingml/2006/main">
-          <a:graphicData uri="http://schemas.openxmlformats.org/drawingml/2006/chart">
-            <c:chart xmlns:c="http://schemas.openxmlformats.org/drawingml/2006/chart" r:id="rId1"/>
-          </a:graphicData>
-        </a:graphic>
-      </p:graphicFrame>
-      <p:sp>
-        <p:nvSpPr>
-          <p:cNvPr id="10" name="method card"/>
-          <p:cNvSpPr/>
-          <p:nvPr/>
-        </p:nvSpPr>
-        <p:spPr>
-          <a:xfrm>
-            <a:off x="3383280" y="3749040"/>
-            <a:ext cx="5303520" cy="868680"/>
-          </a:xfrm>
-          <a:prstGeom prst="roundRect">
-            <a:avLst>
-              <a:gd name="adj" fmla="val 10526"/>
-            </a:avLst>
-          </a:prstGeom>
-          <a:solidFill>
-            <a:schemeClr val="bg2"/>
-          </a:solidFill>
-          <a:ln/>
-        </p:spPr>
-      </p:sp>
-      <p:sp>
-        <p:nvSpPr>
-          <p:cNvPr id="11" name="method text"/>
-          <p:cNvSpPr txBox="1"/>
-          <p:nvPr/>
-        </p:nvSpPr>
-        <p:spPr>
-          <a:xfrm>
-            <a:off x="3520440" y="3813048"/>
-            <a:ext cx="5029200" cy="731520"/>
-          </a:xfrm>
-          <a:prstGeom prst="rect">
-            <a:avLst/>
-          </a:prstGeom>
-          <a:noFill/>
-          <a:ln/>
-        </p:spPr>
-        <p:txBody>
-          <a:bodyPr wrap="square" lIns="0" tIns="0" rIns="0" bIns="0" rtlCol="0" anchor="ctr"/>
-          <a:lstStyle/>
-          <a:p>
-            <a:pPr indent="0" marL="0">
-              <a:buNone/>
-            </a:pPr>
-            <a:r>
-              <a:rPr lang="en-US" sz="1100" dirty="0">
-                <a:solidFill>
-                  <a:schemeClr val="tx1"/>
-                </a:solidFill>
-              </a:rPr>
-              <a:t>150 компаний организаторов разделены на dev и holdout. Параметры подбирали только на dev; цифры — только holdout: 73 компании, 542 прогноза на модель, rolling origin, 8 отсечек × 30 дней.</a:t>
-            </a:r>
-            <a:endParaRPr lang="en-US" sz="1100" dirty="0"/>
           </a:p>
         </p:txBody>
       </p:sp>

--- a/docs/presentation.pptx
+++ b/docs/presentation.pptx
@@ -117,36 +117,36 @@
   <p:extLst>
     <p:ext uri="{521415D9-36F7-43E2-AB2F-B90AF26B5E84}">
       <p14:sectionLst xmlns:p14="http://schemas.microsoft.com/office/powerpoint/2010/main">
-        <p14:section name="Начало" id="{87a99298-e464-7061-509c-7fcf66e2a7f5}">
+        <p14:section name="Начало" id="{eb34571f-aa18-ea75-3db3-36e65677d75c}">
           <p14:sldIdLst>
             <p14:sldId id="256"/>
           </p14:sldIdLst>
         </p14:section>
-        <p14:section name="Проблема и решение" id="{be7265e6-2046-0d09-4a93-d77c332397a0}">
+        <p14:section name="Проблема и решение" id="{f4b8591a-24a9-e19a-b814-1fca31055fce}">
           <p14:sldIdLst>
             <p14:sldId id="257"/>
             <p14:sldId id="258"/>
           </p14:sldIdLst>
         </p14:section>
-        <p14:section name="Демо" id="{7c1fa5e9-6669-ab11-7a38-10e484dd89fd}">
+        <p14:section name="Демо" id="{d74b639e-440b-ed68-33ef-4229b5fde67d}">
           <p14:sldIdLst>
             <p14:sldId id="259"/>
             <p14:sldId id="260"/>
           </p14:sldIdLst>
         </p14:section>
-        <p14:section name="Данные и подход" id="{10213b8c-9d4c-e8a1-c2ff-e22ca0b654e2}">
+        <p14:section name="Данные и подход" id="{59209f56-6729-cd3d-bfcc-cca02a581faa}">
           <p14:sldIdLst>
             <p14:sldId id="261"/>
             <p14:sldId id="262"/>
             <p14:sldId id="263"/>
           </p14:sldIdLst>
         </p14:section>
-        <p14:section name="Архитектура" id="{8438b6c8-cc41-2718-7156-8b5dc11ddd73}">
+        <p14:section name="Архитектура" id="{dcde41bd-6d8e-5396-03e6-8952a2bc4e56}">
           <p14:sldIdLst>
             <p14:sldId id="264"/>
           </p14:sldIdLst>
         </p14:section>
-        <p14:section name="Итоги" id="{e7aba5e4-c73b-bddf-46c8-18293ee7dadf}">
+        <p14:section name="Итоги" id="{f180c58d-522f-abbf-65c0-ba48adde5af7}">
           <p14:sldIdLst>
             <p14:sldId id="265"/>
             <p14:sldId id="266"/>
@@ -187,7 +187,7 @@
                 </a:solidFill>
                 <a:latin typeface="+mn-lt"/>
               </a:rPr>
-              <a:t>Ошибка остатка на 30 дней, млн ₽ (демо-компания S02)</a:t>
+              <a:t>Ошибка остатка на 30 дней, млн ₽ (синтетическая демо-компания S02)</a:t>
             </a:r>
           </a:p>
         </c:rich>
@@ -334,19 +334,19 @@
                 <c:formatCode>General</c:formatCode>
                 <c:ptCount val="5"/>
                 <c:pt idx="0">
-                  <c:v>1.8</c:v>
+                  <c:v>1.78</c:v>
                 </c:pt>
                 <c:pt idx="1">
-                  <c:v>1.67</c:v>
+                  <c:v>1.48</c:v>
                 </c:pt>
                 <c:pt idx="2">
                   <c:v>1.27</c:v>
                 </c:pt>
                 <c:pt idx="3">
-                  <c:v>0.78</c:v>
+                  <c:v>0.74</c:v>
                 </c:pt>
                 <c:pt idx="4">
-                  <c:v>0.51</c:v>
+                  <c:v>0.46</c:v>
                 </c:pt>
               </c:numCache>
             </c:numRef>
@@ -512,7 +512,7 @@
                 </a:solidFill>
                 <a:latin typeface="+mn-lt"/>
               </a:rPr>
-              <a:t>Ошибка остатка на 30 дней, % месячного оборота (меньше — лучше)</a:t>
+              <a:t>Ошибка фактического остатка, % месячного оборота (меньше — лучше)</a:t>
             </a:r>
           </a:p>
         </c:rich>
@@ -549,7 +549,7 @@
           </c:spPr>
           <c:invertIfNegative val="0"/>
           <c:dLbls>
-            <c:numFmt formatCode="0&quot;%&quot;" sourceLinked="0"/>
+            <c:numFmt formatCode="0.0&quot;%&quot;" sourceLinked="0"/>
             <c:txPr>
               <a:bodyPr/>
               <a:lstStyle/>
@@ -600,6 +600,17 @@
             <c:bubble3D val="0"/>
             <c:spPr>
               <a:solidFill>
+                <a:srgbClr val="7A8A80"/>
+              </a:solidFill>
+              <a:effectLst/>
+            </c:spPr>
+          </c:dPt>
+          <c:dPt>
+            <c:idx val="3"/>
+            <c:invertIfNegative val="0"/>
+            <c:bubble3D val="0"/>
+            <c:spPr>
+              <a:solidFill>
                 <a:srgbClr val="11553F"/>
               </a:solidFill>
               <a:effectLst/>
@@ -607,18 +618,21 @@
           </c:dPt>
           <c:cat>
             <c:multiLvlStrRef>
-              <c:f>Sheet1!$A$2:$A$4</c:f>
+              <c:f>Sheet1!$A$2:$A$5</c:f>
               <c:multiLvlStrCache>
-                <c:ptCount val="3"/>
+                <c:ptCount val="4"/>
                 <c:lvl>
                   <c:pt idx="0">
+                    <c:v>Остаток не изменится</c:v>
+                  </c:pt>
+                  <c:pt idx="1">
                     <c:v>Наивная (повтор 28 дней)</c:v>
                   </c:pt>
-                  <c:pt idx="1">
+                  <c:pt idx="2">
                     <c:v>Сезонная (ETS)</c:v>
                   </c:pt>
-                  <c:pt idx="2">
-                    <c:v>Наш гибрид</c:v>
+                  <c:pt idx="3">
+                    <c:v>Наш прогноз</c:v>
                   </c:pt>
                 </c:lvl>
               </c:multiLvlStrCache>
@@ -626,25 +640,28 @@
           </c:cat>
           <c:val>
             <c:numRef>
-              <c:f>Sheet1!$B$2:$B$4</c:f>
+              <c:f>Sheet1!$B$2:$B$5</c:f>
               <c:numCache>
                 <c:formatCode>General</c:formatCode>
-                <c:ptCount val="3"/>
+                <c:ptCount val="4"/>
                 <c:pt idx="0">
-                  <c:v>21</c:v>
+                  <c:v>13.3</c:v>
                 </c:pt>
                 <c:pt idx="1">
+                  <c:v>21.5</c:v>
+                </c:pt>
+                <c:pt idx="2">
                   <c:v>19</c:v>
                 </c:pt>
-                <c:pt idx="2">
-                  <c:v>16</c:v>
+                <c:pt idx="3">
+                  <c:v>13.1</c:v>
                 </c:pt>
               </c:numCache>
             </c:numRef>
           </c:val>
         </c:ser>
         <c:dLbls>
-          <c:numFmt formatCode="0&quot;%&quot;" sourceLinked="0"/>
+          <c:numFmt formatCode="0.0&quot;%&quot;" sourceLinked="0"/>
           <c:txPr>
             <a:bodyPr/>
             <a:lstStyle/>
@@ -698,7 +715,7 @@
           <a:lstStyle/>
           <a:p>
             <a:pPr>
-              <a:defRPr sz="1100" b="0" i="0" u="none" strike="noStrike">
+              <a:defRPr sz="1000" b="0" i="0" u="none" strike="noStrike">
                 <a:solidFill>
                   <a:srgbClr val="4B5D53"/>
                 </a:solidFill>
@@ -1173,7 +1190,7 @@
           <a:p>
             <a:r>
               <a:rPr lang="en-US" dirty="0"/>
-              <a:t>Ведущий (10 с): Малый бизнес часто закрывается не из-за убытков, а потому что в нужный день на счёте нет денег. Мы сделали сервис, который за две недели говорит: когда не хватит, сколько и что сделать.</a:t>
+              <a:t>Ведущий (10 с): Малый бизнес часто закрывается не из-за убытков, а потому что в нужный день на счёте нет денег. Мы сделали сервис, который заранее говорит: когда не хватит, сколько и что сделать.</a:t>
             </a:r>
             <a:endParaRPr lang="en-US" dirty="0"/>
           </a:p>
@@ -1261,7 +1278,7 @@
           <a:p>
             <a:r>
               <a:rPr lang="en-US" dirty="0"/>
-              <a:t>Ведущий (20 с): Все звёздочки на слайде работают в прототипе — их можно проверить по ссылке. Дальше — встроить в интернет-банк: выписка у банка уже есть.</a:t>
+              <a:t>Ведущий (10 с): «Что если», план-факт и ручной ввод работают полностью; источники — частично, на тестовых выгрузках. Дальше — встроить в интернет-банк: выписка у банка уже есть.</a:t>
             </a:r>
             <a:endParaRPr lang="en-US" dirty="0"/>
           </a:p>
@@ -1349,7 +1366,7 @@
           <a:p>
             <a:r>
               <a:rPr lang="en-US" dirty="0"/>
-              <a:t>Ведущий (10 с): Спасибо! Прототип открыт по ссылке — нажмите «Посмотреть демо».</a:t>
+              <a:t>Ведущий (10 с): Спасибо! Готовы ответить на вопросы.</a:t>
             </a:r>
             <a:endParaRPr lang="en-US" dirty="0"/>
           </a:p>
@@ -1525,7 +1542,7 @@
           <a:p>
             <a:r>
               <a:rPr lang="en-US" dirty="0"/>
-              <a:t>Ведущий (20 с): Цель кейса — прогноз остатка по дням на 30+ дней, разрыв с датой, суммой и вероятностью, понятно человеку без финансового образования. Всё это — на главном экране.</a:t>
+              <a:t>Ведущий (15 с): Прогноз остатка по дням на 30+ дней, разрыв с датой, суммой и вероятностью — понятно человеку без финансового образования, на главном экране.</a:t>
             </a:r>
             <a:endParaRPr lang="en-US" dirty="0"/>
           </a:p>
@@ -1613,7 +1630,7 @@
           <a:p>
             <a:r>
               <a:rPr lang="en-US" dirty="0"/>
-              <a:t>Оператор (60 с): Нажимаем «Посмотреть демо», загружаем выписку этой компании по 16 сентября — будущего сервис не видит. Подключаем налоговый календарь. Главная: через 14 дней, 30 сентября, может не хватить 678 тысяч, вероятность 98%, и первое действие. Ведущий: на самом деле разрыв случился ровно 30 сентября, минус 472 тысячи. Сумму мы назвали больше: налог оценили выше факта.</a:t>
+              <a:t>Оператор (45 с): «Посмотреть демо» → загружаем выписку по 16 сентября (будущего сервис не видит) → подключаем налоговый календарь → главная. Ведущий: через 14 дней, 30 сентября, может не хватить 458 тысяч, вероятность 58%, и первое действие. На самом деле 30 сентября на счёте минус 381 тысяча, 1 октября — минус 472.</a:t>
             </a:r>
             <a:endParaRPr lang="en-US" dirty="0"/>
           </a:p>
@@ -1701,7 +1718,7 @@
           <a:p>
             <a:r>
               <a:rPr lang="en-US" dirty="0"/>
-              <a:t>Оператор (40 с): «Что если»: клиент заплатит на три недели позже — нехватка вырастает до 1,47 миллиона. Платежи и источники: подключаем налоговый календарь, добавляем платёж обычной фразой — прогноз на главной меняется сразу.</a:t>
+              <a:t>Оператор (30 с): «Что если»: клиент заплатит на три недели позже — нехватка вырастает до 910 тысяч. Ведущий: источники и ручной ввод меняют прогноз сразу — экран показывает «было → стало».</a:t>
             </a:r>
             <a:endParaRPr lang="en-US" dirty="0"/>
           </a:p>
@@ -1789,7 +1806,7 @@
           <a:p>
             <a:r>
               <a:rPr lang="en-US" dirty="0"/>
-              <a:t>Ведущий (25 с): Источники: api/reports/sources_effect.md — прогноз на 30 дней сравнивается с «как было на самом деле». 1С и банк в прототипе — загрузка выгрузок (в демо тестовые файлы), реестры — демонстрационная проверка по ИНН, налоговый календарь считается по выписке.</a:t>
+              <a:t>Ведущий (20 с): Это наша синтетическая компания с известным будущим (api/reports/sources_effect.md). Честно: работает частично — налоговый календарь считается по выписке, банк и 1С — на тестовых выгрузках, реестры — демонстрационная проверка по ИНН.</a:t>
             </a:r>
             <a:endParaRPr lang="en-US" dirty="0"/>
           </a:p>
@@ -1877,7 +1894,7 @@
           <a:p>
             <a:r>
               <a:rPr lang="en-US" dirty="0"/>
-              <a:t>Ведущий (20 с): Модель объяснимая: каждая сумма в причине подписана источником. Прогноз детерминированный, работает без сети, на 150 компаниях — около 30 секунд.</a:t>
+              <a:t>Ведущий (20 с): Модель объяснимая: каждая сумма в причине подписана источником. Прогноз детерминированный, работает без сети, на 150 компаниях — около 25 секунд.</a:t>
             </a:r>
             <a:endParaRPr lang="en-US" dirty="0"/>
           </a:p>
@@ -1965,7 +1982,7 @@
           <a:p>
             <a:r>
               <a:rPr lang="en-US" dirty="0"/>
-              <a:t>Ведущий (25 с): Источник: core/reports/metrics.md, перепроверено запуском cashflow_core.evaluate. Точность предупреждений о разрыве — 46%: каждое второе предупреждение ложное, но пропущенный разрыв для владельца дороже.</a:t>
+              <a:t>Ведущий (25 с): Жюри сравнит прогноз с фактическим остатком, поэтому главный соперник — «остаток не изменится». Наш прогноз точнее у 61% компаний и по медиане ошибки, но по общему WAPE чуть хуже — это видно в core/reports/metrics.md. Разрывы: находим 61%, точность предупреждений 70%.</a:t>
             </a:r>
             <a:endParaRPr lang="en-US" dirty="0"/>
           </a:p>
@@ -2053,7 +2070,7 @@
           <a:p>
             <a:r>
               <a:rPr lang="en-US" dirty="0"/>
-              <a:t>Ведущий (20 с): Три части по общему контракту. Прототип открыт по HTTPS, демо — в один клик, у каждого гостя своя копия компании.</a:t>
+              <a:t>Ведущий (20 с): Три части по общему контракту. Запуск — одна команда docker compose с HTTPS; демо — в один клик, у каждого гостя своя копия компании, общие данные никто не испортит.</a:t>
             </a:r>
             <a:endParaRPr lang="en-US" dirty="0"/>
           </a:p>
@@ -2892,7 +2909,7 @@
                   <a:srgbClr val="CFE2D6"/>
                 </a:solidFill>
               </a:rPr>
-              <a:t>Предупреждаем предпринимателя о кассовом разрыве за 2 недели — и подсказываем, что сделать</a:t>
+              <a:t>Предупреждаем предпринимателя о кассовом разрыве заранее — и подсказываем, что сделать</a:t>
             </a:r>
             <a:endParaRPr lang="en-US" sz="1800" dirty="0"/>
           </a:p>
@@ -3053,7 +3070,7 @@
                   <a:schemeClr val="tx1"/>
                 </a:solidFill>
               </a:rPr>
-              <a:t>внешние события: 1С, банк, налоги, реестры</a:t>
+              <a:t>«что если»: 6 сценариев, в т.ч. потеря клиента и рост налогов</a:t>
             </a:r>
             <a:endParaRPr lang="en-US" sz="1300" dirty="0"/>
           </a:p>
@@ -3089,7 +3106,7 @@
                   <a:schemeClr val="tx1"/>
                 </a:solidFill>
               </a:rPr>
-              <a:t>«что если» по 4 сценариям</a:t>
+              <a:t>источники — частично: налоговый календарь, банк и 1С на тестовых выгрузках; «было → стало»</a:t>
             </a:r>
             <a:endParaRPr lang="en-US" sz="1300" dirty="0"/>
           </a:p>
@@ -3180,7 +3197,7 @@
       </p:sp>
       <p:pic>
         <p:nvPicPr>
-          <p:cNvPr id="7" name="mobile screenshot" descr="/Users/alex/Documents/HAKATON/cashflow/docs/screens/10_telefon.png">    </p:cNvPr>
+          <p:cNvPr id="7" name="mobile screenshot" descr="docs/screens/10_telefon.png">    </p:cNvPr>
           <p:cNvPicPr>
             <a:picLocks noChangeAspect="1"/>
           </p:cNvPicPr>
@@ -3472,7 +3489,7 @@
                   <a:srgbClr val="CFE2D6"/>
                 </a:solidFill>
               </a:rPr>
-              <a:t>Прогноз на 30+ дней по дням · дата, сумма и вероятность разрыва · ошибка 16% против 21% у наивной модели · реальный разрыв 30.09.2025 — за 14 дней</a:t>
+              <a:t>Прогноз на 30+ дней по дням · дата, сумма и вероятность разрыва · точнее «остаток не изменится» у 61% компаний · реальный разрыв 30.09.2025 — за 14 дней</a:t>
             </a:r>
             <a:endParaRPr lang="en-US" sz="1800" dirty="0"/>
           </a:p>
@@ -4223,7 +4240,7 @@
                   <a:schemeClr val="tx1"/>
                 </a:solidFill>
               </a:rPr>
-              <a:t>светофор и одна фраза: «через 14 дней, 30 сентября, может не хватить 678 000 ₽»</a:t>
+              <a:t>светофор и одна фраза: «через 14 дней, 30 сентября, может не хватить 458 000 ₽»</a:t>
             </a:r>
             <a:endParaRPr lang="en-US" sz="1200" dirty="0"/>
           </a:p>
@@ -4469,12 +4486,12 @@
         </p:nvSpPr>
         <p:spPr>
           <a:xfrm>
-            <a:off x="4160520" y="2148172"/>
-            <a:ext cx="4526280" cy="1418656"/>
+            <a:off x="4160520" y="2190584"/>
+            <a:ext cx="4526280" cy="1333833"/>
           </a:xfrm>
           <a:prstGeom prst="roundRect">
             <a:avLst>
-              <a:gd name="adj" fmla="val 5156"/>
+              <a:gd name="adj" fmla="val 5484"/>
             </a:avLst>
           </a:prstGeom>
           <a:solidFill>
@@ -4492,7 +4509,7 @@
       </p:sp>
       <p:pic>
         <p:nvPicPr>
-          <p:cNvPr id="16" name="risk card screenshot" descr="/Users/alex/Documents/HAKATON/cashflow/docs/screens/03_preduprezhdenie.png">    </p:cNvPr>
+          <p:cNvPr id="16" name="risk card screenshot" descr="docs/screens/03_preduprezhdenie.png">    </p:cNvPr>
           <p:cNvPicPr>
             <a:picLocks noChangeAspect="1"/>
           </p:cNvPicPr>
@@ -4506,8 +4523,8 @@
         </p:blipFill>
         <p:spPr>
           <a:xfrm>
-            <a:off x="4233672" y="2221324"/>
-            <a:ext cx="4379976" cy="1272352"/>
+            <a:off x="4233672" y="2263736"/>
+            <a:ext cx="4379976" cy="1187529"/>
           </a:xfrm>
           <a:prstGeom prst="rect">
             <a:avLst/>
@@ -4653,7 +4670,7 @@
       </p:sp>
       <p:pic>
         <p:nvPicPr>
-          <p:cNvPr id="4" name="chart screenshot" descr="/Users/alex/Documents/HAKATON/cashflow/docs/screens/04_grafik.png">    </p:cNvPr>
+          <p:cNvPr id="4" name="chart screenshot" descr="docs/screens/04_grafik.png">    </p:cNvPr>
           <p:cNvPicPr>
             <a:picLocks noChangeAspect="1"/>
           </p:cNvPicPr>
@@ -4774,10 +4791,10 @@
             <a:r>
               <a:rPr lang="en-US" sz="3000" b="1" dirty="0">
                 <a:solidFill>
-                  <a:schemeClr val="accent3"/>
-                </a:solidFill>
-              </a:rPr>
-              <a:t>98%</a:t>
+                  <a:schemeClr val="accent4"/>
+                </a:solidFill>
+              </a:rPr>
+              <a:t>58%</a:t>
             </a:r>
             <a:endParaRPr lang="en-US" sz="3000" dirty="0"/>
           </a:p>
@@ -4813,7 +4830,7 @@
                   <a:schemeClr val="tx1"/>
                 </a:solidFill>
               </a:rPr>
-              <a:t>вероятность — за 14 дней; за 10 и 7 дней — 97%</a:t>
+              <a:t>вероятность за 14 и за 7 дней: средний риск, светофор жёлтый</a:t>
             </a:r>
             <a:endParaRPr lang="en-US" sz="1200" dirty="0"/>
           </a:p>
@@ -4849,7 +4866,7 @@
                   <a:schemeClr val="tx2"/>
                 </a:solidFill>
               </a:rPr>
-              <a:t>−678 тыс. ₽</a:t>
+              <a:t>−458 тыс. ₽</a:t>
             </a:r>
             <a:endParaRPr lang="en-US" sz="3000" dirty="0"/>
           </a:p>
@@ -4885,7 +4902,7 @@
                   <a:schemeClr val="tx1"/>
                 </a:solidFill>
               </a:rPr>
-              <a:t>ожидаемый остаток; на деле −472 тыс. ₽ — налог сервис оценил выше факта</a:t>
+              <a:t>ожидаемый остаток; на деле −381 тыс. ₽ 30.09 и −472 тыс. ₽ 1.10</a:t>
             </a:r>
             <a:endParaRPr lang="en-US" sz="1200" dirty="0"/>
           </a:p>
@@ -5030,7 +5047,7 @@
       </p:sp>
       <p:pic>
         <p:nvPicPr>
-          <p:cNvPr id="4" name="scenario screenshot" descr="/Users/alex/Documents/HAKATON/cashflow/docs/screens/06_chto_esli.png">    </p:cNvPr>
+          <p:cNvPr id="4" name="scenario screenshot" descr="docs/screens/06_chto_esli.png">    </p:cNvPr>
           <p:cNvPicPr>
             <a:picLocks noChangeAspect="1"/>
           </p:cNvPicPr>
@@ -5082,7 +5099,7 @@
                   <a:schemeClr val="tx1"/>
                 </a:solidFill>
               </a:rPr>
-              <a:t>Клиент заплатит на 3 недели позже → «не хватит уже 1 473 000 ₽ вместо 678 000 ₽». База и сценарий — на одном графике.</a:t>
+              <a:t>Клиент заплатит на 3 недели позже → «не хватит уже 910 000 ₽ вместо 458 000 ₽». База и сценарий — на одном графике.</a:t>
             </a:r>
             <a:endParaRPr lang="en-US" sz="1200" dirty="0"/>
           </a:p>
@@ -5119,7 +5136,7 @@
       </p:sp>
       <p:pic>
         <p:nvPicPr>
-          <p:cNvPr id="7" name="sources screenshot" descr="/Users/alex/Documents/HAKATON/cashflow/docs/screens/05_istochniki.png">    </p:cNvPr>
+          <p:cNvPr id="7" name="sources screenshot" descr="docs/screens/05_istochniki.png">    </p:cNvPr>
           <p:cNvPicPr>
             <a:picLocks noChangeAspect="1"/>
           </p:cNvPicPr>
@@ -5174,7 +5191,7 @@
                   <a:schemeClr val="tx1"/>
                 </a:solidFill>
               </a:rPr>
-              <a:t>платёж фразой: «клиент обещал 300 000 ₽ 20-го»</a:t>
+              <a:t>подключили источник → на экране «было → стало»</a:t>
             </a:r>
             <a:endParaRPr lang="en-US" sz="1200" dirty="0"/>
           </a:p>
@@ -5192,7 +5209,7 @@
                   <a:schemeClr val="tx1"/>
                 </a:solidFill>
               </a:rPr>
-              <a:t>у каждого события виден источник</a:t>
+              <a:t>платёж фразой: «купим станок за 1,2 млн 10 ноября»</a:t>
             </a:r>
             <a:endParaRPr lang="en-US" sz="1200" dirty="0"/>
           </a:p>
@@ -5434,7 +5451,7 @@
                   <a:schemeClr val="tx2"/>
                 </a:solidFill>
               </a:rPr>
-              <a:t>выписка, регулярные платежи, графики кредитов, подписанные платёжки</a:t>
+              <a:t>выписка, регулярные платежи; графики кредитов и платёжки — на тестовых выгрузках</a:t>
             </a:r>
             <a:endParaRPr lang="en-US" sz="1100" dirty="0"/>
           </a:p>
@@ -5550,7 +5567,7 @@
                   <a:schemeClr val="tx2"/>
                 </a:solidFill>
               </a:rPr>
-              <a:t>счета, договоры, зарплатные ведомости, просрочки</a:t>
+              <a:t>счета, договоры, зарплата — загрузка выгрузки; в демо тестовые файлы</a:t>
             </a:r>
             <a:endParaRPr lang="en-US" sz="1100" dirty="0"/>
           </a:p>
@@ -5950,7 +5967,7 @@
                   <a:schemeClr val="tx2"/>
                 </a:solidFill>
               </a:rPr>
-              <a:t>Только по выписке разрыв 5 ноября не виден (вероятность 18%). С 1С и реестрами — найден, вероятность 75%.</a:t>
+              <a:t>На синтетической демо-компании S02: только по выписке разрыв не виден (вероятность 18%), с 1С и реестрами — найден (86%).</a:t>
             </a:r>
             <a:endParaRPr lang="en-US" sz="1200" dirty="0"/>
           </a:p>
@@ -6472,7 +6489,7 @@
                   <a:schemeClr val="tx2"/>
                 </a:solidFill>
               </a:rPr>
-              <a:t>зарплата, аренда, ЕНП, кредиты, дивиденды</a:t>
+              <a:t>зарплата, аренда, ЕНП 28-го, кредиты</a:t>
             </a:r>
             <a:endParaRPr lang="en-US" sz="1100" dirty="0"/>
           </a:p>
@@ -6610,7 +6627,7 @@
                   <a:schemeClr val="tx2"/>
                 </a:solidFill>
               </a:rPr>
-              <a:t>2 000 вариантов будущего: задержки оплат, колебания выручки</a:t>
+              <a:t>2 000 вариантов будущего; остальное сжимаем к текущему остатку</a:t>
             </a:r>
             <a:endParaRPr lang="en-US" sz="1100" dirty="0"/>
           </a:p>
@@ -6795,7 +6812,7 @@
                   <a:schemeClr val="tx1"/>
                 </a:solidFill>
               </a:rPr>
-              <a:t>остаток по дням — ожидаемый (P50) и возможный диапазон (P10–P90). Два вида риска: разрыв ниже 0 ₽ и остаток ниже комфортного минимума. Без утечки из будущего (тест) и без подгонки под компании.</a:t>
+              <a:t>остаток по дням — ожидаемый (P50) и возможный диапазон (P10–P90): известные платежи с датами, остальные потоки — ближе к «остаток не изменится». Два вида риска: ниже 0 ₽ и ниже комфортного минимума. Без утечки из будущего (тест) и без подгонки под компании.</a:t>
             </a:r>
             <a:endParaRPr lang="en-US" sz="1300" dirty="0"/>
           </a:p>
@@ -6903,7 +6920,7 @@
                   <a:schemeClr val="tx2"/>
                 </a:solidFill>
               </a:rPr>
-              <a:t>Проверка качества: честный бэктест</a:t>
+              <a:t>Сравнение с «остаток не изменится»</a:t>
             </a:r>
             <a:endParaRPr lang="en-US" sz="2600" dirty="0"/>
           </a:p>
@@ -6911,7 +6928,7 @@
       </p:sp>
       <p:sp>
         <p:nvSpPr>
-          <p:cNvPr id="3" name="mae value"/>
+          <p:cNvPr id="3" name="better value"/>
           <p:cNvSpPr txBox="1"/>
           <p:nvPr/>
         </p:nvSpPr>
@@ -6939,7 +6956,7 @@
                   <a:schemeClr val="accent2"/>
                 </a:solidFill>
               </a:rPr>
-              <a:t>16%</a:t>
+              <a:t>61%</a:t>
             </a:r>
             <a:endParaRPr lang="en-US" sz="4000" dirty="0"/>
           </a:p>
@@ -6947,7 +6964,7 @@
       </p:sp>
       <p:sp>
         <p:nvSpPr>
-          <p:cNvPr id="4" name="mae label"/>
+          <p:cNvPr id="4" name="better label"/>
           <p:cNvSpPr txBox="1"/>
           <p:nvPr/>
         </p:nvSpPr>
@@ -6975,7 +6992,7 @@
                   <a:schemeClr val="tx1"/>
                 </a:solidFill>
               </a:rPr>
-              <a:t>ошибка остатка на 30 дней; у наивной модели 21%</a:t>
+              <a:t>компаний: прогноз точнее, чем «остаток не изменится»</a:t>
             </a:r>
             <a:endParaRPr lang="en-US" sz="1200" dirty="0"/>
           </a:p>
@@ -6983,7 +7000,7 @@
       </p:sp>
       <p:sp>
         <p:nvSpPr>
-          <p:cNvPr id="5" name="coverage value"/>
+          <p:cNvPr id="5" name="mae value"/>
           <p:cNvSpPr txBox="1"/>
           <p:nvPr/>
         </p:nvSpPr>
@@ -7011,7 +7028,7 @@
                   <a:schemeClr val="accent2"/>
                 </a:solidFill>
               </a:rPr>
-              <a:t>80%</a:t>
+              <a:t>13,1%</a:t>
             </a:r>
             <a:endParaRPr lang="en-US" sz="4000" dirty="0"/>
           </a:p>
@@ -7019,7 +7036,7 @@
       </p:sp>
       <p:sp>
         <p:nvSpPr>
-          <p:cNvPr id="6" name="coverage label"/>
+          <p:cNvPr id="6" name="mae label"/>
           <p:cNvSpPr txBox="1"/>
           <p:nvPr/>
         </p:nvSpPr>
@@ -7047,7 +7064,7 @@
                   <a:schemeClr val="tx1"/>
                 </a:solidFill>
               </a:rPr>
-              <a:t>дней факт внутри «возможного диапазона» (цель 80%)</a:t>
+              <a:t>ошибка фактического остатка, медиана в долях оборота; у бейзлайна 13,3%</a:t>
             </a:r>
             <a:endParaRPr lang="en-US" sz="1200" dirty="0"/>
           </a:p>
@@ -7083,7 +7100,7 @@
                   <a:schemeClr val="accent3"/>
                 </a:solidFill>
               </a:rPr>
-              <a:t>72%</a:t>
+              <a:t>61%</a:t>
             </a:r>
             <a:endParaRPr lang="en-US" sz="4000" dirty="0"/>
           </a:p>
@@ -7119,7 +7136,7 @@
                   <a:schemeClr val="tx1"/>
                 </a:solidFill>
               </a:rPr>
-              <a:t>разрывов найдено заранее, в среднем за 14 дней</a:t>
+              <a:t>разрывов найдено заранее (точность 70%), в среднем за 12 дней</a:t>
             </a:r>
             <a:endParaRPr lang="en-US" sz="1200" dirty="0"/>
           </a:p>
@@ -7133,7 +7150,7 @@
         </p:nvGraphicFramePr>
         <p:xfrm>
           <a:off x="3383280" y="1005840"/>
-          <a:ext cx="5303520" cy="2651760"/>
+          <a:ext cx="5303520" cy="2514600"/>
         </p:xfrm>
         <a:graphic xmlns:a="http://schemas.openxmlformats.org/drawingml/2006/main">
           <a:graphicData uri="http://schemas.openxmlformats.org/drawingml/2006/chart">
@@ -7149,12 +7166,12 @@
         </p:nvSpPr>
         <p:spPr>
           <a:xfrm>
-            <a:off x="3383280" y="3749040"/>
-            <a:ext cx="5303520" cy="868680"/>
+            <a:off x="3383280" y="3611880"/>
+            <a:ext cx="5303520" cy="1005840"/>
           </a:xfrm>
           <a:prstGeom prst="roundRect">
             <a:avLst>
-              <a:gd name="adj" fmla="val 10526"/>
+              <a:gd name="adj" fmla="val 9091"/>
             </a:avLst>
           </a:prstGeom>
           <a:solidFill>
@@ -7171,8 +7188,8 @@
         </p:nvSpPr>
         <p:spPr>
           <a:xfrm>
-            <a:off x="3520440" y="3813048"/>
-            <a:ext cx="5029200" cy="731520"/>
+            <a:off x="3520440" y="3657600"/>
+            <a:ext cx="5029200" cy="914400"/>
           </a:xfrm>
           <a:prstGeom prst="rect">
             <a:avLst/>
@@ -7188,14 +7205,14 @@
               <a:buNone/>
             </a:pPr>
             <a:r>
-              <a:rPr lang="en-US" sz="1100" dirty="0">
+              <a:rPr lang="en-US" sz="1050" dirty="0">
                 <a:solidFill>
                   <a:schemeClr val="tx1"/>
                 </a:solidFill>
               </a:rPr>
-              <a:t>150 компаний разделены на dev и holdout (по отраслям). Параметры — только на dev; цифры — только holdout: 73 компании, 542 прогнозов на модель, rolling origin 8 × 30 дней.</a:t>
-            </a:r>
-            <a:endParaRPr lang="en-US" sz="1100" dirty="0"/>
+              <a:t>Честно: общий WAPE на 73 отложенных компаниях — 0,263 против 0,253 у «остаток не изменится», чуть хуже; за последние 30 дней всех 150 выписок — 0,235 против 0,231. Поэтому прогноз — смесь модели с бейзлайном. Параметры подбирались только на dev, цифры — holdout, 542 прогнозов на модель.</a:t>
+            </a:r>
+            <a:endParaRPr lang="en-US" sz="1050" dirty="0"/>
           </a:p>
         </p:txBody>
       </p:sp>
@@ -7309,7 +7326,7 @@
       </p:sp>
       <p:pic>
         <p:nvPicPr>
-          <p:cNvPr id="3" name="architecture diagram" descr="/Users/alex/Documents/HAKATON/cashflow/docs/architecture_slide.png">    </p:cNvPr>
+          <p:cNvPr id="3" name="architecture diagram" descr="docs/architecture_slide.png">    </p:cNvPr>
           <p:cNvPicPr>
             <a:picLocks noChangeAspect="1"/>
           </p:cNvPicPr>
@@ -7324,7 +7341,7 @@
         <p:spPr>
           <a:xfrm>
             <a:off x="457200" y="1051560"/>
-            <a:ext cx="4685553" cy="2743200"/>
+            <a:ext cx="5941074" cy="2743200"/>
           </a:xfrm>
           <a:prstGeom prst="rect">
             <a:avLst/>
@@ -7339,7 +7356,7 @@
         </p:nvSpPr>
         <p:spPr>
           <a:xfrm>
-            <a:off x="5417073" y="1051560"/>
+            <a:off x="6672594" y="1051560"/>
             <a:ext cx="384048" cy="384048"/>
           </a:xfrm>
           <a:prstGeom prst="ellipse">
@@ -7367,7 +7384,7 @@
         </p:blipFill>
         <p:spPr>
           <a:xfrm>
-            <a:off x="5513085" y="1147572"/>
+            <a:off x="6768606" y="1147572"/>
             <a:ext cx="192024" cy="192024"/>
           </a:xfrm>
           <a:prstGeom prst="rect">
@@ -7383,8 +7400,8 @@
         </p:nvSpPr>
         <p:spPr>
           <a:xfrm>
-            <a:off x="5919993" y="1033272"/>
-            <a:ext cx="2766807" cy="457200"/>
+            <a:off x="7175514" y="1033272"/>
+            <a:ext cx="1511286" cy="457200"/>
           </a:xfrm>
           <a:prstGeom prst="rect">
             <a:avLst/>
@@ -7419,7 +7436,7 @@
         </p:nvSpPr>
         <p:spPr>
           <a:xfrm>
-            <a:off x="5417073" y="1618488"/>
+            <a:off x="6672594" y="1618488"/>
             <a:ext cx="384048" cy="384048"/>
           </a:xfrm>
           <a:prstGeom prst="ellipse">
@@ -7447,7 +7464,7 @@
         </p:blipFill>
         <p:spPr>
           <a:xfrm>
-            <a:off x="5513085" y="1714500"/>
+            <a:off x="6768606" y="1714500"/>
             <a:ext cx="192024" cy="192024"/>
           </a:xfrm>
           <a:prstGeom prst="rect">
@@ -7463,8 +7480,8 @@
         </p:nvSpPr>
         <p:spPr>
           <a:xfrm>
-            <a:off x="5919993" y="1600200"/>
-            <a:ext cx="2766807" cy="457200"/>
+            <a:off x="7175514" y="1600200"/>
+            <a:ext cx="1511286" cy="457200"/>
           </a:xfrm>
           <a:prstGeom prst="rect">
             <a:avLst/>
@@ -7485,7 +7502,7 @@
                   <a:schemeClr val="tx1"/>
                 </a:solidFill>
               </a:rPr>
-              <a:t>только своя компания; у гостя демо — своя копия</a:t>
+              <a:t>общие компании — только чтение, у гостя своя копия (тест)</a:t>
             </a:r>
             <a:endParaRPr lang="en-US" sz="1100" dirty="0"/>
           </a:p>
@@ -7499,7 +7516,7 @@
         </p:nvSpPr>
         <p:spPr>
           <a:xfrm>
-            <a:off x="5417073" y="2185416"/>
+            <a:off x="6672594" y="2185416"/>
             <a:ext cx="384048" cy="384048"/>
           </a:xfrm>
           <a:prstGeom prst="ellipse">
@@ -7527,7 +7544,7 @@
         </p:blipFill>
         <p:spPr>
           <a:xfrm>
-            <a:off x="5513085" y="2281428"/>
+            <a:off x="6768606" y="2281428"/>
             <a:ext cx="192024" cy="192024"/>
           </a:xfrm>
           <a:prstGeom prst="rect">
@@ -7543,8 +7560,8 @@
         </p:nvSpPr>
         <p:spPr>
           <a:xfrm>
-            <a:off x="5919993" y="2167128"/>
-            <a:ext cx="2766807" cy="457200"/>
+            <a:off x="7175514" y="2167128"/>
+            <a:ext cx="1511286" cy="457200"/>
           </a:xfrm>
           <a:prstGeom prst="rect">
             <a:avLst/>
@@ -7579,7 +7596,7 @@
         </p:nvSpPr>
         <p:spPr>
           <a:xfrm>
-            <a:off x="5417073" y="2752344"/>
+            <a:off x="6672594" y="2752344"/>
             <a:ext cx="384048" cy="384048"/>
           </a:xfrm>
           <a:prstGeom prst="ellipse">
@@ -7607,7 +7624,7 @@
         </p:blipFill>
         <p:spPr>
           <a:xfrm>
-            <a:off x="5513085" y="2848356"/>
+            <a:off x="6768606" y="2848356"/>
             <a:ext cx="192024" cy="192024"/>
           </a:xfrm>
           <a:prstGeom prst="rect">
@@ -7623,8 +7640,8 @@
         </p:nvSpPr>
         <p:spPr>
           <a:xfrm>
-            <a:off x="5919993" y="2734056"/>
-            <a:ext cx="2766807" cy="457200"/>
+            <a:off x="7175514" y="2734056"/>
+            <a:ext cx="1511286" cy="457200"/>
           </a:xfrm>
           <a:prstGeom prst="rect">
             <a:avLst/>
@@ -7659,7 +7676,7 @@
         </p:nvSpPr>
         <p:spPr>
           <a:xfrm>
-            <a:off x="5417073" y="3319272"/>
+            <a:off x="6672594" y="3319272"/>
             <a:ext cx="384048" cy="384048"/>
           </a:xfrm>
           <a:prstGeom prst="ellipse">
@@ -7687,7 +7704,7 @@
         </p:blipFill>
         <p:spPr>
           <a:xfrm>
-            <a:off x="5513085" y="3415284"/>
+            <a:off x="6768606" y="3415284"/>
             <a:ext cx="192024" cy="192024"/>
           </a:xfrm>
           <a:prstGeom prst="rect">
@@ -7703,8 +7720,8 @@
         </p:nvSpPr>
         <p:spPr>
           <a:xfrm>
-            <a:off x="5919993" y="3300984"/>
-            <a:ext cx="2766807" cy="457200"/>
+            <a:off x="7175514" y="3300984"/>
+            <a:ext cx="1511286" cy="457200"/>
           </a:xfrm>
           <a:prstGeom prst="rect">
             <a:avLst/>
@@ -7725,7 +7742,7 @@
                   <a:schemeClr val="tx1"/>
                 </a:solidFill>
               </a:rPr>
-              <a:t>HTTPS: Caddy + Let’s Encrypt, docker-compose</a:t>
+              <a:t>HTTPS: Caddy + docker compose, готово к запуску</a:t>
             </a:r>
             <a:endParaRPr lang="en-US" sz="1100" dirty="0"/>
           </a:p>

--- a/docs/presentation.pptx
+++ b/docs/presentation.pptx
@@ -117,36 +117,36 @@
   <p:extLst>
     <p:ext uri="{521415D9-36F7-43E2-AB2F-B90AF26B5E84}">
       <p14:sectionLst xmlns:p14="http://schemas.microsoft.com/office/powerpoint/2010/main">
-        <p14:section name="Начало" id="{eb34571f-aa18-ea75-3db3-36e65677d75c}">
+        <p14:section name="Начало" id="{49b5a89f-decd-c8f4-ebca-96153d6629bc}">
           <p14:sldIdLst>
             <p14:sldId id="256"/>
           </p14:sldIdLst>
         </p14:section>
-        <p14:section name="Проблема и решение" id="{f4b8591a-24a9-e19a-b814-1fca31055fce}">
+        <p14:section name="Проблема и решение" id="{f5c8b613-469f-dc03-ab45-82e309c3e7d4}">
           <p14:sldIdLst>
             <p14:sldId id="257"/>
             <p14:sldId id="258"/>
           </p14:sldIdLst>
         </p14:section>
-        <p14:section name="Демо" id="{d74b639e-440b-ed68-33ef-4229b5fde67d}">
+        <p14:section name="Демо" id="{a76b8d90-722a-7972-75a2-1ce7c50db2ca}">
           <p14:sldIdLst>
             <p14:sldId id="259"/>
             <p14:sldId id="260"/>
           </p14:sldIdLst>
         </p14:section>
-        <p14:section name="Данные и подход" id="{59209f56-6729-cd3d-bfcc-cca02a581faa}">
+        <p14:section name="Данные и подход" id="{3de6b66d-99d2-e343-6463-4f1da40c5644}">
           <p14:sldIdLst>
             <p14:sldId id="261"/>
             <p14:sldId id="262"/>
             <p14:sldId id="263"/>
           </p14:sldIdLst>
         </p14:section>
-        <p14:section name="Архитектура" id="{dcde41bd-6d8e-5396-03e6-8952a2bc4e56}">
+        <p14:section name="Архитектура" id="{cf80f351-d017-811e-f383-53e66a6d0d92}">
           <p14:sldIdLst>
             <p14:sldId id="264"/>
           </p14:sldIdLst>
         </p14:section>
-        <p14:section name="Итоги" id="{f180c58d-522f-abbf-65c0-ba48adde5af7}">
+        <p14:section name="Итоги" id="{86353a7a-6bc3-c007-bc87-ca2d9680cc4a}">
           <p14:sldIdLst>
             <p14:sldId id="265"/>
             <p14:sldId id="266"/>
@@ -2745,67 +2745,33 @@
           <a:chExt cx="0" cy="0"/>
         </a:xfrm>
       </p:grpSpPr>
-      <p:sp>
-        <p:nvSpPr>
-          <p:cNvPr id="2" name="logo mark"/>
-          <p:cNvSpPr/>
-          <p:nvPr/>
-        </p:nvSpPr>
+      <p:pic>
+        <p:nvPicPr>
+          <p:cNvPr id="2" name="logo" descr="preencoded.png">    </p:cNvPr>
+          <p:cNvPicPr>
+            <a:picLocks noChangeAspect="1"/>
+          </p:cNvPicPr>
+          <p:nvPr/>
+        </p:nvPicPr>
+        <p:blipFill>
+          <a:blip r:embed="rId1"/>
+          <a:stretch>
+            <a:fillRect/>
+          </a:stretch>
+        </p:blipFill>
         <p:spPr>
           <a:xfrm>
             <a:off x="548640" y="640080"/>
             <a:ext cx="566928" cy="566928"/>
           </a:xfrm>
-          <a:prstGeom prst="roundRect">
-            <a:avLst>
-              <a:gd name="adj" fmla="val 19355"/>
-            </a:avLst>
-          </a:prstGeom>
-          <a:solidFill>
-            <a:schemeClr val="accent1"/>
-          </a:solidFill>
-          <a:ln/>
-        </p:spPr>
-      </p:sp>
-      <p:sp>
-        <p:nvSpPr>
-          <p:cNvPr id="3" name="logo glyph"/>
-          <p:cNvSpPr txBox="1"/>
-          <p:nvPr/>
-        </p:nvSpPr>
-        <p:spPr>
-          <a:xfrm>
-            <a:off x="548640" y="640080"/>
-            <a:ext cx="566928" cy="566928"/>
-          </a:xfrm>
-          <a:prstGeom prst="rect">
-            <a:avLst/>
-          </a:prstGeom>
-          <a:noFill/>
-          <a:ln/>
-        </p:spPr>
-        <p:txBody>
-          <a:bodyPr wrap="square" lIns="0" tIns="0" rIns="0" bIns="0" rtlCol="0" anchor="ctr"/>
-          <a:lstStyle/>
-          <a:p>
-            <a:pPr algn="ctr" indent="0" marL="0">
-              <a:buNone/>
-            </a:pPr>
-            <a:r>
-              <a:rPr lang="en-US" sz="2600" b="1" dirty="0">
-                <a:solidFill>
-                  <a:schemeClr val="tx2"/>
-                </a:solidFill>
-              </a:rPr>
-              <a:t>₽</a:t>
-            </a:r>
-            <a:endParaRPr lang="en-US" sz="2600" dirty="0"/>
-          </a:p>
-        </p:txBody>
-      </p:sp>
-      <p:sp>
-        <p:nvSpPr>
-          <p:cNvPr id="4" name="event"/>
+          <a:prstGeom prst="rect">
+            <a:avLst/>
+          </a:prstGeom>
+        </p:spPr>
+      </p:pic>
+      <p:sp>
+        <p:nvSpPr>
+          <p:cNvPr id="3" name="event"/>
           <p:cNvSpPr txBox="1"/>
           <p:nvPr/>
         </p:nvSpPr>
@@ -2841,7 +2807,7 @@
       </p:sp>
       <p:sp>
         <p:nvSpPr>
-          <p:cNvPr id="5" name="Text 0"/>
+          <p:cNvPr id="4" name="Text 0"/>
           <p:cNvSpPr/>
           <p:nvPr>
             <p:ph idx="100" type="title" hasCustomPrompt="1"/>
@@ -2879,7 +2845,7 @@
       </p:sp>
       <p:sp>
         <p:nvSpPr>
-          <p:cNvPr id="6" name="Text 0"/>
+          <p:cNvPr id="5" name="Text 0"/>
           <p:cNvSpPr/>
           <p:nvPr>
             <p:ph idx="101" type="body" hasCustomPrompt="1"/>
@@ -4240,7 +4206,7 @@
                   <a:schemeClr val="tx1"/>
                 </a:solidFill>
               </a:rPr>
-              <a:t>светофор и одна фраза: «через 14 дней, 30 сентября, может не хватить 458 000 ₽»</a:t>
+              <a:t>цветная карточка риска и одна фраза: «через 14 дней, 30 сентября, дефицит составит 458 000 ₽»</a:t>
             </a:r>
             <a:endParaRPr lang="en-US" sz="1200" dirty="0"/>
           </a:p>
@@ -4486,12 +4452,12 @@
         </p:nvSpPr>
         <p:spPr>
           <a:xfrm>
-            <a:off x="4160520" y="2190584"/>
-            <a:ext cx="4526280" cy="1333833"/>
+            <a:off x="4160520" y="2165696"/>
+            <a:ext cx="4526280" cy="1383608"/>
           </a:xfrm>
           <a:prstGeom prst="roundRect">
             <a:avLst>
-              <a:gd name="adj" fmla="val 5484"/>
+              <a:gd name="adj" fmla="val 5287"/>
             </a:avLst>
           </a:prstGeom>
           <a:solidFill>
@@ -4523,8 +4489,8 @@
         </p:blipFill>
         <p:spPr>
           <a:xfrm>
-            <a:off x="4233672" y="2263736"/>
-            <a:ext cx="4379976" cy="1187529"/>
+            <a:off x="4233672" y="2238848"/>
+            <a:ext cx="4379976" cy="1237304"/>
           </a:xfrm>
           <a:prstGeom prst="rect">
             <a:avLst/>
@@ -4647,12 +4613,12 @@
         </p:nvSpPr>
         <p:spPr>
           <a:xfrm>
-            <a:off x="457200" y="1213505"/>
-            <a:ext cx="5120640" cy="3287990"/>
+            <a:off x="457200" y="1097844"/>
+            <a:ext cx="5120640" cy="3519313"/>
           </a:xfrm>
           <a:prstGeom prst="roundRect">
             <a:avLst>
-              <a:gd name="adj" fmla="val 2225"/>
+              <a:gd name="adj" fmla="val 2079"/>
             </a:avLst>
           </a:prstGeom>
           <a:solidFill>
@@ -4684,8 +4650,8 @@
         </p:blipFill>
         <p:spPr>
           <a:xfrm>
-            <a:off x="530352" y="1286657"/>
-            <a:ext cx="4974336" cy="3141686"/>
+            <a:off x="530352" y="1170996"/>
+            <a:ext cx="4974336" cy="3373009"/>
           </a:xfrm>
           <a:prstGeom prst="rect">
             <a:avLst/>
@@ -4830,7 +4796,7 @@
                   <a:schemeClr val="tx1"/>
                 </a:solidFill>
               </a:rPr>
-              <a:t>вероятность за 14 и за 7 дней: средний риск, светофор жёлтый</a:t>
+              <a:t>вероятность за 14 и за 7 дней: средний риск, оранжевая карточка</a:t>
             </a:r>
             <a:endParaRPr lang="en-US" sz="1200" dirty="0"/>
           </a:p>
@@ -5024,12 +4990,12 @@
         </p:nvSpPr>
         <p:spPr>
           <a:xfrm>
-            <a:off x="457200" y="1011974"/>
-            <a:ext cx="4663440" cy="2730933"/>
+            <a:off x="686600" y="1005840"/>
+            <a:ext cx="4204641" cy="2743200"/>
           </a:xfrm>
           <a:prstGeom prst="roundRect">
             <a:avLst>
-              <a:gd name="adj" fmla="val 2679"/>
+              <a:gd name="adj" fmla="val 2667"/>
             </a:avLst>
           </a:prstGeom>
           <a:solidFill>
@@ -5061,8 +5027,8 @@
         </p:blipFill>
         <p:spPr>
           <a:xfrm>
-            <a:off x="530352" y="1085126"/>
-            <a:ext cx="4517136" cy="2584629"/>
+            <a:off x="759752" y="1078992"/>
+            <a:ext cx="4058337" cy="2596896"/>
           </a:xfrm>
           <a:prstGeom prst="rect">
             <a:avLst/>

--- a/docs/presentation.pptx
+++ b/docs/presentation.pptx
@@ -117,36 +117,36 @@
   <p:extLst>
     <p:ext uri="{521415D9-36F7-43E2-AB2F-B90AF26B5E84}">
       <p14:sectionLst xmlns:p14="http://schemas.microsoft.com/office/powerpoint/2010/main">
-        <p14:section name="Начало" id="{49b5a89f-decd-c8f4-ebca-96153d6629bc}">
+        <p14:section name="Начало" id="{bec267f8-b1cd-53ac-1e2f-04a4d36a238f}">
           <p14:sldIdLst>
             <p14:sldId id="256"/>
           </p14:sldIdLst>
         </p14:section>
-        <p14:section name="Проблема и решение" id="{f5c8b613-469f-dc03-ab45-82e309c3e7d4}">
+        <p14:section name="Проблема и решение" id="{e0c4b6d5-f1d5-d586-3f78-599c6ddfa2ec}">
           <p14:sldIdLst>
             <p14:sldId id="257"/>
             <p14:sldId id="258"/>
           </p14:sldIdLst>
         </p14:section>
-        <p14:section name="Демо" id="{a76b8d90-722a-7972-75a2-1ce7c50db2ca}">
+        <p14:section name="Демо" id="{32bb21c3-59e4-bc5f-5bf3-834d8295f06e}">
           <p14:sldIdLst>
             <p14:sldId id="259"/>
             <p14:sldId id="260"/>
           </p14:sldIdLst>
         </p14:section>
-        <p14:section name="Данные и подход" id="{3de6b66d-99d2-e343-6463-4f1da40c5644}">
+        <p14:section name="Данные и подход" id="{a297a78f-0de9-dcd0-4aff-2fc0665a8b14}">
           <p14:sldIdLst>
             <p14:sldId id="261"/>
             <p14:sldId id="262"/>
             <p14:sldId id="263"/>
           </p14:sldIdLst>
         </p14:section>
-        <p14:section name="Архитектура" id="{cf80f351-d017-811e-f383-53e66a6d0d92}">
+        <p14:section name="Архитектура" id="{092cd949-deb8-d262-cfa1-c9638e87662e}">
           <p14:sldIdLst>
             <p14:sldId id="264"/>
           </p14:sldIdLst>
         </p14:section>
-        <p14:section name="Итоги" id="{86353a7a-6bc3-c007-bc87-ca2d9680cc4a}">
+        <p14:section name="Итоги" id="{f44422fc-64c5-da0e-e197-fe5665243350}">
           <p14:sldIdLst>
             <p14:sldId id="265"/>
             <p14:sldId id="266"/>
@@ -159,640 +159,6 @@
     </p:ext>
   </p:extLst>
 </p:presentation>
-</file>
-
-<file path=ppt/charts/chart1.xml><?xml version="1.0" encoding="utf-8"?>
-<c:chartSpace xmlns:c="http://schemas.openxmlformats.org/drawingml/2006/chart" xmlns:a="http://schemas.openxmlformats.org/drawingml/2006/main" xmlns:r="http://schemas.openxmlformats.org/officeDocument/2006/relationships">
-  <c:date1904 val="0"/>
-  <c:roundedCorners val="1"/>
-  <c:chart>
-    <c:title>
-      <c:tx>
-        <c:rich>
-          <a:bodyPr/>
-          <a:lstStyle/>
-          <a:p>
-            <a:pPr>
-              <a:defRPr sz="1200" b="0" i="0" u="none" strike="noStrike">
-                <a:solidFill>
-                  <a:srgbClr val="13241C"/>
-                </a:solidFill>
-                <a:latin typeface="+mn-lt"/>
-              </a:defRPr>
-            </a:pPr>
-            <a:r>
-              <a:rPr sz="1200" b="0" i="0" u="none" strike="noStrike">
-                <a:solidFill>
-                  <a:srgbClr val="13241C"/>
-                </a:solidFill>
-                <a:latin typeface="+mn-lt"/>
-              </a:rPr>
-              <a:t>Ошибка остатка на 30 дней, млн ₽ (синтетическая демо-компания S02)</a:t>
-            </a:r>
-          </a:p>
-        </c:rich>
-      </c:tx>
-      <c:layout/>
-      <c:overlay val="0"/>
-    </c:title>
-    <c:autoTitleDeleted val="0"/>
-    <c:plotArea>
-      <c:layout/>
-      <c:barChart>
-        <c:barDir val="bar"/>
-        <c:grouping val="clustered"/>
-        <c:varyColors val="0"/>
-        <c:ser>
-          <c:idx val="0"/>
-          <c:order val="0"/>
-          <c:tx>
-            <c:strRef>
-              <c:f>Sheet1!$B$1</c:f>
-              <c:strCache>
-                <c:ptCount val="1"/>
-                <c:pt idx="0">
-                  <c:v>Ошибка прогноза, млн ₽</c:v>
-                </c:pt>
-              </c:strCache>
-            </c:strRef>
-          </c:tx>
-          <c:spPr>
-            <a:solidFill>
-              <a:srgbClr val="7A8A80"/>
-            </a:solidFill>
-            <a:effectLst/>
-          </c:spPr>
-          <c:invertIfNegative val="0"/>
-          <c:dLbls>
-            <c:numFmt formatCode="0.00" sourceLinked="0"/>
-            <c:txPr>
-              <a:bodyPr/>
-              <a:lstStyle/>
-              <a:p>
-                <a:pPr>
-                  <a:defRPr b="0" i="0" strike="noStrike" sz="1100" u="none">
-                    <a:solidFill>
-                      <a:srgbClr val="13241C"/>
-                    </a:solidFill>
-                    <a:latin typeface="+mn-lt"/>
-                  </a:defRPr>
-                </a:pPr>
-              </a:p>
-            </c:txPr>
-            <c:showLegendKey val="0"/>
-            <c:showVal val="1"/>
-            <c:showCatName val="0"/>
-            <c:showSerName val="0"/>
-            <c:showPercent val="0"/>
-            <c:showBubbleSize val="0"/>
-            <c:showLeaderLines val="0"/>
-          </c:dLbls>
-          <c:dPt>
-            <c:idx val="0"/>
-            <c:invertIfNegative val="0"/>
-            <c:bubble3D val="0"/>
-            <c:spPr>
-              <a:solidFill>
-                <a:srgbClr val="7A8A80"/>
-              </a:solidFill>
-              <a:effectLst/>
-            </c:spPr>
-          </c:dPt>
-          <c:dPt>
-            <c:idx val="1"/>
-            <c:invertIfNegative val="0"/>
-            <c:bubble3D val="0"/>
-            <c:spPr>
-              <a:solidFill>
-                <a:srgbClr val="7A8A80"/>
-              </a:solidFill>
-              <a:effectLst/>
-            </c:spPr>
-          </c:dPt>
-          <c:dPt>
-            <c:idx val="2"/>
-            <c:invertIfNegative val="0"/>
-            <c:bubble3D val="0"/>
-            <c:spPr>
-              <a:solidFill>
-                <a:srgbClr val="11553F"/>
-              </a:solidFill>
-              <a:effectLst/>
-            </c:spPr>
-          </c:dPt>
-          <c:dPt>
-            <c:idx val="3"/>
-            <c:invertIfNegative val="0"/>
-            <c:bubble3D val="0"/>
-            <c:spPr>
-              <a:solidFill>
-                <a:srgbClr val="11553F"/>
-              </a:solidFill>
-              <a:effectLst/>
-            </c:spPr>
-          </c:dPt>
-          <c:dPt>
-            <c:idx val="4"/>
-            <c:invertIfNegative val="0"/>
-            <c:bubble3D val="0"/>
-            <c:spPr>
-              <a:solidFill>
-                <a:srgbClr val="8DC63F"/>
-              </a:solidFill>
-              <a:effectLst/>
-            </c:spPr>
-          </c:dPt>
-          <c:cat>
-            <c:multiLvlStrRef>
-              <c:f>Sheet1!$A$2:$A$6</c:f>
-              <c:multiLvlStrCache>
-                <c:ptCount val="5"/>
-                <c:lvl>
-                  <c:pt idx="0">
-                    <c:v>Только выписка</c:v>
-                  </c:pt>
-                  <c:pt idx="1">
-                    <c:v>+ налоговый календарь</c:v>
-                  </c:pt>
-                  <c:pt idx="2">
-                    <c:v>+ 1С</c:v>
-                  </c:pt>
-                  <c:pt idx="3">
-                    <c:v>+ открытые реестры</c:v>
-                  </c:pt>
-                  <c:pt idx="4">
-                    <c:v>+ 1С + реестры</c:v>
-                  </c:pt>
-                </c:lvl>
-              </c:multiLvlStrCache>
-            </c:multiLvlStrRef>
-          </c:cat>
-          <c:val>
-            <c:numRef>
-              <c:f>Sheet1!$B$2:$B$6</c:f>
-              <c:numCache>
-                <c:formatCode>General</c:formatCode>
-                <c:ptCount val="5"/>
-                <c:pt idx="0">
-                  <c:v>1.78</c:v>
-                </c:pt>
-                <c:pt idx="1">
-                  <c:v>1.48</c:v>
-                </c:pt>
-                <c:pt idx="2">
-                  <c:v>1.27</c:v>
-                </c:pt>
-                <c:pt idx="3">
-                  <c:v>0.74</c:v>
-                </c:pt>
-                <c:pt idx="4">
-                  <c:v>0.46</c:v>
-                </c:pt>
-              </c:numCache>
-            </c:numRef>
-          </c:val>
-        </c:ser>
-        <c:dLbls>
-          <c:numFmt formatCode="0.00" sourceLinked="0"/>
-          <c:txPr>
-            <a:bodyPr/>
-            <a:lstStyle/>
-            <a:p>
-              <a:pPr>
-                <a:defRPr b="0" i="0" strike="noStrike" sz="1100" u="none">
-                  <a:solidFill>
-                    <a:srgbClr val="13241C"/>
-                  </a:solidFill>
-                  <a:latin typeface="+mn-lt"/>
-                </a:defRPr>
-              </a:pPr>
-            </a:p>
-          </c:txPr>
-          <c:showLegendKey val="0"/>
-          <c:showVal val="1"/>
-          <c:showCatName val="0"/>
-          <c:showSerName val="0"/>
-          <c:showPercent val="0"/>
-          <c:showBubbleSize val="0"/>
-          <c:showLeaderLines val="0"/>
-        </c:dLbls>
-        <c:gapWidth val="150"/>
-        <c:overlap val="0"/>
-        <c:axId val="2094734554"/>
-        <c:axId val="2094734552"/>
-        <c:axId val="2094734556"/>
-      </c:barChart>
-      <c:catAx>
-        <c:axId val="2094734554"/>
-        <c:scaling>
-          <c:orientation val="maxMin"/>
-        </c:scaling>
-        <c:delete val="0"/>
-        <c:axPos val="l"/>
-        <c:numFmt formatCode="General" sourceLinked="1"/>
-        <c:majorTickMark val="out"/>
-        <c:minorTickMark val="none"/>
-        <c:tickLblPos val="nextTo"/>
-        <c:spPr>
-          <a:ln w="12700" cap="flat">
-            <a:solidFill>
-              <a:srgbClr val="888888"/>
-            </a:solidFill>
-            <a:prstDash val="solid"/>
-            <a:round/>
-          </a:ln>
-        </c:spPr>
-        <c:txPr>
-          <a:bodyPr/>
-          <a:lstStyle/>
-          <a:p>
-            <a:pPr>
-              <a:defRPr sz="1000" b="0" i="0" u="none" strike="noStrike">
-                <a:solidFill>
-                  <a:srgbClr val="4B5D53"/>
-                </a:solidFill>
-                <a:latin typeface="+mn-lt"/>
-              </a:defRPr>
-            </a:pPr>
-            <a:endParaRPr lang="en-US"/>
-          </a:p>
-        </c:txPr>
-        <c:crossAx val="2094734552"/>
-        <c:crosses val="autoZero"/>
-        <c:auto val="1"/>
-        <c:lblAlgn val="ctr"/>
-        <c:noMultiLvlLbl val="1"/>
-      </c:catAx>
-      <c:valAx>
-        <c:axId val="2094734552"/>
-        <c:scaling>
-          <c:orientation val="minMax"/>
-        </c:scaling>
-        <c:delete val="1"/>
-        <c:axPos val="b"/>
-        <c:numFmt formatCode="General" sourceLinked="0"/>
-        <c:majorTickMark val="out"/>
-        <c:minorTickMark val="none"/>
-        <c:tickLblPos val="low"/>
-        <c:spPr>
-          <a:ln w="12700" cap="flat">
-            <a:solidFill>
-              <a:srgbClr val="888888"/>
-            </a:solidFill>
-            <a:prstDash val="solid"/>
-            <a:round/>
-          </a:ln>
-        </c:spPr>
-        <c:txPr>
-          <a:bodyPr/>
-          <a:lstStyle/>
-          <a:p>
-            <a:pPr>
-              <a:defRPr sz="1200" b="0" i="0" u="none" strike="noStrike">
-                <a:solidFill>
-                  <a:srgbClr val="000000"/>
-                </a:solidFill>
-                <a:latin typeface="Arial"/>
-              </a:defRPr>
-            </a:pPr>
-            <a:endParaRPr lang="en-US"/>
-          </a:p>
-        </c:txPr>
-        <c:crossAx val="2094734554"/>
-        <c:crosses val="autoZero"/>
-        <c:crossBetween val="between"/>
-      </c:valAx>
-      <c:spPr>
-        <a:noFill/>
-        <a:ln>
-          <a:noFill/>
-        </a:ln>
-        <a:effectLst/>
-      </c:spPr>
-    </c:plotArea>
-    <c:plotVisOnly val="1"/>
-    <c:dispBlanksAs val="span"/>
-  </c:chart>
-  <c:spPr>
-    <a:noFill/>
-    <a:ln>
-      <a:noFill/>
-    </a:ln>
-    <a:effectLst/>
-  </c:spPr>
-  <c:externalData r:id="rId1">
-    <c:autoUpdate val="0"/>
-  </c:externalData>
-</c:chartSpace>
-</file>
-
-<file path=ppt/charts/chart2.xml><?xml version="1.0" encoding="utf-8"?>
-<c:chartSpace xmlns:c="http://schemas.openxmlformats.org/drawingml/2006/chart" xmlns:a="http://schemas.openxmlformats.org/drawingml/2006/main" xmlns:r="http://schemas.openxmlformats.org/officeDocument/2006/relationships">
-  <c:date1904 val="0"/>
-  <c:roundedCorners val="1"/>
-  <c:chart>
-    <c:title>
-      <c:tx>
-        <c:rich>
-          <a:bodyPr/>
-          <a:lstStyle/>
-          <a:p>
-            <a:pPr>
-              <a:defRPr sz="1200" b="0" i="0" u="none" strike="noStrike">
-                <a:solidFill>
-                  <a:srgbClr val="13241C"/>
-                </a:solidFill>
-                <a:latin typeface="+mn-lt"/>
-              </a:defRPr>
-            </a:pPr>
-            <a:r>
-              <a:rPr sz="1200" b="0" i="0" u="none" strike="noStrike">
-                <a:solidFill>
-                  <a:srgbClr val="13241C"/>
-                </a:solidFill>
-                <a:latin typeface="+mn-lt"/>
-              </a:rPr>
-              <a:t>Ошибка фактического остатка, % месячного оборота (меньше — лучше)</a:t>
-            </a:r>
-          </a:p>
-        </c:rich>
-      </c:tx>
-      <c:layout/>
-      <c:overlay val="0"/>
-    </c:title>
-    <c:autoTitleDeleted val="0"/>
-    <c:plotArea>
-      <c:layout/>
-      <c:barChart>
-        <c:barDir val="col"/>
-        <c:grouping val="clustered"/>
-        <c:varyColors val="0"/>
-        <c:ser>
-          <c:idx val="0"/>
-          <c:order val="0"/>
-          <c:tx>
-            <c:strRef>
-              <c:f>Sheet1!$B$1</c:f>
-              <c:strCache>
-                <c:ptCount val="1"/>
-                <c:pt idx="0">
-                  <c:v>Ошибка остатка, % оборота</c:v>
-                </c:pt>
-              </c:strCache>
-            </c:strRef>
-          </c:tx>
-          <c:spPr>
-            <a:solidFill>
-              <a:srgbClr val="7A8A80"/>
-            </a:solidFill>
-            <a:effectLst/>
-          </c:spPr>
-          <c:invertIfNegative val="0"/>
-          <c:dLbls>
-            <c:numFmt formatCode="0.0&quot;%&quot;" sourceLinked="0"/>
-            <c:txPr>
-              <a:bodyPr/>
-              <a:lstStyle/>
-              <a:p>
-                <a:pPr>
-                  <a:defRPr b="0" i="0" strike="noStrike" sz="1200" u="none">
-                    <a:solidFill>
-                      <a:srgbClr val="13241C"/>
-                    </a:solidFill>
-                    <a:latin typeface="+mn-lt"/>
-                  </a:defRPr>
-                </a:pPr>
-              </a:p>
-            </c:txPr>
-            <c:showLegendKey val="0"/>
-            <c:showVal val="1"/>
-            <c:showCatName val="0"/>
-            <c:showSerName val="0"/>
-            <c:showPercent val="0"/>
-            <c:showBubbleSize val="0"/>
-            <c:showLeaderLines val="0"/>
-          </c:dLbls>
-          <c:dPt>
-            <c:idx val="0"/>
-            <c:invertIfNegative val="0"/>
-            <c:bubble3D val="0"/>
-            <c:spPr>
-              <a:solidFill>
-                <a:srgbClr val="7A8A80"/>
-              </a:solidFill>
-              <a:effectLst/>
-            </c:spPr>
-          </c:dPt>
-          <c:dPt>
-            <c:idx val="1"/>
-            <c:invertIfNegative val="0"/>
-            <c:bubble3D val="0"/>
-            <c:spPr>
-              <a:solidFill>
-                <a:srgbClr val="7A8A80"/>
-              </a:solidFill>
-              <a:effectLst/>
-            </c:spPr>
-          </c:dPt>
-          <c:dPt>
-            <c:idx val="2"/>
-            <c:invertIfNegative val="0"/>
-            <c:bubble3D val="0"/>
-            <c:spPr>
-              <a:solidFill>
-                <a:srgbClr val="7A8A80"/>
-              </a:solidFill>
-              <a:effectLst/>
-            </c:spPr>
-          </c:dPt>
-          <c:dPt>
-            <c:idx val="3"/>
-            <c:invertIfNegative val="0"/>
-            <c:bubble3D val="0"/>
-            <c:spPr>
-              <a:solidFill>
-                <a:srgbClr val="11553F"/>
-              </a:solidFill>
-              <a:effectLst/>
-            </c:spPr>
-          </c:dPt>
-          <c:cat>
-            <c:multiLvlStrRef>
-              <c:f>Sheet1!$A$2:$A$5</c:f>
-              <c:multiLvlStrCache>
-                <c:ptCount val="4"/>
-                <c:lvl>
-                  <c:pt idx="0">
-                    <c:v>Остаток не изменится</c:v>
-                  </c:pt>
-                  <c:pt idx="1">
-                    <c:v>Наивная (повтор 28 дней)</c:v>
-                  </c:pt>
-                  <c:pt idx="2">
-                    <c:v>Сезонная (ETS)</c:v>
-                  </c:pt>
-                  <c:pt idx="3">
-                    <c:v>Наш прогноз</c:v>
-                  </c:pt>
-                </c:lvl>
-              </c:multiLvlStrCache>
-            </c:multiLvlStrRef>
-          </c:cat>
-          <c:val>
-            <c:numRef>
-              <c:f>Sheet1!$B$2:$B$5</c:f>
-              <c:numCache>
-                <c:formatCode>General</c:formatCode>
-                <c:ptCount val="4"/>
-                <c:pt idx="0">
-                  <c:v>13.3</c:v>
-                </c:pt>
-                <c:pt idx="1">
-                  <c:v>21.5</c:v>
-                </c:pt>
-                <c:pt idx="2">
-                  <c:v>19</c:v>
-                </c:pt>
-                <c:pt idx="3">
-                  <c:v>13.1</c:v>
-                </c:pt>
-              </c:numCache>
-            </c:numRef>
-          </c:val>
-        </c:ser>
-        <c:dLbls>
-          <c:numFmt formatCode="0.0&quot;%&quot;" sourceLinked="0"/>
-          <c:txPr>
-            <a:bodyPr/>
-            <a:lstStyle/>
-            <a:p>
-              <a:pPr>
-                <a:defRPr b="0" i="0" strike="noStrike" sz="1200" u="none">
-                  <a:solidFill>
-                    <a:srgbClr val="13241C"/>
-                  </a:solidFill>
-                  <a:latin typeface="+mn-lt"/>
-                </a:defRPr>
-              </a:pPr>
-            </a:p>
-          </c:txPr>
-          <c:showLegendKey val="0"/>
-          <c:showVal val="1"/>
-          <c:showCatName val="0"/>
-          <c:showSerName val="0"/>
-          <c:showPercent val="0"/>
-          <c:showBubbleSize val="0"/>
-          <c:showLeaderLines val="0"/>
-        </c:dLbls>
-        <c:gapWidth val="150"/>
-        <c:overlap val="0"/>
-        <c:axId val="2094734554"/>
-        <c:axId val="2094734552"/>
-        <c:axId val="2094734556"/>
-      </c:barChart>
-      <c:catAx>
-        <c:axId val="2094734554"/>
-        <c:scaling>
-          <c:orientation val="minMax"/>
-        </c:scaling>
-        <c:delete val="0"/>
-        <c:axPos val="b"/>
-        <c:numFmt formatCode="General" sourceLinked="1"/>
-        <c:majorTickMark val="out"/>
-        <c:minorTickMark val="none"/>
-        <c:tickLblPos val="low"/>
-        <c:spPr>
-          <a:ln w="12700" cap="flat">
-            <a:solidFill>
-              <a:srgbClr val="888888"/>
-            </a:solidFill>
-            <a:prstDash val="solid"/>
-            <a:round/>
-          </a:ln>
-        </c:spPr>
-        <c:txPr>
-          <a:bodyPr/>
-          <a:lstStyle/>
-          <a:p>
-            <a:pPr>
-              <a:defRPr sz="1000" b="0" i="0" u="none" strike="noStrike">
-                <a:solidFill>
-                  <a:srgbClr val="4B5D53"/>
-                </a:solidFill>
-                <a:latin typeface="+mn-lt"/>
-              </a:defRPr>
-            </a:pPr>
-            <a:endParaRPr lang="en-US"/>
-          </a:p>
-        </c:txPr>
-        <c:crossAx val="2094734552"/>
-        <c:crosses val="autoZero"/>
-        <c:auto val="1"/>
-        <c:lblAlgn val="ctr"/>
-        <c:noMultiLvlLbl val="1"/>
-      </c:catAx>
-      <c:valAx>
-        <c:axId val="2094734552"/>
-        <c:scaling>
-          <c:orientation val="minMax"/>
-          <c:min val="0"/>
-        </c:scaling>
-        <c:delete val="1"/>
-        <c:axPos val="l"/>
-        <c:numFmt formatCode="General" sourceLinked="0"/>
-        <c:majorTickMark val="out"/>
-        <c:minorTickMark val="none"/>
-        <c:tickLblPos val="nextTo"/>
-        <c:spPr>
-          <a:ln w="12700" cap="flat">
-            <a:solidFill>
-              <a:srgbClr val="888888"/>
-            </a:solidFill>
-            <a:prstDash val="solid"/>
-            <a:round/>
-          </a:ln>
-        </c:spPr>
-        <c:txPr>
-          <a:bodyPr/>
-          <a:lstStyle/>
-          <a:p>
-            <a:pPr>
-              <a:defRPr sz="1200" b="0" i="0" u="none" strike="noStrike">
-                <a:solidFill>
-                  <a:srgbClr val="000000"/>
-                </a:solidFill>
-                <a:latin typeface="Arial"/>
-              </a:defRPr>
-            </a:pPr>
-            <a:endParaRPr lang="en-US"/>
-          </a:p>
-        </c:txPr>
-        <c:crossAx val="2094734554"/>
-        <c:crosses val="autoZero"/>
-        <c:crossBetween val="between"/>
-      </c:valAx>
-      <c:spPr>
-        <a:noFill/>
-        <a:ln>
-          <a:noFill/>
-        </a:ln>
-        <a:effectLst/>
-      </c:spPr>
-    </c:plotArea>
-    <c:plotVisOnly val="1"/>
-    <c:dispBlanksAs val="span"/>
-  </c:chart>
-  <c:spPr>
-    <a:noFill/>
-    <a:ln>
-      <a:noFill/>
-    </a:ln>
-    <a:effectLst/>
-  </c:spPr>
-  <c:externalData r:id="rId1">
-    <c:autoUpdate val="0"/>
-  </c:externalData>
-</c:chartSpace>
 </file>
 
 <file path=ppt/notesMasters/notesMaster1.xml><?xml version="1.0" encoding="utf-8"?>
@@ -3461,6 +2827,117 @@
           </a:p>
         </p:txBody>
       </p:sp>
+      <p:sp>
+        <p:nvSpPr>
+          <p:cNvPr id="4" name="qr card"/>
+          <p:cNvSpPr/>
+          <p:nvPr/>
+        </p:nvSpPr>
+        <p:spPr>
+          <a:xfrm>
+            <a:off x="7452360" y="3840480"/>
+            <a:ext cx="1143000" cy="1143000"/>
+          </a:xfrm>
+          <a:prstGeom prst="roundRect">
+            <a:avLst>
+              <a:gd name="adj" fmla="val 6400"/>
+            </a:avLst>
+          </a:prstGeom>
+          <a:solidFill>
+            <a:schemeClr val="bg1"/>
+          </a:solidFill>
+          <a:ln/>
+        </p:spPr>
+      </p:sp>
+      <p:pic>
+        <p:nvPicPr>
+          <p:cNvPr id="5" name="qr prototype" descr="QR-код: https://217.144.184.234.sslip.io/">    </p:cNvPr>
+          <p:cNvPicPr>
+            <a:picLocks noChangeAspect="1"/>
+          </p:cNvPicPr>
+          <p:nvPr/>
+        </p:nvPicPr>
+        <p:blipFill>
+          <a:blip r:embed="rId1"/>
+          <a:stretch>
+            <a:fillRect/>
+          </a:stretch>
+        </p:blipFill>
+        <p:spPr>
+          <a:xfrm>
+            <a:off x="7498080" y="3886200"/>
+            <a:ext cx="1051560" cy="1051560"/>
+          </a:xfrm>
+          <a:prstGeom prst="rect">
+            <a:avLst/>
+          </a:prstGeom>
+        </p:spPr>
+      </p:pic>
+      <p:sp>
+        <p:nvSpPr>
+          <p:cNvPr id="6" name="prototype link"/>
+          <p:cNvSpPr txBox="1"/>
+          <p:nvPr/>
+        </p:nvSpPr>
+        <p:spPr>
+          <a:xfrm>
+            <a:off x="548640" y="4160520"/>
+            <a:ext cx="6766560" cy="548640"/>
+          </a:xfrm>
+          <a:prstGeom prst="rect">
+            <a:avLst/>
+          </a:prstGeom>
+          <a:noFill/>
+          <a:ln/>
+        </p:spPr>
+        <p:txBody>
+          <a:bodyPr wrap="square" lIns="0" tIns="0" rIns="0" bIns="0" rtlCol="0" anchor="ctr"/>
+          <a:lstStyle/>
+          <a:p>
+            <a:pPr indent="0" marL="0">
+              <a:buNone/>
+            </a:pPr>
+            <a:r>
+              <a:rPr lang="en-US" sz="1400" b="1" dirty="0">
+                <a:solidFill>
+                  <a:schemeClr val="bg1"/>
+                </a:solidFill>
+              </a:rPr>
+              <a:t>Прототип: </a:t>
+            </a:r>
+            <a:pPr indent="0" marL="0">
+              <a:buNone/>
+            </a:pPr>
+            <a:r>
+              <a:rPr lang="en-US" sz="1400" u="sng" dirty="0">
+                <a:solidFill>
+                  <a:schemeClr val="bg1"/>
+                </a:solidFill>
+                <a:hlinkClick r:id="rId2" invalidUrl="" action="" tgtFrame="" tooltip="" history="1" highlightClick="0" endSnd="0">
+                  <a:extLst>
+                    <a:ext uri="{A12FA001-AC4F-418D-AE19-62706E023703}">
+                      <ahyp:hlinkClr xmlns:ahyp="http://schemas.microsoft.com/office/drawing/2018/hyperlinkcolor" val="tx"/>
+                    </a:ext>
+                  </a:extLst>
+                </a:hlinkClick>
+              </a:rPr>
+              <a:t>https://217.144.184.234.sslip.io</a:t>
+            </a:r>
+            <a:pPr indent="0" marL="0">
+              <a:buNone/>
+            </a:pPr>
+            <a:r>
+              <a:rPr lang="en-US" sz="1400" dirty="0">
+                <a:solidFill>
+                  <a:srgbClr val="CFE2D6"/>
+                </a:solidFill>
+              </a:rPr>
+              <a:t> → «Посмотреть демо»</a:t>
+            </a:r>
+            <a:endParaRPr lang="en-US" sz="1400" dirty="0"/>
+          </a:p>
+        </p:txBody>
+      </p:sp>
     </p:spTree>
   </p:cSld>
   <p:clrMapOvr>
@@ -5887,25 +5364,505 @@
           </a:p>
         </p:txBody>
       </p:sp>
-      <p:graphicFrame>
-        <p:nvGraphicFramePr>
-          <p:cNvPr id="23" name="sources chart" descr=""/>
-          <p:cNvGraphicFramePr/>
-          <p:nvPr/>
-        </p:nvGraphicFramePr>
-        <p:xfrm>
-          <a:off x="4480560" y="1005840"/>
-          <a:ext cx="4206240" cy="2926080"/>
-        </p:xfrm>
-        <a:graphic xmlns:a="http://schemas.openxmlformats.org/drawingml/2006/main">
-          <a:graphicData uri="http://schemas.openxmlformats.org/drawingml/2006/chart">
-            <c:chart xmlns:c="http://schemas.openxmlformats.org/drawingml/2006/chart" r:id="rId6"/>
-          </a:graphicData>
-        </a:graphic>
-      </p:graphicFrame>
-      <p:sp>
-        <p:nvSpPr>
-          <p:cNvPr id="24" name="sources takeaway"/>
+      <p:sp>
+        <p:nvSpPr>
+          <p:cNvPr id="23" name="sources chart title"/>
+          <p:cNvSpPr txBox="1"/>
+          <p:nvPr/>
+        </p:nvSpPr>
+        <p:spPr>
+          <a:xfrm>
+            <a:off x="4480560" y="1005840"/>
+            <a:ext cx="4206240" cy="384048"/>
+          </a:xfrm>
+          <a:prstGeom prst="rect">
+            <a:avLst/>
+          </a:prstGeom>
+          <a:noFill/>
+          <a:ln/>
+        </p:spPr>
+        <p:txBody>
+          <a:bodyPr wrap="square" lIns="0" tIns="0" rIns="0" bIns="0" rtlCol="0" anchor="t"/>
+          <a:lstStyle/>
+          <a:p>
+            <a:pPr indent="0" marL="0">
+              <a:buNone/>
+            </a:pPr>
+            <a:r>
+              <a:rPr lang="en-US" sz="1200" b="1" dirty="0">
+                <a:solidFill>
+                  <a:schemeClr val="tx1"/>
+                </a:solidFill>
+              </a:rPr>
+              <a:t>Ошибка остатка на 30 дней, млн ₽ (синтетическая демо-компания S02)</a:t>
+            </a:r>
+            <a:endParaRPr lang="en-US" sz="1200" dirty="0"/>
+          </a:p>
+        </p:txBody>
+      </p:sp>
+      <p:sp>
+        <p:nvSpPr>
+          <p:cNvPr id="24" name="sources chart label 0"/>
+          <p:cNvSpPr txBox="1"/>
+          <p:nvPr/>
+        </p:nvSpPr>
+        <p:spPr>
+          <a:xfrm>
+            <a:off x="4480560" y="1463040"/>
+            <a:ext cx="1600200" cy="493776"/>
+          </a:xfrm>
+          <a:prstGeom prst="rect">
+            <a:avLst/>
+          </a:prstGeom>
+          <a:noFill/>
+          <a:ln/>
+        </p:spPr>
+        <p:txBody>
+          <a:bodyPr wrap="square" lIns="0" tIns="0" rIns="0" bIns="0" rtlCol="0" anchor="ctr"/>
+          <a:lstStyle/>
+          <a:p>
+            <a:pPr algn="r" indent="0" marL="0">
+              <a:buNone/>
+            </a:pPr>
+            <a:r>
+              <a:rPr lang="en-US" sz="1000" dirty="0">
+                <a:solidFill>
+                  <a:schemeClr val="tx2"/>
+                </a:solidFill>
+              </a:rPr>
+              <a:t>Только выписка</a:t>
+            </a:r>
+            <a:endParaRPr lang="en-US" sz="1000" dirty="0"/>
+          </a:p>
+        </p:txBody>
+      </p:sp>
+      <p:sp>
+        <p:nvSpPr>
+          <p:cNvPr id="25" name="sources chart bar 0"/>
+          <p:cNvSpPr/>
+          <p:nvPr/>
+        </p:nvSpPr>
+        <p:spPr>
+          <a:xfrm>
+            <a:off x="6172200" y="1556857"/>
+            <a:ext cx="2011680" cy="306141"/>
+          </a:xfrm>
+          <a:prstGeom prst="rect">
+            <a:avLst/>
+          </a:prstGeom>
+          <a:solidFill>
+            <a:srgbClr val="7A8A80"/>
+          </a:solidFill>
+          <a:ln/>
+        </p:spPr>
+      </p:sp>
+      <p:sp>
+        <p:nvSpPr>
+          <p:cNvPr id="26" name="sources chart value 0"/>
+          <p:cNvSpPr txBox="1"/>
+          <p:nvPr/>
+        </p:nvSpPr>
+        <p:spPr>
+          <a:xfrm>
+            <a:off x="8238744" y="1463040"/>
+            <a:ext cx="502920" cy="493776"/>
+          </a:xfrm>
+          <a:prstGeom prst="rect">
+            <a:avLst/>
+          </a:prstGeom>
+          <a:noFill/>
+          <a:ln/>
+        </p:spPr>
+        <p:txBody>
+          <a:bodyPr wrap="square" lIns="0" tIns="0" rIns="0" bIns="0" rtlCol="0" anchor="ctr"/>
+          <a:lstStyle/>
+          <a:p>
+            <a:pPr indent="0" marL="0">
+              <a:buNone/>
+            </a:pPr>
+            <a:r>
+              <a:rPr lang="en-US" sz="1100" b="1" dirty="0">
+                <a:solidFill>
+                  <a:schemeClr val="tx1"/>
+                </a:solidFill>
+              </a:rPr>
+              <a:t>1,78</a:t>
+            </a:r>
+            <a:endParaRPr lang="en-US" sz="1100" dirty="0"/>
+          </a:p>
+        </p:txBody>
+      </p:sp>
+      <p:sp>
+        <p:nvSpPr>
+          <p:cNvPr id="27" name="sources chart label 1"/>
+          <p:cNvSpPr txBox="1"/>
+          <p:nvPr/>
+        </p:nvSpPr>
+        <p:spPr>
+          <a:xfrm>
+            <a:off x="4480560" y="1956816"/>
+            <a:ext cx="1600200" cy="493776"/>
+          </a:xfrm>
+          <a:prstGeom prst="rect">
+            <a:avLst/>
+          </a:prstGeom>
+          <a:noFill/>
+          <a:ln/>
+        </p:spPr>
+        <p:txBody>
+          <a:bodyPr wrap="square" lIns="0" tIns="0" rIns="0" bIns="0" rtlCol="0" anchor="ctr"/>
+          <a:lstStyle/>
+          <a:p>
+            <a:pPr algn="r" indent="0" marL="0">
+              <a:buNone/>
+            </a:pPr>
+            <a:r>
+              <a:rPr lang="en-US" sz="1000" dirty="0">
+                <a:solidFill>
+                  <a:schemeClr val="tx2"/>
+                </a:solidFill>
+              </a:rPr>
+              <a:t>+ налоговый календарь</a:t>
+            </a:r>
+            <a:endParaRPr lang="en-US" sz="1000" dirty="0"/>
+          </a:p>
+        </p:txBody>
+      </p:sp>
+      <p:sp>
+        <p:nvSpPr>
+          <p:cNvPr id="28" name="sources chart bar 1"/>
+          <p:cNvSpPr/>
+          <p:nvPr/>
+        </p:nvSpPr>
+        <p:spPr>
+          <a:xfrm>
+            <a:off x="6172200" y="2050633"/>
+            <a:ext cx="1672633" cy="306141"/>
+          </a:xfrm>
+          <a:prstGeom prst="rect">
+            <a:avLst/>
+          </a:prstGeom>
+          <a:solidFill>
+            <a:srgbClr val="7A8A80"/>
+          </a:solidFill>
+          <a:ln/>
+        </p:spPr>
+      </p:sp>
+      <p:sp>
+        <p:nvSpPr>
+          <p:cNvPr id="29" name="sources chart value 1"/>
+          <p:cNvSpPr txBox="1"/>
+          <p:nvPr/>
+        </p:nvSpPr>
+        <p:spPr>
+          <a:xfrm>
+            <a:off x="7899697" y="1956816"/>
+            <a:ext cx="502920" cy="493776"/>
+          </a:xfrm>
+          <a:prstGeom prst="rect">
+            <a:avLst/>
+          </a:prstGeom>
+          <a:noFill/>
+          <a:ln/>
+        </p:spPr>
+        <p:txBody>
+          <a:bodyPr wrap="square" lIns="0" tIns="0" rIns="0" bIns="0" rtlCol="0" anchor="ctr"/>
+          <a:lstStyle/>
+          <a:p>
+            <a:pPr indent="0" marL="0">
+              <a:buNone/>
+            </a:pPr>
+            <a:r>
+              <a:rPr lang="en-US" sz="1100" b="1" dirty="0">
+                <a:solidFill>
+                  <a:schemeClr val="tx1"/>
+                </a:solidFill>
+              </a:rPr>
+              <a:t>1,48</a:t>
+            </a:r>
+            <a:endParaRPr lang="en-US" sz="1100" dirty="0"/>
+          </a:p>
+        </p:txBody>
+      </p:sp>
+      <p:sp>
+        <p:nvSpPr>
+          <p:cNvPr id="30" name="sources chart label 2"/>
+          <p:cNvSpPr txBox="1"/>
+          <p:nvPr/>
+        </p:nvSpPr>
+        <p:spPr>
+          <a:xfrm>
+            <a:off x="4480560" y="2450592"/>
+            <a:ext cx="1600200" cy="493776"/>
+          </a:xfrm>
+          <a:prstGeom prst="rect">
+            <a:avLst/>
+          </a:prstGeom>
+          <a:noFill/>
+          <a:ln/>
+        </p:spPr>
+        <p:txBody>
+          <a:bodyPr wrap="square" lIns="0" tIns="0" rIns="0" bIns="0" rtlCol="0" anchor="ctr"/>
+          <a:lstStyle/>
+          <a:p>
+            <a:pPr algn="r" indent="0" marL="0">
+              <a:buNone/>
+            </a:pPr>
+            <a:r>
+              <a:rPr lang="en-US" sz="1000" dirty="0">
+                <a:solidFill>
+                  <a:schemeClr val="tx2"/>
+                </a:solidFill>
+              </a:rPr>
+              <a:t>+ 1С</a:t>
+            </a:r>
+            <a:endParaRPr lang="en-US" sz="1000" dirty="0"/>
+          </a:p>
+        </p:txBody>
+      </p:sp>
+      <p:sp>
+        <p:nvSpPr>
+          <p:cNvPr id="31" name="sources chart bar 2"/>
+          <p:cNvSpPr/>
+          <p:nvPr/>
+        </p:nvSpPr>
+        <p:spPr>
+          <a:xfrm>
+            <a:off x="6172200" y="2544409"/>
+            <a:ext cx="1435300" cy="306141"/>
+          </a:xfrm>
+          <a:prstGeom prst="rect">
+            <a:avLst/>
+          </a:prstGeom>
+          <a:solidFill>
+            <a:srgbClr val="11553F"/>
+          </a:solidFill>
+          <a:ln/>
+        </p:spPr>
+      </p:sp>
+      <p:sp>
+        <p:nvSpPr>
+          <p:cNvPr id="32" name="sources chart value 2"/>
+          <p:cNvSpPr txBox="1"/>
+          <p:nvPr/>
+        </p:nvSpPr>
+        <p:spPr>
+          <a:xfrm>
+            <a:off x="7662364" y="2450592"/>
+            <a:ext cx="502920" cy="493776"/>
+          </a:xfrm>
+          <a:prstGeom prst="rect">
+            <a:avLst/>
+          </a:prstGeom>
+          <a:noFill/>
+          <a:ln/>
+        </p:spPr>
+        <p:txBody>
+          <a:bodyPr wrap="square" lIns="0" tIns="0" rIns="0" bIns="0" rtlCol="0" anchor="ctr"/>
+          <a:lstStyle/>
+          <a:p>
+            <a:pPr indent="0" marL="0">
+              <a:buNone/>
+            </a:pPr>
+            <a:r>
+              <a:rPr lang="en-US" sz="1100" b="1" dirty="0">
+                <a:solidFill>
+                  <a:schemeClr val="tx1"/>
+                </a:solidFill>
+              </a:rPr>
+              <a:t>1,27</a:t>
+            </a:r>
+            <a:endParaRPr lang="en-US" sz="1100" dirty="0"/>
+          </a:p>
+        </p:txBody>
+      </p:sp>
+      <p:sp>
+        <p:nvSpPr>
+          <p:cNvPr id="33" name="sources chart label 3"/>
+          <p:cNvSpPr txBox="1"/>
+          <p:nvPr/>
+        </p:nvSpPr>
+        <p:spPr>
+          <a:xfrm>
+            <a:off x="4480560" y="2944368"/>
+            <a:ext cx="1600200" cy="493776"/>
+          </a:xfrm>
+          <a:prstGeom prst="rect">
+            <a:avLst/>
+          </a:prstGeom>
+          <a:noFill/>
+          <a:ln/>
+        </p:spPr>
+        <p:txBody>
+          <a:bodyPr wrap="square" lIns="0" tIns="0" rIns="0" bIns="0" rtlCol="0" anchor="ctr"/>
+          <a:lstStyle/>
+          <a:p>
+            <a:pPr algn="r" indent="0" marL="0">
+              <a:buNone/>
+            </a:pPr>
+            <a:r>
+              <a:rPr lang="en-US" sz="1000" dirty="0">
+                <a:solidFill>
+                  <a:schemeClr val="tx2"/>
+                </a:solidFill>
+              </a:rPr>
+              <a:t>+ открытые реестры</a:t>
+            </a:r>
+            <a:endParaRPr lang="en-US" sz="1000" dirty="0"/>
+          </a:p>
+        </p:txBody>
+      </p:sp>
+      <p:sp>
+        <p:nvSpPr>
+          <p:cNvPr id="34" name="sources chart bar 3"/>
+          <p:cNvSpPr/>
+          <p:nvPr/>
+        </p:nvSpPr>
+        <p:spPr>
+          <a:xfrm>
+            <a:off x="6172200" y="3038185"/>
+            <a:ext cx="836316" cy="306141"/>
+          </a:xfrm>
+          <a:prstGeom prst="rect">
+            <a:avLst/>
+          </a:prstGeom>
+          <a:solidFill>
+            <a:srgbClr val="11553F"/>
+          </a:solidFill>
+          <a:ln/>
+        </p:spPr>
+      </p:sp>
+      <p:sp>
+        <p:nvSpPr>
+          <p:cNvPr id="35" name="sources chart value 3"/>
+          <p:cNvSpPr txBox="1"/>
+          <p:nvPr/>
+        </p:nvSpPr>
+        <p:spPr>
+          <a:xfrm>
+            <a:off x="7063380" y="2944368"/>
+            <a:ext cx="502920" cy="493776"/>
+          </a:xfrm>
+          <a:prstGeom prst="rect">
+            <a:avLst/>
+          </a:prstGeom>
+          <a:noFill/>
+          <a:ln/>
+        </p:spPr>
+        <p:txBody>
+          <a:bodyPr wrap="square" lIns="0" tIns="0" rIns="0" bIns="0" rtlCol="0" anchor="ctr"/>
+          <a:lstStyle/>
+          <a:p>
+            <a:pPr indent="0" marL="0">
+              <a:buNone/>
+            </a:pPr>
+            <a:r>
+              <a:rPr lang="en-US" sz="1100" b="1" dirty="0">
+                <a:solidFill>
+                  <a:schemeClr val="tx1"/>
+                </a:solidFill>
+              </a:rPr>
+              <a:t>0,74</a:t>
+            </a:r>
+            <a:endParaRPr lang="en-US" sz="1100" dirty="0"/>
+          </a:p>
+        </p:txBody>
+      </p:sp>
+      <p:sp>
+        <p:nvSpPr>
+          <p:cNvPr id="36" name="sources chart label 4"/>
+          <p:cNvSpPr txBox="1"/>
+          <p:nvPr/>
+        </p:nvSpPr>
+        <p:spPr>
+          <a:xfrm>
+            <a:off x="4480560" y="3438144"/>
+            <a:ext cx="1600200" cy="493776"/>
+          </a:xfrm>
+          <a:prstGeom prst="rect">
+            <a:avLst/>
+          </a:prstGeom>
+          <a:noFill/>
+          <a:ln/>
+        </p:spPr>
+        <p:txBody>
+          <a:bodyPr wrap="square" lIns="0" tIns="0" rIns="0" bIns="0" rtlCol="0" anchor="ctr"/>
+          <a:lstStyle/>
+          <a:p>
+            <a:pPr algn="r" indent="0" marL="0">
+              <a:buNone/>
+            </a:pPr>
+            <a:r>
+              <a:rPr lang="en-US" sz="1000" dirty="0">
+                <a:solidFill>
+                  <a:schemeClr val="tx2"/>
+                </a:solidFill>
+              </a:rPr>
+              <a:t>+ 1С + реестры</a:t>
+            </a:r>
+            <a:endParaRPr lang="en-US" sz="1000" dirty="0"/>
+          </a:p>
+        </p:txBody>
+      </p:sp>
+      <p:sp>
+        <p:nvSpPr>
+          <p:cNvPr id="37" name="sources chart bar 4"/>
+          <p:cNvSpPr/>
+          <p:nvPr/>
+        </p:nvSpPr>
+        <p:spPr>
+          <a:xfrm>
+            <a:off x="6172200" y="3531961"/>
+            <a:ext cx="519872" cy="306141"/>
+          </a:xfrm>
+          <a:prstGeom prst="rect">
+            <a:avLst/>
+          </a:prstGeom>
+          <a:solidFill>
+            <a:srgbClr val="8DC63F"/>
+          </a:solidFill>
+          <a:ln/>
+        </p:spPr>
+      </p:sp>
+      <p:sp>
+        <p:nvSpPr>
+          <p:cNvPr id="38" name="sources chart value 4"/>
+          <p:cNvSpPr txBox="1"/>
+          <p:nvPr/>
+        </p:nvSpPr>
+        <p:spPr>
+          <a:xfrm>
+            <a:off x="6746936" y="3438144"/>
+            <a:ext cx="502920" cy="493776"/>
+          </a:xfrm>
+          <a:prstGeom prst="rect">
+            <a:avLst/>
+          </a:prstGeom>
+          <a:noFill/>
+          <a:ln/>
+        </p:spPr>
+        <p:txBody>
+          <a:bodyPr wrap="square" lIns="0" tIns="0" rIns="0" bIns="0" rtlCol="0" anchor="ctr"/>
+          <a:lstStyle/>
+          <a:p>
+            <a:pPr indent="0" marL="0">
+              <a:buNone/>
+            </a:pPr>
+            <a:r>
+              <a:rPr lang="en-US" sz="1100" b="1" dirty="0">
+                <a:solidFill>
+                  <a:schemeClr val="tx1"/>
+                </a:solidFill>
+              </a:rPr>
+              <a:t>0,46</a:t>
+            </a:r>
+            <a:endParaRPr lang="en-US" sz="1100" dirty="0"/>
+          </a:p>
+        </p:txBody>
+      </p:sp>
+      <p:sp>
+        <p:nvSpPr>
+          <p:cNvPr id="39" name="sources takeaway"/>
           <p:cNvSpPr txBox="1"/>
           <p:nvPr/>
         </p:nvSpPr>
@@ -7108,25 +7065,436 @@
           </a:p>
         </p:txBody>
       </p:sp>
-      <p:graphicFrame>
-        <p:nvGraphicFramePr>
-          <p:cNvPr id="9" name="models chart" descr=""/>
-          <p:cNvGraphicFramePr/>
-          <p:nvPr/>
-        </p:nvGraphicFramePr>
-        <p:xfrm>
-          <a:off x="3383280" y="1005840"/>
-          <a:ext cx="5303520" cy="2514600"/>
-        </p:xfrm>
-        <a:graphic xmlns:a="http://schemas.openxmlformats.org/drawingml/2006/main">
-          <a:graphicData uri="http://schemas.openxmlformats.org/drawingml/2006/chart">
-            <c:chart xmlns:c="http://schemas.openxmlformats.org/drawingml/2006/chart" r:id="rId1"/>
-          </a:graphicData>
-        </a:graphic>
-      </p:graphicFrame>
-      <p:sp>
-        <p:nvSpPr>
-          <p:cNvPr id="10" name="method card"/>
+      <p:sp>
+        <p:nvSpPr>
+          <p:cNvPr id="9" name="models chart title"/>
+          <p:cNvSpPr txBox="1"/>
+          <p:nvPr/>
+        </p:nvSpPr>
+        <p:spPr>
+          <a:xfrm>
+            <a:off x="3383280" y="1005840"/>
+            <a:ext cx="5303520" cy="384048"/>
+          </a:xfrm>
+          <a:prstGeom prst="rect">
+            <a:avLst/>
+          </a:prstGeom>
+          <a:noFill/>
+          <a:ln/>
+        </p:spPr>
+        <p:txBody>
+          <a:bodyPr wrap="square" lIns="0" tIns="0" rIns="0" bIns="0" rtlCol="0" anchor="t"/>
+          <a:lstStyle/>
+          <a:p>
+            <a:pPr indent="0" marL="0">
+              <a:buNone/>
+            </a:pPr>
+            <a:r>
+              <a:rPr lang="en-US" sz="1200" b="1" dirty="0">
+                <a:solidFill>
+                  <a:schemeClr val="tx1"/>
+                </a:solidFill>
+              </a:rPr>
+              <a:t>Ошибка фактического остатка, % месячного оборота (меньше — лучше)</a:t>
+            </a:r>
+            <a:endParaRPr lang="en-US" sz="1200" dirty="0"/>
+          </a:p>
+        </p:txBody>
+      </p:sp>
+      <p:sp>
+        <p:nvSpPr>
+          <p:cNvPr id="10" name="models chart axis"/>
+          <p:cNvSpPr/>
+          <p:nvPr/>
+        </p:nvSpPr>
+        <p:spPr>
+          <a:xfrm>
+            <a:off x="3383280" y="3108960"/>
+            <a:ext cx="5303520" cy="0"/>
+          </a:xfrm>
+          <a:prstGeom prst="line">
+            <a:avLst/>
+          </a:prstGeom>
+          <a:noFill/>
+          <a:ln w="12700">
+            <a:solidFill>
+              <a:srgbClr val="DFE6DA"/>
+            </a:solidFill>
+            <a:prstDash val="solid"/>
+          </a:ln>
+        </p:spPr>
+      </p:sp>
+      <p:sp>
+        <p:nvSpPr>
+          <p:cNvPr id="11" name="models chart bar 0"/>
+          <p:cNvSpPr/>
+          <p:nvPr/>
+        </p:nvSpPr>
+        <p:spPr>
+          <a:xfrm>
+            <a:off x="3714750" y="2232199"/>
+            <a:ext cx="662940" cy="876761"/>
+          </a:xfrm>
+          <a:prstGeom prst="rect">
+            <a:avLst/>
+          </a:prstGeom>
+          <a:solidFill>
+            <a:srgbClr val="7A8A80"/>
+          </a:solidFill>
+          <a:ln/>
+        </p:spPr>
+      </p:sp>
+      <p:sp>
+        <p:nvSpPr>
+          <p:cNvPr id="12" name="models chart value 0"/>
+          <p:cNvSpPr txBox="1"/>
+          <p:nvPr/>
+        </p:nvSpPr>
+        <p:spPr>
+          <a:xfrm>
+            <a:off x="3383280" y="1957879"/>
+            <a:ext cx="1325880" cy="256032"/>
+          </a:xfrm>
+          <a:prstGeom prst="rect">
+            <a:avLst/>
+          </a:prstGeom>
+          <a:noFill/>
+          <a:ln/>
+        </p:spPr>
+        <p:txBody>
+          <a:bodyPr wrap="square" lIns="0" tIns="0" rIns="0" bIns="0" rtlCol="0" anchor="ctr"/>
+          <a:lstStyle/>
+          <a:p>
+            <a:pPr algn="ctr" indent="0" marL="0">
+              <a:buNone/>
+            </a:pPr>
+            <a:r>
+              <a:rPr lang="en-US" sz="1200" b="1" dirty="0">
+                <a:solidFill>
+                  <a:schemeClr val="tx1"/>
+                </a:solidFill>
+              </a:rPr>
+              <a:t>13,3%</a:t>
+            </a:r>
+            <a:endParaRPr lang="en-US" sz="1200" dirty="0"/>
+          </a:p>
+        </p:txBody>
+      </p:sp>
+      <p:sp>
+        <p:nvSpPr>
+          <p:cNvPr id="13" name="models chart label 0"/>
+          <p:cNvSpPr txBox="1"/>
+          <p:nvPr/>
+        </p:nvSpPr>
+        <p:spPr>
+          <a:xfrm>
+            <a:off x="3410712" y="3145536"/>
+            <a:ext cx="1271016" cy="374904"/>
+          </a:xfrm>
+          <a:prstGeom prst="rect">
+            <a:avLst/>
+          </a:prstGeom>
+          <a:noFill/>
+          <a:ln/>
+        </p:spPr>
+        <p:txBody>
+          <a:bodyPr wrap="square" lIns="0" tIns="0" rIns="0" bIns="0" rtlCol="0" anchor="t"/>
+          <a:lstStyle/>
+          <a:p>
+            <a:pPr algn="ctr" indent="0" marL="0">
+              <a:buNone/>
+            </a:pPr>
+            <a:r>
+              <a:rPr lang="en-US" sz="1000" dirty="0">
+                <a:solidFill>
+                  <a:schemeClr val="tx2"/>
+                </a:solidFill>
+              </a:rPr>
+              <a:t>Остаток не изменится</a:t>
+            </a:r>
+            <a:endParaRPr lang="en-US" sz="1000" dirty="0"/>
+          </a:p>
+        </p:txBody>
+      </p:sp>
+      <p:sp>
+        <p:nvSpPr>
+          <p:cNvPr id="14" name="models chart bar 1"/>
+          <p:cNvSpPr/>
+          <p:nvPr/>
+        </p:nvSpPr>
+        <p:spPr>
+          <a:xfrm>
+            <a:off x="5040630" y="1691640"/>
+            <a:ext cx="662940" cy="1417320"/>
+          </a:xfrm>
+          <a:prstGeom prst="rect">
+            <a:avLst/>
+          </a:prstGeom>
+          <a:solidFill>
+            <a:srgbClr val="7A8A80"/>
+          </a:solidFill>
+          <a:ln/>
+        </p:spPr>
+      </p:sp>
+      <p:sp>
+        <p:nvSpPr>
+          <p:cNvPr id="15" name="models chart value 1"/>
+          <p:cNvSpPr txBox="1"/>
+          <p:nvPr/>
+        </p:nvSpPr>
+        <p:spPr>
+          <a:xfrm>
+            <a:off x="4709160" y="1417320"/>
+            <a:ext cx="1325880" cy="256032"/>
+          </a:xfrm>
+          <a:prstGeom prst="rect">
+            <a:avLst/>
+          </a:prstGeom>
+          <a:noFill/>
+          <a:ln/>
+        </p:spPr>
+        <p:txBody>
+          <a:bodyPr wrap="square" lIns="0" tIns="0" rIns="0" bIns="0" rtlCol="0" anchor="ctr"/>
+          <a:lstStyle/>
+          <a:p>
+            <a:pPr algn="ctr" indent="0" marL="0">
+              <a:buNone/>
+            </a:pPr>
+            <a:r>
+              <a:rPr lang="en-US" sz="1200" b="1" dirty="0">
+                <a:solidFill>
+                  <a:schemeClr val="tx1"/>
+                </a:solidFill>
+              </a:rPr>
+              <a:t>21,5%</a:t>
+            </a:r>
+            <a:endParaRPr lang="en-US" sz="1200" dirty="0"/>
+          </a:p>
+        </p:txBody>
+      </p:sp>
+      <p:sp>
+        <p:nvSpPr>
+          <p:cNvPr id="16" name="models chart label 1"/>
+          <p:cNvSpPr txBox="1"/>
+          <p:nvPr/>
+        </p:nvSpPr>
+        <p:spPr>
+          <a:xfrm>
+            <a:off x="4736592" y="3145536"/>
+            <a:ext cx="1271016" cy="374904"/>
+          </a:xfrm>
+          <a:prstGeom prst="rect">
+            <a:avLst/>
+          </a:prstGeom>
+          <a:noFill/>
+          <a:ln/>
+        </p:spPr>
+        <p:txBody>
+          <a:bodyPr wrap="square" lIns="0" tIns="0" rIns="0" bIns="0" rtlCol="0" anchor="t"/>
+          <a:lstStyle/>
+          <a:p>
+            <a:pPr algn="ctr" indent="0" marL="0">
+              <a:buNone/>
+            </a:pPr>
+            <a:r>
+              <a:rPr lang="en-US" sz="1000" dirty="0">
+                <a:solidFill>
+                  <a:schemeClr val="tx2"/>
+                </a:solidFill>
+              </a:rPr>
+              <a:t>Наивная (повтор 28 дней)</a:t>
+            </a:r>
+            <a:endParaRPr lang="en-US" sz="1000" dirty="0"/>
+          </a:p>
+        </p:txBody>
+      </p:sp>
+      <p:sp>
+        <p:nvSpPr>
+          <p:cNvPr id="17" name="models chart bar 2"/>
+          <p:cNvSpPr/>
+          <p:nvPr/>
+        </p:nvSpPr>
+        <p:spPr>
+          <a:xfrm>
+            <a:off x="6366510" y="1856445"/>
+            <a:ext cx="662940" cy="1252515"/>
+          </a:xfrm>
+          <a:prstGeom prst="rect">
+            <a:avLst/>
+          </a:prstGeom>
+          <a:solidFill>
+            <a:srgbClr val="7A8A80"/>
+          </a:solidFill>
+          <a:ln/>
+        </p:spPr>
+      </p:sp>
+      <p:sp>
+        <p:nvSpPr>
+          <p:cNvPr id="18" name="models chart value 2"/>
+          <p:cNvSpPr txBox="1"/>
+          <p:nvPr/>
+        </p:nvSpPr>
+        <p:spPr>
+          <a:xfrm>
+            <a:off x="6035040" y="1582125"/>
+            <a:ext cx="1325880" cy="256032"/>
+          </a:xfrm>
+          <a:prstGeom prst="rect">
+            <a:avLst/>
+          </a:prstGeom>
+          <a:noFill/>
+          <a:ln/>
+        </p:spPr>
+        <p:txBody>
+          <a:bodyPr wrap="square" lIns="0" tIns="0" rIns="0" bIns="0" rtlCol="0" anchor="ctr"/>
+          <a:lstStyle/>
+          <a:p>
+            <a:pPr algn="ctr" indent="0" marL="0">
+              <a:buNone/>
+            </a:pPr>
+            <a:r>
+              <a:rPr lang="en-US" sz="1200" b="1" dirty="0">
+                <a:solidFill>
+                  <a:schemeClr val="tx1"/>
+                </a:solidFill>
+              </a:rPr>
+              <a:t>19,0%</a:t>
+            </a:r>
+            <a:endParaRPr lang="en-US" sz="1200" dirty="0"/>
+          </a:p>
+        </p:txBody>
+      </p:sp>
+      <p:sp>
+        <p:nvSpPr>
+          <p:cNvPr id="19" name="models chart label 2"/>
+          <p:cNvSpPr txBox="1"/>
+          <p:nvPr/>
+        </p:nvSpPr>
+        <p:spPr>
+          <a:xfrm>
+            <a:off x="6062472" y="3145536"/>
+            <a:ext cx="1271016" cy="374904"/>
+          </a:xfrm>
+          <a:prstGeom prst="rect">
+            <a:avLst/>
+          </a:prstGeom>
+          <a:noFill/>
+          <a:ln/>
+        </p:spPr>
+        <p:txBody>
+          <a:bodyPr wrap="square" lIns="0" tIns="0" rIns="0" bIns="0" rtlCol="0" anchor="t"/>
+          <a:lstStyle/>
+          <a:p>
+            <a:pPr algn="ctr" indent="0" marL="0">
+              <a:buNone/>
+            </a:pPr>
+            <a:r>
+              <a:rPr lang="en-US" sz="1000" dirty="0">
+                <a:solidFill>
+                  <a:schemeClr val="tx2"/>
+                </a:solidFill>
+              </a:rPr>
+              <a:t>Сезонная (ETS)</a:t>
+            </a:r>
+            <a:endParaRPr lang="en-US" sz="1000" dirty="0"/>
+          </a:p>
+        </p:txBody>
+      </p:sp>
+      <p:sp>
+        <p:nvSpPr>
+          <p:cNvPr id="20" name="models chart bar 3"/>
+          <p:cNvSpPr/>
+          <p:nvPr/>
+        </p:nvSpPr>
+        <p:spPr>
+          <a:xfrm>
+            <a:off x="7692390" y="2245384"/>
+            <a:ext cx="662940" cy="863576"/>
+          </a:xfrm>
+          <a:prstGeom prst="rect">
+            <a:avLst/>
+          </a:prstGeom>
+          <a:solidFill>
+            <a:srgbClr val="11553F"/>
+          </a:solidFill>
+          <a:ln/>
+        </p:spPr>
+      </p:sp>
+      <p:sp>
+        <p:nvSpPr>
+          <p:cNvPr id="21" name="models chart value 3"/>
+          <p:cNvSpPr txBox="1"/>
+          <p:nvPr/>
+        </p:nvSpPr>
+        <p:spPr>
+          <a:xfrm>
+            <a:off x="7360920" y="1971064"/>
+            <a:ext cx="1325880" cy="256032"/>
+          </a:xfrm>
+          <a:prstGeom prst="rect">
+            <a:avLst/>
+          </a:prstGeom>
+          <a:noFill/>
+          <a:ln/>
+        </p:spPr>
+        <p:txBody>
+          <a:bodyPr wrap="square" lIns="0" tIns="0" rIns="0" bIns="0" rtlCol="0" anchor="ctr"/>
+          <a:lstStyle/>
+          <a:p>
+            <a:pPr algn="ctr" indent="0" marL="0">
+              <a:buNone/>
+            </a:pPr>
+            <a:r>
+              <a:rPr lang="en-US" sz="1200" b="1" dirty="0">
+                <a:solidFill>
+                  <a:schemeClr val="tx1"/>
+                </a:solidFill>
+              </a:rPr>
+              <a:t>13,1%</a:t>
+            </a:r>
+            <a:endParaRPr lang="en-US" sz="1200" dirty="0"/>
+          </a:p>
+        </p:txBody>
+      </p:sp>
+      <p:sp>
+        <p:nvSpPr>
+          <p:cNvPr id="22" name="models chart label 3"/>
+          <p:cNvSpPr txBox="1"/>
+          <p:nvPr/>
+        </p:nvSpPr>
+        <p:spPr>
+          <a:xfrm>
+            <a:off x="7388352" y="3145536"/>
+            <a:ext cx="1271016" cy="374904"/>
+          </a:xfrm>
+          <a:prstGeom prst="rect">
+            <a:avLst/>
+          </a:prstGeom>
+          <a:noFill/>
+          <a:ln/>
+        </p:spPr>
+        <p:txBody>
+          <a:bodyPr wrap="square" lIns="0" tIns="0" rIns="0" bIns="0" rtlCol="0" anchor="t"/>
+          <a:lstStyle/>
+          <a:p>
+            <a:pPr algn="ctr" indent="0" marL="0">
+              <a:buNone/>
+            </a:pPr>
+            <a:r>
+              <a:rPr lang="en-US" sz="1000" dirty="0">
+                <a:solidFill>
+                  <a:schemeClr val="tx2"/>
+                </a:solidFill>
+              </a:rPr>
+              <a:t>Наш прогноз</a:t>
+            </a:r>
+            <a:endParaRPr lang="en-US" sz="1000" dirty="0"/>
+          </a:p>
+        </p:txBody>
+      </p:sp>
+      <p:sp>
+        <p:nvSpPr>
+          <p:cNvPr id="23" name="method card"/>
           <p:cNvSpPr/>
           <p:nvPr/>
         </p:nvSpPr>
@@ -7148,7 +7516,7 @@
       </p:sp>
       <p:sp>
         <p:nvSpPr>
-          <p:cNvPr id="11" name="method text"/>
+          <p:cNvPr id="24" name="method text"/>
           <p:cNvSpPr txBox="1"/>
           <p:nvPr/>
         </p:nvSpPr>
@@ -7708,7 +8076,7 @@
                   <a:schemeClr val="tx1"/>
                 </a:solidFill>
               </a:rPr>
-              <a:t>HTTPS: Caddy + docker compose, готово к запуску</a:t>
+              <a:t>HTTPS: Caddy + docker compose, развёрнуто на VPS</a:t>
             </a:r>
             <a:endParaRPr lang="en-US" sz="1100" dirty="0"/>
           </a:p>

--- a/docs/presentation.pptx
+++ b/docs/presentation.pptx
@@ -117,36 +117,36 @@
   <p:extLst>
     <p:ext uri="{521415D9-36F7-43E2-AB2F-B90AF26B5E84}">
       <p14:sectionLst xmlns:p14="http://schemas.microsoft.com/office/powerpoint/2010/main">
-        <p14:section name="Начало" id="{bec267f8-b1cd-53ac-1e2f-04a4d36a238f}">
+        <p14:section name="Начало" id="{3a771a77-9f80-1e77-f8a4-6de4d317a5af}">
           <p14:sldIdLst>
             <p14:sldId id="256"/>
           </p14:sldIdLst>
         </p14:section>
-        <p14:section name="Проблема и решение" id="{e0c4b6d5-f1d5-d586-3f78-599c6ddfa2ec}">
+        <p14:section name="Проблема и решение" id="{8ac53212-6f00-6ca1-0ac0-8aeba547b420}">
           <p14:sldIdLst>
             <p14:sldId id="257"/>
             <p14:sldId id="258"/>
           </p14:sldIdLst>
         </p14:section>
-        <p14:section name="Демо" id="{32bb21c3-59e4-bc5f-5bf3-834d8295f06e}">
+        <p14:section name="Демо" id="{ad4820c9-c26e-d468-798f-0a164a562a04}">
           <p14:sldIdLst>
             <p14:sldId id="259"/>
             <p14:sldId id="260"/>
           </p14:sldIdLst>
         </p14:section>
-        <p14:section name="Данные и подход" id="{a297a78f-0de9-dcd0-4aff-2fc0665a8b14}">
+        <p14:section name="Данные и подход" id="{35d6067a-6621-7610-7d7c-c6635c96748b}">
           <p14:sldIdLst>
             <p14:sldId id="261"/>
             <p14:sldId id="262"/>
             <p14:sldId id="263"/>
           </p14:sldIdLst>
         </p14:section>
-        <p14:section name="Архитектура" id="{092cd949-deb8-d262-cfa1-c9638e87662e}">
+        <p14:section name="Архитектура" id="{ffb43f46-79f2-96e8-ac7a-cc89781266bf}">
           <p14:sldIdLst>
             <p14:sldId id="264"/>
           </p14:sldIdLst>
         </p14:section>
-        <p14:section name="Итоги" id="{f44422fc-64c5-da0e-e197-fe5665243350}">
+        <p14:section name="Итоги" id="{35561921-db74-ff72-30ab-781e8fc4109a}">
           <p14:sldIdLst>
             <p14:sldId id="265"/>
             <p14:sldId id="266"/>
@@ -2165,7 +2165,7 @@
                   <a:srgbClr val="A9C7B5"/>
                 </a:solidFill>
               </a:rPr>
-              <a:t>Хакатон Банка Центр-Инвест</a:t>
+              <a:t>Хакатон Банка Центр-Инвест · команда chikenbyrger</a:t>
             </a:r>
             <a:endParaRPr lang="en-US" sz="1400" dirty="0"/>
           </a:p>
